--- a/第4章-空间参考与坐标转换/第2节-坐标转换及可视化.pptx
+++ b/第4章-空间参考与坐标转换/第2节-坐标转换及可视化.pptx
@@ -6,10 +6,10 @@
     <p:sldMasterId id="2147484986" r:id="rId2"/>
   </p:sldMasterIdLst>
   <p:notesMasterIdLst>
-    <p:notesMasterId r:id="rId14"/>
+    <p:notesMasterId r:id="rId15"/>
   </p:notesMasterIdLst>
   <p:handoutMasterIdLst>
-    <p:handoutMasterId r:id="rId15"/>
+    <p:handoutMasterId r:id="rId16"/>
   </p:handoutMasterIdLst>
   <p:sldIdLst>
     <p:sldId id="2708" r:id="rId3"/>
@@ -19,15 +19,16 @@
     <p:sldId id="2774" r:id="rId7"/>
     <p:sldId id="2775" r:id="rId8"/>
     <p:sldId id="2777" r:id="rId9"/>
-    <p:sldId id="2761" r:id="rId10"/>
-    <p:sldId id="2766" r:id="rId11"/>
-    <p:sldId id="2778" r:id="rId12"/>
-    <p:sldId id="2722" r:id="rId13"/>
+    <p:sldId id="2779" r:id="rId10"/>
+    <p:sldId id="2761" r:id="rId11"/>
+    <p:sldId id="2766" r:id="rId12"/>
+    <p:sldId id="2778" r:id="rId13"/>
+    <p:sldId id="2722" r:id="rId14"/>
   </p:sldIdLst>
-  <p:sldSz cx="9144000" cy="6858000" type="screen4x3"/>
+  <p:sldSz cx="12192000" cy="6858000"/>
   <p:notesSz cx="7099300" cy="10234613"/>
   <p:custDataLst>
-    <p:tags r:id="rId16"/>
+    <p:tags r:id="rId17"/>
   </p:custDataLst>
   <p:defaultTextStyle>
     <a:defPPr>
@@ -157,257 +158,257 @@
   <p:extLst>
     <p:ext uri="{EFAFB233-063F-42B5-8137-9DF3F51BA10A}">
       <p15:sldGuideLst xmlns:p15="http://schemas.microsoft.com/office/powerpoint/2012/main">
-        <p15:guide id="1" orient="horz" pos="663">
+        <p15:guide id="1" orient="horz" pos="663" userDrawn="1">
           <p15:clr>
             <a:srgbClr val="A4A3A4"/>
           </p15:clr>
         </p15:guide>
-        <p15:guide id="2" orient="horz" pos="1412">
+        <p15:guide id="2" orient="horz" pos="1412" userDrawn="1">
           <p15:clr>
             <a:srgbClr val="A4A3A4"/>
           </p15:clr>
         </p15:guide>
-        <p15:guide id="3" pos="181">
+        <p15:guide id="3" pos="241" userDrawn="1">
           <p15:clr>
             <a:srgbClr val="A4A3A4"/>
           </p15:clr>
         </p15:guide>
-        <p15:guide id="4" pos="5556">
+        <p15:guide id="4" pos="7408" userDrawn="1">
           <p15:clr>
             <a:srgbClr val="A4A3A4"/>
           </p15:clr>
         </p15:guide>
-        <p15:guide id="5" pos="2903">
+        <p15:guide id="5" pos="3871" userDrawn="1">
           <p15:clr>
             <a:srgbClr val="A4A3A4"/>
           </p15:clr>
         </p15:guide>
-        <p15:guide id="6" orient="horz" pos="700">
+        <p15:guide id="6" orient="horz" pos="700" userDrawn="1">
           <p15:clr>
             <a:srgbClr val="A4A3A4"/>
           </p15:clr>
         </p15:guide>
-        <p15:guide id="7" orient="horz" pos="4119">
+        <p15:guide id="7" orient="horz" pos="4119" userDrawn="1">
           <p15:clr>
             <a:srgbClr val="A4A3A4"/>
           </p15:clr>
         </p15:guide>
-        <p15:guide id="8" pos="311">
+        <p15:guide id="8" pos="415" userDrawn="1">
           <p15:clr>
             <a:srgbClr val="A4A3A4"/>
           </p15:clr>
         </p15:guide>
-        <p15:guide id="9" pos="5501">
+        <p15:guide id="9" pos="7335" userDrawn="1">
           <p15:clr>
             <a:srgbClr val="A4A3A4"/>
           </p15:clr>
         </p15:guide>
-        <p15:guide id="10" orient="horz" pos="462">
+        <p15:guide id="10" orient="horz" pos="462" userDrawn="1">
           <p15:clr>
             <a:srgbClr val="A4A3A4"/>
           </p15:clr>
         </p15:guide>
-        <p15:guide id="11" pos="77">
+        <p15:guide id="11" pos="103" userDrawn="1">
           <p15:clr>
             <a:srgbClr val="A4A3A4"/>
           </p15:clr>
         </p15:guide>
-        <p15:guide id="12" pos="72">
+        <p15:guide id="12" pos="96" userDrawn="1">
           <p15:clr>
             <a:srgbClr val="A4A3A4"/>
           </p15:clr>
         </p15:guide>
-        <p15:guide id="13" orient="horz" pos="2">
+        <p15:guide id="13" orient="horz" pos="2" userDrawn="1">
           <p15:clr>
             <a:srgbClr val="A4A3A4"/>
           </p15:clr>
         </p15:guide>
-        <p15:guide id="14" pos="807">
+        <p15:guide id="14" pos="1076" userDrawn="1">
           <p15:clr>
             <a:srgbClr val="A4A3A4"/>
           </p15:clr>
         </p15:guide>
-        <p15:guide id="15" pos="1463">
+        <p15:guide id="15" pos="1951" userDrawn="1">
           <p15:clr>
             <a:srgbClr val="A4A3A4"/>
           </p15:clr>
         </p15:guide>
-        <p15:guide id="16" pos="2079">
+        <p15:guide id="16" pos="2772" userDrawn="1">
           <p15:clr>
             <a:srgbClr val="A4A3A4"/>
           </p15:clr>
         </p15:guide>
-        <p15:guide id="17" pos="2714">
+        <p15:guide id="17" pos="3619" userDrawn="1">
           <p15:clr>
             <a:srgbClr val="A4A3A4"/>
           </p15:clr>
         </p15:guide>
-        <p15:guide id="18" pos="3370">
+        <p15:guide id="18" pos="4493" userDrawn="1">
           <p15:clr>
             <a:srgbClr val="A4A3A4"/>
           </p15:clr>
         </p15:guide>
-        <p15:guide id="19" pos="3985">
+        <p15:guide id="19" pos="5313" userDrawn="1">
           <p15:clr>
             <a:srgbClr val="A4A3A4"/>
           </p15:clr>
         </p15:guide>
-        <p15:guide id="20" pos="4631">
+        <p15:guide id="20" pos="6175" userDrawn="1">
           <p15:clr>
             <a:srgbClr val="A4A3A4"/>
           </p15:clr>
         </p15:guide>
-        <p15:guide id="21" orient="horz" pos="581">
+        <p15:guide id="21" orient="horz" pos="581" userDrawn="1">
           <p15:clr>
             <a:srgbClr val="A4A3A4"/>
           </p15:clr>
         </p15:guide>
-        <p15:guide id="22" orient="horz" pos="3230">
+        <p15:guide id="22" orient="horz" pos="3230" userDrawn="1">
           <p15:clr>
             <a:srgbClr val="A4A3A4"/>
           </p15:clr>
         </p15:guide>
-        <p15:guide id="23" orient="horz" pos="1230">
+        <p15:guide id="23" orient="horz" pos="1230" userDrawn="1">
           <p15:clr>
             <a:srgbClr val="A4A3A4"/>
           </p15:clr>
         </p15:guide>
-        <p15:guide id="24" orient="horz">
+        <p15:guide id="24" orient="horz" userDrawn="1">
           <p15:clr>
             <a:srgbClr val="A4A3A4"/>
           </p15:clr>
         </p15:guide>
-        <p15:guide id="25" orient="horz" pos="1450">
+        <p15:guide id="25" orient="horz" pos="1450" userDrawn="1">
           <p15:clr>
             <a:srgbClr val="A4A3A4"/>
           </p15:clr>
         </p15:guide>
-        <p15:guide id="26" pos="281">
+        <p15:guide id="26" pos="375" userDrawn="1">
           <p15:clr>
             <a:srgbClr val="A4A3A4"/>
           </p15:clr>
         </p15:guide>
-        <p15:guide id="27" orient="horz" pos="3095">
+        <p15:guide id="27" orient="horz" pos="3095" userDrawn="1">
           <p15:clr>
             <a:srgbClr val="A4A3A4"/>
           </p15:clr>
         </p15:guide>
-        <p15:guide id="28" orient="horz" pos="2372">
+        <p15:guide id="28" orient="horz" pos="2372" userDrawn="1">
           <p15:clr>
             <a:srgbClr val="A4A3A4"/>
           </p15:clr>
         </p15:guide>
-        <p15:guide id="29" orient="horz" pos="4159">
+        <p15:guide id="29" orient="horz" pos="4159" userDrawn="1">
           <p15:clr>
             <a:srgbClr val="A4A3A4"/>
           </p15:clr>
         </p15:guide>
-        <p15:guide id="30" pos="313">
+        <p15:guide id="30" pos="417" userDrawn="1">
           <p15:clr>
             <a:srgbClr val="A4A3A4"/>
           </p15:clr>
         </p15:guide>
-        <p15:guide id="31" pos="1655">
+        <p15:guide id="31" pos="2207" userDrawn="1">
           <p15:clr>
             <a:srgbClr val="A4A3A4"/>
           </p15:clr>
         </p15:guide>
-        <p15:guide id="32" pos="5727">
+        <p15:guide id="32" pos="7636" userDrawn="1">
           <p15:clr>
             <a:srgbClr val="A4A3A4"/>
           </p15:clr>
         </p15:guide>
-        <p15:guide id="33" orient="horz" pos="632">
+        <p15:guide id="33" orient="horz" pos="632" userDrawn="1">
           <p15:clr>
             <a:srgbClr val="A4A3A4"/>
           </p15:clr>
         </p15:guide>
-        <p15:guide id="34" orient="horz" pos="1461">
+        <p15:guide id="34" orient="horz" pos="1461" userDrawn="1">
           <p15:clr>
             <a:srgbClr val="A4A3A4"/>
           </p15:clr>
         </p15:guide>
-        <p15:guide id="35" orient="horz" pos="2262">
+        <p15:guide id="35" orient="horz" pos="2262" userDrawn="1">
           <p15:clr>
             <a:srgbClr val="A4A3A4"/>
           </p15:clr>
         </p15:guide>
-        <p15:guide id="36" orient="horz" pos="3072">
+        <p15:guide id="36" orient="horz" pos="3072" userDrawn="1">
           <p15:clr>
             <a:srgbClr val="A4A3A4"/>
           </p15:clr>
         </p15:guide>
-        <p15:guide id="37" pos="765">
+        <p15:guide id="37" pos="1020" userDrawn="1">
           <p15:clr>
             <a:srgbClr val="A4A3A4"/>
           </p15:clr>
         </p15:guide>
-        <p15:guide id="38" pos="5580">
+        <p15:guide id="38" pos="7440" userDrawn="1">
           <p15:clr>
             <a:srgbClr val="A4A3A4"/>
           </p15:clr>
         </p15:guide>
-        <p15:guide id="39" pos="5039">
+        <p15:guide id="39" pos="6719" userDrawn="1">
           <p15:clr>
             <a:srgbClr val="A4A3A4"/>
           </p15:clr>
         </p15:guide>
-        <p15:guide id="40" orient="horz" pos="621">
+        <p15:guide id="40" orient="horz" pos="621" userDrawn="1">
           <p15:clr>
             <a:srgbClr val="A4A3A4"/>
           </p15:clr>
         </p15:guide>
-        <p15:guide id="41" orient="horz" pos="38">
+        <p15:guide id="41" orient="horz" pos="38" userDrawn="1">
           <p15:clr>
             <a:srgbClr val="A4A3A4"/>
           </p15:clr>
         </p15:guide>
-        <p15:guide id="42" orient="horz" pos="4319">
+        <p15:guide id="42" orient="horz" pos="4319" userDrawn="1">
           <p15:clr>
             <a:srgbClr val="A4A3A4"/>
           </p15:clr>
         </p15:guide>
-        <p15:guide id="43" orient="horz" pos="39">
+        <p15:guide id="43" orient="horz" pos="39" userDrawn="1">
           <p15:clr>
             <a:srgbClr val="A4A3A4"/>
           </p15:clr>
         </p15:guide>
-        <p15:guide id="44" pos="3367">
+        <p15:guide id="44" pos="4489" userDrawn="1">
           <p15:clr>
             <a:srgbClr val="A4A3A4"/>
           </p15:clr>
         </p15:guide>
-        <p15:guide id="45" pos="4655">
+        <p15:guide id="45" pos="6207" userDrawn="1">
           <p15:clr>
             <a:srgbClr val="A4A3A4"/>
           </p15:clr>
         </p15:guide>
-        <p15:guide id="46" orient="horz" pos="1">
+        <p15:guide id="46" orient="horz" pos="1" userDrawn="1">
           <p15:clr>
             <a:srgbClr val="A4A3A4"/>
           </p15:clr>
         </p15:guide>
-        <p15:guide id="47" orient="horz" pos="4067">
+        <p15:guide id="47" orient="horz" pos="4067" userDrawn="1">
           <p15:clr>
             <a:srgbClr val="A4A3A4"/>
           </p15:clr>
         </p15:guide>
-        <p15:guide id="48" orient="horz" pos="601">
+        <p15:guide id="48" orient="horz" pos="601" userDrawn="1">
           <p15:clr>
             <a:srgbClr val="A4A3A4"/>
           </p15:clr>
         </p15:guide>
-        <p15:guide id="49" pos="149">
+        <p15:guide id="49" pos="199" userDrawn="1">
           <p15:clr>
             <a:srgbClr val="A4A3A4"/>
           </p15:clr>
         </p15:guide>
-        <p15:guide id="50" pos="5589">
+        <p15:guide id="50" pos="7452" userDrawn="1">
           <p15:clr>
             <a:srgbClr val="A4A3A4"/>
           </p15:clr>
         </p15:guide>
-        <p15:guide id="51" pos="3227">
+        <p15:guide id="51" pos="4303" userDrawn="1">
           <p15:clr>
             <a:srgbClr val="A4A3A4"/>
           </p15:clr>
@@ -8899,8 +8900,8 @@
         </p:nvSpPr>
         <p:spPr bwMode="auto">
           <a:xfrm>
-            <a:off x="993775" y="768350"/>
-            <a:ext cx="5116513" cy="3836988"/>
+            <a:off x="142875" y="768350"/>
+            <a:ext cx="6818313" cy="3836988"/>
           </a:xfrm>
           <a:prstGeom prst="rect">
             <a:avLst/>
@@ -9272,6 +9273,10 @@
           </p:nvPr>
         </p:nvSpPr>
         <p:spPr>
+          <a:xfrm>
+            <a:off x="142875" y="768350"/>
+            <a:ext cx="6818313" cy="3836988"/>
+          </a:xfrm>
           <a:ln/>
         </p:spPr>
       </p:sp>
@@ -9384,7 +9389,12 @@
             <p:ph type="sldImg"/>
           </p:nvPr>
         </p:nvSpPr>
-        <p:spPr/>
+        <p:spPr>
+          <a:xfrm>
+            <a:off x="142875" y="768350"/>
+            <a:ext cx="6818313" cy="3836988"/>
+          </a:xfrm>
+        </p:spPr>
       </p:sp>
       <p:sp>
         <p:nvSpPr>
@@ -9445,7 +9455,12 @@
             <p:ph type="sldImg"/>
           </p:nvPr>
         </p:nvSpPr>
-        <p:spPr/>
+        <p:spPr>
+          <a:xfrm>
+            <a:off x="142875" y="768350"/>
+            <a:ext cx="6818313" cy="3836988"/>
+          </a:xfrm>
+        </p:spPr>
       </p:sp>
       <p:sp>
         <p:nvSpPr>
@@ -9506,7 +9521,12 @@
             <p:ph type="sldImg"/>
           </p:nvPr>
         </p:nvSpPr>
-        <p:spPr/>
+        <p:spPr>
+          <a:xfrm>
+            <a:off x="142875" y="768350"/>
+            <a:ext cx="6818313" cy="3836988"/>
+          </a:xfrm>
+        </p:spPr>
       </p:sp>
       <p:sp>
         <p:nvSpPr>
@@ -9599,7 +9619,12 @@
             <p:ph type="sldImg"/>
           </p:nvPr>
         </p:nvSpPr>
-        <p:spPr/>
+        <p:spPr>
+          <a:xfrm>
+            <a:off x="142875" y="768350"/>
+            <a:ext cx="6818313" cy="3836988"/>
+          </a:xfrm>
+        </p:spPr>
       </p:sp>
       <p:sp>
         <p:nvSpPr>
@@ -9660,7 +9685,12 @@
             <p:ph type="sldImg"/>
           </p:nvPr>
         </p:nvSpPr>
-        <p:spPr/>
+        <p:spPr>
+          <a:xfrm>
+            <a:off x="142875" y="768350"/>
+            <a:ext cx="6818313" cy="3836988"/>
+          </a:xfrm>
+        </p:spPr>
       </p:sp>
       <p:sp>
         <p:nvSpPr>
@@ -9721,7 +9751,12 @@
             <p:ph type="sldImg"/>
           </p:nvPr>
         </p:nvSpPr>
-        <p:spPr/>
+        <p:spPr>
+          <a:xfrm>
+            <a:off x="142875" y="768350"/>
+            <a:ext cx="6818313" cy="3836988"/>
+          </a:xfrm>
+        </p:spPr>
       </p:sp>
       <p:sp>
         <p:nvSpPr>
@@ -9782,7 +9817,12 @@
             <p:ph type="sldImg"/>
           </p:nvPr>
         </p:nvSpPr>
-        <p:spPr/>
+        <p:spPr>
+          <a:xfrm>
+            <a:off x="142875" y="768350"/>
+            <a:ext cx="6818313" cy="3836988"/>
+          </a:xfrm>
+        </p:spPr>
       </p:sp>
       <p:sp>
         <p:nvSpPr>
@@ -9843,7 +9883,12 @@
             <p:ph type="sldImg"/>
           </p:nvPr>
         </p:nvSpPr>
-        <p:spPr/>
+        <p:spPr>
+          <a:xfrm>
+            <a:off x="142875" y="768350"/>
+            <a:ext cx="6818313" cy="3836988"/>
+          </a:xfrm>
+        </p:spPr>
       </p:sp>
       <p:sp>
         <p:nvSpPr>
@@ -9904,7 +9949,12 @@
             <p:ph type="sldImg"/>
           </p:nvPr>
         </p:nvSpPr>
-        <p:spPr/>
+        <p:spPr>
+          <a:xfrm>
+            <a:off x="142875" y="768350"/>
+            <a:ext cx="6818313" cy="3836988"/>
+          </a:xfrm>
+        </p:spPr>
       </p:sp>
       <p:sp>
         <p:nvSpPr>
@@ -9965,7 +10015,12 @@
             <p:ph type="sldImg"/>
           </p:nvPr>
         </p:nvSpPr>
-        <p:spPr/>
+        <p:spPr>
+          <a:xfrm>
+            <a:off x="142875" y="768350"/>
+            <a:ext cx="6818313" cy="3836988"/>
+          </a:xfrm>
+        </p:spPr>
       </p:sp>
       <p:sp>
         <p:nvSpPr>
@@ -10084,7 +10139,7 @@
         <p:spPr bwMode="auto">
           <a:xfrm>
             <a:off x="0" y="2276475"/>
-            <a:ext cx="9144000" cy="2665413"/>
+            <a:ext cx="12192000" cy="369332"/>
           </a:xfrm>
           <a:prstGeom prst="rect">
             <a:avLst/>
@@ -10211,7 +10266,7 @@
             <a:pPr>
               <a:defRPr/>
             </a:pPr>
-            <a:endParaRPr kumimoji="0" lang="zh-CN" altLang="en-US">
+            <a:endParaRPr kumimoji="0" lang="zh-CN" altLang="en-US" sz="2400">
               <a:solidFill>
                 <a:prstClr val="white"/>
               </a:solidFill>
@@ -10231,7 +10286,7 @@
         <p:spPr bwMode="auto">
           <a:xfrm>
             <a:off x="0" y="2203450"/>
-            <a:ext cx="9144000" cy="71438"/>
+            <a:ext cx="12192000" cy="369332"/>
           </a:xfrm>
           <a:prstGeom prst="rect">
             <a:avLst/>
@@ -10358,7 +10413,7 @@
             <a:pPr>
               <a:defRPr/>
             </a:pPr>
-            <a:endParaRPr kumimoji="0" lang="zh-CN" altLang="en-US">
+            <a:endParaRPr kumimoji="0" lang="zh-CN" altLang="en-US" sz="2400">
               <a:solidFill>
                 <a:prstClr val="white"/>
               </a:solidFill>
@@ -10378,7 +10433,7 @@
         <p:spPr bwMode="auto">
           <a:xfrm>
             <a:off x="0" y="4870450"/>
-            <a:ext cx="9144000" cy="71438"/>
+            <a:ext cx="12192000" cy="369332"/>
           </a:xfrm>
           <a:prstGeom prst="rect">
             <a:avLst/>
@@ -10505,7 +10560,7 @@
             <a:pPr>
               <a:defRPr/>
             </a:pPr>
-            <a:endParaRPr kumimoji="0" lang="zh-CN" altLang="en-US">
+            <a:endParaRPr kumimoji="0" lang="zh-CN" altLang="en-US" sz="2400">
               <a:solidFill>
                 <a:prstClr val="white"/>
               </a:solidFill>
@@ -10526,8 +10581,8 @@
         </p:nvSpPr>
         <p:spPr>
           <a:xfrm>
-            <a:off x="1828800" y="1828800"/>
-            <a:ext cx="6934200" cy="2362200"/>
+            <a:off x="2438400" y="1828800"/>
+            <a:ext cx="9245600" cy="2362200"/>
           </a:xfrm>
           <a:noFill/>
         </p:spPr>
@@ -10558,8 +10613,8 @@
         </p:nvSpPr>
         <p:spPr>
           <a:xfrm>
-            <a:off x="1828800" y="4572000"/>
-            <a:ext cx="6934200" cy="1295400"/>
+            <a:off x="2438400" y="4572000"/>
+            <a:ext cx="9245600" cy="1295400"/>
           </a:xfrm>
           <a:prstGeom prst="rect">
             <a:avLst/>
@@ -10672,8 +10727,8 @@
         </p:nvSpPr>
         <p:spPr>
           <a:xfrm>
-            <a:off x="287338" y="981075"/>
-            <a:ext cx="7772400" cy="5184775"/>
+            <a:off x="383117" y="981076"/>
+            <a:ext cx="10363200" cy="5184775"/>
           </a:xfrm>
           <a:prstGeom prst="rect">
             <a:avLst/>
@@ -10787,8 +10842,8 @@
         </p:nvSpPr>
         <p:spPr>
           <a:xfrm>
-            <a:off x="6858000" y="-26988"/>
-            <a:ext cx="2286000" cy="6192838"/>
+            <a:off x="9144000" y="-26988"/>
+            <a:ext cx="3048000" cy="6192838"/>
           </a:xfrm>
         </p:spPr>
         <p:txBody>
@@ -10815,7 +10870,7 @@
         <p:spPr>
           <a:xfrm>
             <a:off x="0" y="-26988"/>
-            <a:ext cx="6705600" cy="6192838"/>
+            <a:ext cx="8940800" cy="6192838"/>
           </a:xfrm>
           <a:prstGeom prst="rect">
             <a:avLst/>
@@ -10930,7 +10985,7 @@
         <p:spPr>
           <a:xfrm>
             <a:off x="0" y="-26988"/>
-            <a:ext cx="9144000" cy="6192838"/>
+            <a:ext cx="12192000" cy="6192838"/>
           </a:xfrm>
           <a:prstGeom prst="rect">
             <a:avLst/>
@@ -11045,7 +11100,7 @@
         <p:spPr>
           <a:xfrm>
             <a:off x="0" y="-26988"/>
-            <a:ext cx="9144000" cy="792163"/>
+            <a:ext cx="12192000" cy="792163"/>
           </a:xfrm>
         </p:spPr>
         <p:txBody>
@@ -11071,8 +11126,8 @@
         </p:nvSpPr>
         <p:spPr>
           <a:xfrm>
-            <a:off x="685800" y="981075"/>
-            <a:ext cx="7772400" cy="5184775"/>
+            <a:off x="914400" y="981076"/>
+            <a:ext cx="10363200" cy="5184775"/>
           </a:xfrm>
           <a:prstGeom prst="rect">
             <a:avLst/>
@@ -11156,7 +11211,7 @@
         <p:spPr>
           <a:xfrm>
             <a:off x="0" y="-26988"/>
-            <a:ext cx="9144000" cy="792163"/>
+            <a:ext cx="12192000" cy="792163"/>
           </a:xfrm>
         </p:spPr>
         <p:txBody>
@@ -11182,8 +11237,8 @@
         </p:nvSpPr>
         <p:spPr>
           <a:xfrm>
-            <a:off x="685800" y="981075"/>
-            <a:ext cx="3810000" cy="5184775"/>
+            <a:off x="914400" y="981076"/>
+            <a:ext cx="5080000" cy="5184775"/>
           </a:xfrm>
           <a:prstGeom prst="rect">
             <a:avLst/>
@@ -11241,8 +11296,8 @@
         </p:nvSpPr>
         <p:spPr>
           <a:xfrm>
-            <a:off x="4648200" y="981075"/>
-            <a:ext cx="3810000" cy="5184775"/>
+            <a:off x="6197600" y="981076"/>
+            <a:ext cx="5080000" cy="5184775"/>
           </a:xfrm>
           <a:prstGeom prst="rect">
             <a:avLst/>
@@ -11362,7 +11417,7 @@
         <p:spPr bwMode="auto">
           <a:xfrm>
             <a:off x="0" y="-1"/>
-            <a:ext cx="9144000" cy="6858001"/>
+            <a:ext cx="12192000" cy="6858001"/>
           </a:xfrm>
           <a:prstGeom prst="rect">
             <a:avLst/>
@@ -11383,7 +11438,7 @@
         <p:spPr>
           <a:xfrm>
             <a:off x="0" y="0"/>
-            <a:ext cx="9144000" cy="1071546"/>
+            <a:ext cx="12192000" cy="1071546"/>
           </a:xfrm>
           <a:prstGeom prst="rect">
             <a:avLst/>
@@ -11489,8 +11544,8 @@
         </p:nvSpPr>
         <p:spPr>
           <a:xfrm>
-            <a:off x="457200" y="6356350"/>
-            <a:ext cx="2133600" cy="365125"/>
+            <a:off x="609600" y="6356351"/>
+            <a:ext cx="2844800" cy="365125"/>
           </a:xfrm>
           <a:prstGeom prst="rect">
             <a:avLst/>
@@ -11522,8 +11577,8 @@
         </p:nvSpPr>
         <p:spPr>
           <a:xfrm>
-            <a:off x="3124200" y="6356350"/>
-            <a:ext cx="2895600" cy="365125"/>
+            <a:off x="4165600" y="6356351"/>
+            <a:ext cx="3860800" cy="365125"/>
           </a:xfrm>
           <a:prstGeom prst="rect">
             <a:avLst/>
@@ -11588,8 +11643,8 @@
         </p:nvSpPr>
         <p:spPr>
           <a:xfrm>
-            <a:off x="457200" y="6356350"/>
-            <a:ext cx="2133600" cy="365125"/>
+            <a:off x="609600" y="6356351"/>
+            <a:ext cx="2844800" cy="365125"/>
           </a:xfrm>
           <a:prstGeom prst="rect">
             <a:avLst/>
@@ -11621,8 +11676,8 @@
         </p:nvSpPr>
         <p:spPr>
           <a:xfrm>
-            <a:off x="3124200" y="6356350"/>
-            <a:ext cx="2895600" cy="365125"/>
+            <a:off x="4165600" y="6356351"/>
+            <a:ext cx="3860800" cy="365125"/>
           </a:xfrm>
           <a:prstGeom prst="rect">
             <a:avLst/>
@@ -11687,8 +11742,8 @@
         </p:nvSpPr>
         <p:spPr>
           <a:xfrm>
-            <a:off x="6982264" y="6467404"/>
-            <a:ext cx="2133600" cy="365125"/>
+            <a:off x="9309685" y="6467405"/>
+            <a:ext cx="2844800" cy="365125"/>
           </a:xfrm>
           <a:prstGeom prst="rect">
             <a:avLst/>
@@ -11744,7 +11799,7 @@
         <p:spPr>
           <a:xfrm>
             <a:off x="0" y="6395396"/>
-            <a:ext cx="9144000" cy="0"/>
+            <a:ext cx="12192000" cy="0"/>
           </a:xfrm>
           <a:custGeom>
             <a:avLst/>
@@ -11813,7 +11868,7 @@
                 <a:spcPts val="0"/>
               </a:spcAft>
             </a:pPr>
-            <a:endParaRPr lang="zh-CN" altLang="en-US">
+            <a:endParaRPr lang="zh-CN" altLang="en-US" sz="2400">
               <a:solidFill>
                 <a:prstClr val="white"/>
               </a:solidFill>
@@ -11833,8 +11888,8 @@
         </p:nvSpPr>
         <p:spPr bwMode="auto">
           <a:xfrm>
-            <a:off x="0" y="8526"/>
-            <a:ext cx="8024813" cy="792162"/>
+            <a:off x="1" y="8526"/>
+            <a:ext cx="10699751" cy="792162"/>
           </a:xfrm>
           <a:prstGeom prst="rect">
             <a:avLst/>
@@ -11927,8 +11982,8 @@
         </p:nvSpPr>
         <p:spPr>
           <a:xfrm>
-            <a:off x="685800" y="2130425"/>
-            <a:ext cx="7772400" cy="1470025"/>
+            <a:off x="914400" y="2130426"/>
+            <a:ext cx="10363200" cy="1470025"/>
           </a:xfrm>
         </p:spPr>
         <p:txBody>
@@ -11954,8 +12009,8 @@
         </p:nvSpPr>
         <p:spPr>
           <a:xfrm>
-            <a:off x="1371600" y="3886200"/>
-            <a:ext cx="6400800" cy="1752600"/>
+            <a:off x="1828800" y="3886200"/>
+            <a:ext cx="8534400" cy="609398"/>
           </a:xfrm>
         </p:spPr>
         <p:txBody>
@@ -12086,8 +12141,8 @@
         </p:nvSpPr>
         <p:spPr>
           <a:xfrm>
-            <a:off x="287338" y="981075"/>
-            <a:ext cx="7772400" cy="5184775"/>
+            <a:off x="383117" y="981076"/>
+            <a:ext cx="10363200" cy="5184775"/>
           </a:xfrm>
           <a:prstGeom prst="rect">
             <a:avLst/>
@@ -12373,8 +12428,8 @@
         </p:nvSpPr>
         <p:spPr>
           <a:xfrm>
-            <a:off x="722313" y="4406900"/>
-            <a:ext cx="7772400" cy="1362075"/>
+            <a:off x="963084" y="4406901"/>
+            <a:ext cx="10363200" cy="1362075"/>
           </a:xfrm>
         </p:spPr>
         <p:txBody>
@@ -12404,8 +12459,8 @@
         </p:nvSpPr>
         <p:spPr>
           <a:xfrm>
-            <a:off x="722313" y="2906713"/>
-            <a:ext cx="7772400" cy="1500187"/>
+            <a:off x="963084" y="3945235"/>
+            <a:ext cx="10363200" cy="461665"/>
           </a:xfrm>
         </p:spPr>
         <p:txBody>
@@ -12559,8 +12614,8 @@
         </p:nvSpPr>
         <p:spPr>
           <a:xfrm>
-            <a:off x="325438" y="1087438"/>
-            <a:ext cx="4027487" cy="2270125"/>
+            <a:off x="433918" y="1087439"/>
+            <a:ext cx="5369983" cy="2332946"/>
           </a:xfrm>
         </p:spPr>
         <p:txBody>
@@ -12643,8 +12698,8 @@
         </p:nvSpPr>
         <p:spPr>
           <a:xfrm>
-            <a:off x="4505325" y="1087438"/>
-            <a:ext cx="4027488" cy="2270125"/>
+            <a:off x="6007100" y="1087439"/>
+            <a:ext cx="5369984" cy="2332946"/>
           </a:xfrm>
         </p:spPr>
         <p:txBody>
@@ -12795,8 +12850,8 @@
         </p:nvSpPr>
         <p:spPr>
           <a:xfrm>
-            <a:off x="457200" y="274638"/>
-            <a:ext cx="8229600" cy="1143000"/>
+            <a:off x="609600" y="274638"/>
+            <a:ext cx="10972800" cy="1143000"/>
           </a:xfrm>
         </p:spPr>
         <p:txBody>
@@ -12826,8 +12881,8 @@
         </p:nvSpPr>
         <p:spPr>
           <a:xfrm>
-            <a:off x="457200" y="1535113"/>
-            <a:ext cx="4040188" cy="639762"/>
+            <a:off x="609600" y="1639344"/>
+            <a:ext cx="5386917" cy="535531"/>
           </a:xfrm>
         </p:spPr>
         <p:txBody>
@@ -12891,8 +12946,8 @@
         </p:nvSpPr>
         <p:spPr>
           <a:xfrm>
-            <a:off x="457200" y="2174875"/>
-            <a:ext cx="4040188" cy="3951288"/>
+            <a:off x="609600" y="2174875"/>
+            <a:ext cx="5386917" cy="2043636"/>
           </a:xfrm>
         </p:spPr>
         <p:txBody>
@@ -12975,8 +13030,8 @@
         </p:nvSpPr>
         <p:spPr>
           <a:xfrm>
-            <a:off x="4645025" y="1535113"/>
-            <a:ext cx="4041775" cy="639762"/>
+            <a:off x="6193368" y="1639344"/>
+            <a:ext cx="5389033" cy="535531"/>
           </a:xfrm>
         </p:spPr>
         <p:txBody>
@@ -13040,8 +13095,8 @@
         </p:nvSpPr>
         <p:spPr>
           <a:xfrm>
-            <a:off x="4645025" y="2174875"/>
-            <a:ext cx="4041775" cy="3951288"/>
+            <a:off x="6193368" y="2174875"/>
+            <a:ext cx="5389033" cy="2043636"/>
           </a:xfrm>
         </p:spPr>
         <p:txBody>
@@ -13350,8 +13405,8 @@
         </p:nvSpPr>
         <p:spPr>
           <a:xfrm>
-            <a:off x="457200" y="273050"/>
-            <a:ext cx="3008313" cy="1162050"/>
+            <a:off x="609601" y="273050"/>
+            <a:ext cx="4011084" cy="1162050"/>
           </a:xfrm>
         </p:spPr>
         <p:txBody>
@@ -13381,8 +13436,8 @@
         </p:nvSpPr>
         <p:spPr>
           <a:xfrm>
-            <a:off x="3575050" y="273050"/>
-            <a:ext cx="5111750" cy="5853113"/>
+            <a:off x="4766733" y="273051"/>
+            <a:ext cx="6815667" cy="2665345"/>
           </a:xfrm>
         </p:spPr>
         <p:txBody>
@@ -13465,8 +13520,8 @@
         </p:nvSpPr>
         <p:spPr>
           <a:xfrm>
-            <a:off x="457200" y="1435100"/>
-            <a:ext cx="3008313" cy="4691063"/>
+            <a:off x="609601" y="1435101"/>
+            <a:ext cx="4011084" cy="350865"/>
           </a:xfrm>
         </p:spPr>
         <p:txBody>
@@ -13598,8 +13653,8 @@
         </p:nvSpPr>
         <p:spPr>
           <a:xfrm>
-            <a:off x="1792288" y="4800600"/>
-            <a:ext cx="5486400" cy="566738"/>
+            <a:off x="2389717" y="4800600"/>
+            <a:ext cx="7315200" cy="566738"/>
           </a:xfrm>
         </p:spPr>
         <p:txBody>
@@ -13629,8 +13684,8 @@
         </p:nvSpPr>
         <p:spPr>
           <a:xfrm>
-            <a:off x="1792288" y="612775"/>
-            <a:ext cx="5486400" cy="4114800"/>
+            <a:off x="2389717" y="612775"/>
+            <a:ext cx="7315200" cy="683264"/>
           </a:xfrm>
         </p:spPr>
         <p:txBody>
@@ -13691,8 +13746,8 @@
         </p:nvSpPr>
         <p:spPr>
           <a:xfrm>
-            <a:off x="1792288" y="5367338"/>
-            <a:ext cx="5486400" cy="804862"/>
+            <a:off x="2389717" y="5367338"/>
+            <a:ext cx="7315200" cy="350865"/>
           </a:xfrm>
         </p:spPr>
         <p:txBody>
@@ -13844,7 +13899,12 @@
             <p:ph type="body" orient="vert" idx="1"/>
           </p:nvPr>
         </p:nvSpPr>
-        <p:spPr/>
+        <p:spPr>
+          <a:xfrm>
+            <a:off x="7917676" y="1087439"/>
+            <a:ext cx="3459409" cy="2332946"/>
+          </a:xfrm>
+        </p:spPr>
         <p:txBody>
           <a:bodyPr vert="eaVert"/>
           <a:lstStyle/>
@@ -13965,8 +14025,8 @@
         </p:nvSpPr>
         <p:spPr>
           <a:xfrm>
-            <a:off x="6507163" y="115888"/>
-            <a:ext cx="2168525" cy="3241675"/>
+            <a:off x="8676218" y="115889"/>
+            <a:ext cx="2891367" cy="3241675"/>
           </a:xfrm>
         </p:spPr>
         <p:txBody>
@@ -13992,8 +14052,8 @@
         </p:nvSpPr>
         <p:spPr>
           <a:xfrm>
-            <a:off x="0" y="115888"/>
-            <a:ext cx="6354763" cy="3241675"/>
+            <a:off x="5530674" y="115889"/>
+            <a:ext cx="2942344" cy="3241675"/>
           </a:xfrm>
         </p:spPr>
         <p:txBody>
@@ -14116,8 +14176,8 @@
         </p:nvSpPr>
         <p:spPr>
           <a:xfrm>
-            <a:off x="722313" y="4406900"/>
-            <a:ext cx="7772400" cy="1362075"/>
+            <a:off x="963084" y="4406901"/>
+            <a:ext cx="10363200" cy="1362075"/>
           </a:xfrm>
         </p:spPr>
         <p:txBody>
@@ -14147,8 +14207,8 @@
         </p:nvSpPr>
         <p:spPr>
           <a:xfrm>
-            <a:off x="722313" y="2906713"/>
-            <a:ext cx="7772400" cy="1500187"/>
+            <a:off x="963084" y="2906713"/>
+            <a:ext cx="10363200" cy="1500187"/>
           </a:xfrm>
           <a:prstGeom prst="rect">
             <a:avLst/>
@@ -14271,8 +14331,8 @@
         </p:nvSpPr>
         <p:spPr>
           <a:xfrm>
-            <a:off x="685800" y="981075"/>
-            <a:ext cx="3810000" cy="5184775"/>
+            <a:off x="914400" y="981076"/>
+            <a:ext cx="5080000" cy="5184775"/>
           </a:xfrm>
           <a:prstGeom prst="rect">
             <a:avLst/>
@@ -14358,8 +14418,8 @@
         </p:nvSpPr>
         <p:spPr>
           <a:xfrm>
-            <a:off x="4648200" y="981075"/>
-            <a:ext cx="3810000" cy="5184775"/>
+            <a:off x="6197600" y="981076"/>
+            <a:ext cx="5080000" cy="5184775"/>
           </a:xfrm>
           <a:prstGeom prst="rect">
             <a:avLst/>
@@ -14523,8 +14583,8 @@
         </p:nvSpPr>
         <p:spPr>
           <a:xfrm>
-            <a:off x="457200" y="274638"/>
-            <a:ext cx="8229600" cy="1143000"/>
+            <a:off x="609600" y="274638"/>
+            <a:ext cx="10972800" cy="1143000"/>
           </a:xfrm>
         </p:spPr>
         <p:txBody>
@@ -14554,8 +14614,8 @@
         </p:nvSpPr>
         <p:spPr>
           <a:xfrm>
-            <a:off x="457200" y="1535113"/>
-            <a:ext cx="4040188" cy="639762"/>
+            <a:off x="609600" y="1535113"/>
+            <a:ext cx="5386917" cy="639762"/>
           </a:xfrm>
           <a:prstGeom prst="rect">
             <a:avLst/>
@@ -14622,8 +14682,8 @@
         </p:nvSpPr>
         <p:spPr>
           <a:xfrm>
-            <a:off x="457200" y="2174875"/>
-            <a:ext cx="4040188" cy="3951288"/>
+            <a:off x="609600" y="2174875"/>
+            <a:ext cx="5386917" cy="3951288"/>
           </a:xfrm>
           <a:prstGeom prst="rect">
             <a:avLst/>
@@ -14709,8 +14769,8 @@
         </p:nvSpPr>
         <p:spPr>
           <a:xfrm>
-            <a:off x="4645025" y="1535113"/>
-            <a:ext cx="4041775" cy="639762"/>
+            <a:off x="6193368" y="1535113"/>
+            <a:ext cx="5389033" cy="639762"/>
           </a:xfrm>
           <a:prstGeom prst="rect">
             <a:avLst/>
@@ -14777,8 +14837,8 @@
         </p:nvSpPr>
         <p:spPr>
           <a:xfrm>
-            <a:off x="4645025" y="2174875"/>
-            <a:ext cx="4041775" cy="3951288"/>
+            <a:off x="6193368" y="2174875"/>
+            <a:ext cx="5389033" cy="3951288"/>
           </a:xfrm>
           <a:prstGeom prst="rect">
             <a:avLst/>
@@ -15054,8 +15114,8 @@
         </p:nvSpPr>
         <p:spPr>
           <a:xfrm>
-            <a:off x="457200" y="273050"/>
-            <a:ext cx="3008313" cy="1162050"/>
+            <a:off x="609601" y="273050"/>
+            <a:ext cx="4011084" cy="1162050"/>
           </a:xfrm>
         </p:spPr>
         <p:txBody>
@@ -15085,8 +15145,8 @@
         </p:nvSpPr>
         <p:spPr>
           <a:xfrm>
-            <a:off x="3575050" y="273050"/>
-            <a:ext cx="5111750" cy="5853113"/>
+            <a:off x="4766733" y="273051"/>
+            <a:ext cx="6815667" cy="5853113"/>
           </a:xfrm>
           <a:prstGeom prst="rect">
             <a:avLst/>
@@ -15172,8 +15232,8 @@
         </p:nvSpPr>
         <p:spPr>
           <a:xfrm>
-            <a:off x="457200" y="1435100"/>
-            <a:ext cx="3008313" cy="4691063"/>
+            <a:off x="609601" y="1435101"/>
+            <a:ext cx="4011084" cy="4691063"/>
           </a:xfrm>
           <a:prstGeom prst="rect">
             <a:avLst/>
@@ -15296,8 +15356,8 @@
         </p:nvSpPr>
         <p:spPr>
           <a:xfrm>
-            <a:off x="1792288" y="4800600"/>
-            <a:ext cx="5486400" cy="566738"/>
+            <a:off x="2389717" y="4800600"/>
+            <a:ext cx="7315200" cy="566738"/>
           </a:xfrm>
         </p:spPr>
         <p:txBody>
@@ -15327,8 +15387,8 @@
         </p:nvSpPr>
         <p:spPr>
           <a:xfrm>
-            <a:off x="1792288" y="612775"/>
-            <a:ext cx="5486400" cy="4114800"/>
+            <a:off x="2389717" y="612775"/>
+            <a:ext cx="7315200" cy="4114800"/>
           </a:xfrm>
           <a:prstGeom prst="rect">
             <a:avLst/>
@@ -15392,8 +15452,8 @@
         </p:nvSpPr>
         <p:spPr>
           <a:xfrm>
-            <a:off x="1792288" y="5367338"/>
-            <a:ext cx="5486400" cy="804862"/>
+            <a:off x="2389717" y="5367338"/>
+            <a:ext cx="7315200" cy="804862"/>
           </a:xfrm>
           <a:prstGeom prst="rect">
             <a:avLst/>
@@ -15524,8 +15584,8 @@
         </p:nvSpPr>
         <p:spPr bwMode="auto">
           <a:xfrm>
-            <a:off x="182850" y="8526"/>
-            <a:ext cx="8024813" cy="792162"/>
+            <a:off x="243801" y="8526"/>
+            <a:ext cx="10699751" cy="792162"/>
           </a:xfrm>
           <a:prstGeom prst="rect">
             <a:avLst/>
@@ -15581,8 +15641,8 @@
         </p:nvSpPr>
         <p:spPr>
           <a:xfrm rot="5400000">
-            <a:off x="4513516" y="-3740963"/>
-            <a:ext cx="72000" cy="9099032"/>
+            <a:off x="6030021" y="-5257469"/>
+            <a:ext cx="72000" cy="12132043"/>
           </a:xfrm>
           <a:prstGeom prst="round2SameRect">
             <a:avLst>
@@ -15641,8 +15701,8 @@
         </p:nvSpPr>
         <p:spPr>
           <a:xfrm rot="5400000" flipH="1">
-            <a:off x="8530149" y="230704"/>
-            <a:ext cx="72000" cy="1155701"/>
+            <a:off x="11385532" y="38088"/>
+            <a:ext cx="72000" cy="1540935"/>
           </a:xfrm>
           <a:prstGeom prst="round2SameRect">
             <a:avLst>
@@ -15708,8 +15768,8 @@
         </p:nvSpPr>
         <p:spPr>
           <a:xfrm>
-            <a:off x="6553200" y="6356350"/>
-            <a:ext cx="2133600" cy="365125"/>
+            <a:off x="8737600" y="6356351"/>
+            <a:ext cx="2844800" cy="365125"/>
           </a:xfrm>
           <a:prstGeom prst="rect">
             <a:avLst/>
@@ -16221,8 +16281,8 @@
         </p:blipFill>
         <p:spPr bwMode="auto">
           <a:xfrm>
-            <a:off x="0" y="0"/>
-            <a:ext cx="9142413" cy="6856413"/>
+            <a:off x="1" y="1"/>
+            <a:ext cx="12189884" cy="6856413"/>
           </a:xfrm>
           <a:prstGeom prst="rect">
             <a:avLst/>
@@ -16248,8 +16308,8 @@
         </p:nvSpPr>
         <p:spPr bwMode="auto">
           <a:xfrm>
-            <a:off x="0" y="115888"/>
-            <a:ext cx="8675688" cy="649287"/>
+            <a:off x="0" y="115889"/>
+            <a:ext cx="11567584" cy="649287"/>
           </a:xfrm>
           <a:prstGeom prst="rect">
             <a:avLst/>
@@ -16296,8 +16356,8 @@
         </p:nvSpPr>
         <p:spPr bwMode="auto">
           <a:xfrm>
-            <a:off x="325438" y="1087438"/>
-            <a:ext cx="8207375" cy="2270125"/>
+            <a:off x="433918" y="1087439"/>
+            <a:ext cx="10943167" cy="2332946"/>
           </a:xfrm>
           <a:prstGeom prst="rect">
             <a:avLst/>
@@ -16422,8 +16482,8 @@
         </p:nvSpPr>
         <p:spPr bwMode="auto">
           <a:xfrm>
-            <a:off x="6902450" y="6499225"/>
-            <a:ext cx="2133600" cy="212725"/>
+            <a:off x="9203267" y="6499226"/>
+            <a:ext cx="2844800" cy="212725"/>
           </a:xfrm>
           <a:prstGeom prst="rect">
             <a:avLst/>
@@ -16984,7 +17044,7 @@
         </p:nvSpPr>
         <p:spPr bwMode="auto">
           <a:xfrm>
-            <a:off x="319693" y="1685331"/>
+            <a:off x="1843693" y="1685332"/>
             <a:ext cx="8501204" cy="1917543"/>
           </a:xfrm>
           <a:prstGeom prst="rect">
@@ -17018,107 +17078,43 @@
           <a:bodyPr anchor="ctr"/>
           <a:lstStyle/>
           <a:p>
-            <a:pPr marL="0" marR="0" lvl="0" indent="0" algn="ctr" defTabSz="914400" rtl="0" eaLnBrk="1" fontAlgn="base" latinLnBrk="0" hangingPunct="1">
-              <a:lnSpc>
-                <a:spcPct val="100000"/>
-              </a:lnSpc>
-              <a:spcBef>
-                <a:spcPct val="50000"/>
-              </a:spcBef>
-              <a:spcAft>
-                <a:spcPct val="0"/>
-              </a:spcAft>
-              <a:buClrTx/>
-              <a:buSzTx/>
-              <a:buFontTx/>
-              <a:buNone/>
-              <a:tabLst/>
+            <a:pPr>
               <a:defRPr/>
             </a:pPr>
             <a:r>
-              <a:rPr kumimoji="0" lang="zh-CN" altLang="en-US" sz="4800" b="1" i="0" u="none" strike="noStrike" kern="1200" cap="none" spc="0" normalizeH="0" baseline="0" noProof="0" dirty="0">
-                <a:ln>
-                  <a:noFill/>
-                </a:ln>
+              <a:rPr lang="zh-CN" altLang="en-US" sz="5400" b="1" dirty="0">
                 <a:solidFill>
                   <a:srgbClr val="FF0000"/>
                 </a:solidFill>
-                <a:effectLst/>
-                <a:uLnTx/>
-                <a:uFillTx/>
                 <a:latin typeface="微软雅黑"/>
                 <a:ea typeface="微软雅黑"/>
               </a:rPr>
               <a:t>第</a:t>
             </a:r>
             <a:r>
-              <a:rPr kumimoji="0" lang="en-US" altLang="zh-CN" sz="4800" b="1" i="0" u="none" strike="noStrike" kern="1200" cap="none" spc="0" normalizeH="0" baseline="0" noProof="0" dirty="0">
-                <a:ln>
-                  <a:noFill/>
-                </a:ln>
+              <a:rPr lang="en-US" altLang="zh-CN" sz="5400" b="1" dirty="0">
                 <a:solidFill>
                   <a:srgbClr val="FF0000"/>
                 </a:solidFill>
-                <a:effectLst/>
-                <a:uLnTx/>
-                <a:uFillTx/>
                 <a:latin typeface="微软雅黑"/>
                 <a:ea typeface="微软雅黑"/>
               </a:rPr>
               <a:t>2</a:t>
             </a:r>
             <a:r>
-              <a:rPr kumimoji="0" lang="zh-CN" altLang="en-US" sz="4800" b="1" i="0" u="none" strike="noStrike" kern="1200" cap="none" spc="0" normalizeH="0" baseline="0" noProof="0" dirty="0">
-                <a:ln>
-                  <a:noFill/>
-                </a:ln>
+              <a:rPr lang="zh-CN" altLang="en-US" sz="5400" b="1" dirty="0">
                 <a:solidFill>
                   <a:srgbClr val="FF0000"/>
                 </a:solidFill>
-                <a:effectLst/>
-                <a:uLnTx/>
-                <a:uFillTx/>
                 <a:latin typeface="微软雅黑"/>
                 <a:ea typeface="微软雅黑"/>
               </a:rPr>
-              <a:t>节：</a:t>
-            </a:r>
-            <a:r>
-              <a:rPr lang="zh-CN" altLang="en-US" sz="4800" b="1" dirty="0">
-                <a:solidFill>
-                  <a:srgbClr val="FF0000"/>
-                </a:solidFill>
-                <a:latin typeface="微软雅黑"/>
-                <a:ea typeface="微软雅黑"/>
-              </a:rPr>
-              <a:t>坐标转换及</a:t>
-            </a:r>
-            <a:r>
-              <a:rPr kumimoji="0" lang="zh-CN" altLang="en-US" sz="4800" b="1" i="0" u="none" strike="noStrike" kern="1200" cap="none" spc="0" normalizeH="0" baseline="0" noProof="0" dirty="0">
-                <a:ln>
-                  <a:noFill/>
-                </a:ln>
-                <a:solidFill>
-                  <a:srgbClr val="FF0000"/>
-                </a:solidFill>
-                <a:effectLst/>
-                <a:uLnTx/>
-                <a:uFillTx/>
-                <a:latin typeface="微软雅黑"/>
-                <a:ea typeface="微软雅黑"/>
-              </a:rPr>
-              <a:t>可视化</a:t>
-            </a:r>
-            <a:endParaRPr kumimoji="0" lang="zh-CN" altLang="zh-CN" sz="4800" b="1" i="0" u="none" strike="noStrike" kern="1200" cap="none" spc="0" normalizeH="0" baseline="0" noProof="0" dirty="0">
-              <a:ln>
-                <a:noFill/>
-              </a:ln>
+              <a:t>节：坐标转换及可视化</a:t>
+            </a:r>
+            <a:endParaRPr lang="zh-CN" altLang="zh-CN" sz="5400" b="1" dirty="0">
               <a:solidFill>
                 <a:srgbClr val="FF0000"/>
               </a:solidFill>
-              <a:effectLst/>
-              <a:uLnTx/>
-              <a:uFillTx/>
               <a:latin typeface="微软雅黑"/>
               <a:ea typeface="微软雅黑"/>
             </a:endParaRPr>
@@ -17135,7 +17131,7 @@
         </p:nvSpPr>
         <p:spPr bwMode="auto">
           <a:xfrm>
-            <a:off x="153909" y="3931738"/>
+            <a:off x="1677909" y="3931738"/>
             <a:ext cx="8809022" cy="1439862"/>
           </a:xfrm>
           <a:prstGeom prst="rect">
@@ -17169,140 +17165,89 @@
           <a:bodyPr/>
           <a:lstStyle/>
           <a:p>
-            <a:pPr marL="0" marR="0" lvl="0" indent="0" algn="ctr" defTabSz="914400" rtl="0" eaLnBrk="1" fontAlgn="base" latinLnBrk="0" hangingPunct="1">
+            <a:pPr>
               <a:lnSpc>
                 <a:spcPct val="150000"/>
               </a:lnSpc>
               <a:spcBef>
                 <a:spcPts val="0"/>
               </a:spcBef>
-              <a:spcAft>
-                <a:spcPct val="0"/>
-              </a:spcAft>
-              <a:buClrTx/>
               <a:buSzPct val="80000"/>
-              <a:buFontTx/>
-              <a:buNone/>
-              <a:tabLst/>
               <a:defRPr/>
             </a:pPr>
             <a:r>
-              <a:rPr kumimoji="0" lang="zh-CN" altLang="en-US" sz="2400" b="1" i="0" u="none" strike="noStrike" kern="1200" cap="none" spc="0" normalizeH="0" baseline="0" noProof="0" dirty="0">
-                <a:ln>
-                  <a:noFill/>
-                </a:ln>
+              <a:rPr lang="zh-CN" altLang="en-US" sz="2800" b="1" dirty="0">
                 <a:solidFill>
                   <a:srgbClr val="002060"/>
                 </a:solidFill>
-                <a:effectLst/>
-                <a:uLnTx/>
-                <a:uFillTx/>
                 <a:latin typeface="微软雅黑"/>
                 <a:ea typeface="微软雅黑"/>
                 <a:cs typeface="微软雅黑" charset="0"/>
               </a:rPr>
               <a:t>罗 新</a:t>
             </a:r>
-            <a:endParaRPr kumimoji="0" lang="en-US" altLang="zh-CN" sz="2400" b="1" i="0" u="none" strike="noStrike" kern="1200" cap="none" spc="0" normalizeH="0" baseline="0" noProof="0" dirty="0">
-              <a:ln>
-                <a:noFill/>
-              </a:ln>
+            <a:endParaRPr lang="en-US" altLang="zh-CN" sz="2800" b="1" dirty="0">
               <a:solidFill>
                 <a:srgbClr val="002060"/>
               </a:solidFill>
-              <a:effectLst/>
-              <a:uLnTx/>
-              <a:uFillTx/>
               <a:latin typeface="微软雅黑"/>
               <a:ea typeface="微软雅黑"/>
               <a:cs typeface="微软雅黑" charset="0"/>
             </a:endParaRPr>
           </a:p>
           <a:p>
-            <a:pPr marL="0" marR="0" lvl="0" indent="0" algn="ctr" defTabSz="914400" rtl="0" eaLnBrk="1" fontAlgn="base" latinLnBrk="0" hangingPunct="1">
+            <a:pPr>
               <a:lnSpc>
                 <a:spcPct val="150000"/>
               </a:lnSpc>
               <a:spcBef>
                 <a:spcPts val="0"/>
               </a:spcBef>
-              <a:spcAft>
-                <a:spcPct val="0"/>
-              </a:spcAft>
-              <a:buClrTx/>
               <a:buSzPct val="80000"/>
-              <a:buFontTx/>
-              <a:buNone/>
-              <a:tabLst/>
               <a:defRPr/>
             </a:pPr>
             <a:r>
-              <a:rPr kumimoji="0" lang="zh-CN" altLang="en-US" sz="2400" b="1" i="0" u="none" strike="noStrike" kern="1200" cap="none" spc="0" normalizeH="0" baseline="0" noProof="0" dirty="0">
-                <a:ln>
-                  <a:noFill/>
-                </a:ln>
+              <a:rPr lang="zh-CN" altLang="en-US" sz="2800" b="1" dirty="0">
                 <a:solidFill>
                   <a:srgbClr val="002060"/>
                 </a:solidFill>
-                <a:effectLst/>
-                <a:uLnTx/>
-                <a:uFillTx/>
                 <a:latin typeface="微软雅黑"/>
                 <a:ea typeface="微软雅黑"/>
                 <a:cs typeface="微软雅黑" charset="0"/>
               </a:rPr>
               <a:t>云南大学 地球科学学院</a:t>
             </a:r>
-            <a:endParaRPr kumimoji="0" lang="en-US" altLang="zh-CN" sz="2400" b="1" i="0" u="none" strike="noStrike" kern="1200" cap="none" spc="0" normalizeH="0" baseline="0" noProof="0" dirty="0">
-              <a:ln>
-                <a:noFill/>
-              </a:ln>
+            <a:endParaRPr lang="en-US" altLang="zh-CN" sz="2800" b="1" dirty="0">
               <a:solidFill>
                 <a:srgbClr val="002060"/>
               </a:solidFill>
-              <a:effectLst/>
-              <a:uLnTx/>
-              <a:uFillTx/>
               <a:latin typeface="微软雅黑"/>
               <a:ea typeface="微软雅黑"/>
               <a:cs typeface="微软雅黑" charset="0"/>
             </a:endParaRPr>
           </a:p>
           <a:p>
-            <a:pPr marL="0" marR="0" lvl="0" indent="0" algn="ctr" defTabSz="914400" rtl="0" eaLnBrk="1" fontAlgn="base" latinLnBrk="0" hangingPunct="1">
+            <a:pPr>
               <a:lnSpc>
                 <a:spcPct val="150000"/>
               </a:lnSpc>
               <a:spcBef>
                 <a:spcPts val="0"/>
               </a:spcBef>
-              <a:spcAft>
-                <a:spcPct val="0"/>
-              </a:spcAft>
-              <a:buClrTx/>
               <a:buSzPct val="80000"/>
-              <a:buFontTx/>
-              <a:buNone/>
-              <a:tabLst/>
               <a:defRPr/>
             </a:pPr>
-            <a:endParaRPr kumimoji="0" lang="zh-CN" altLang="en-US" sz="2800" b="1" i="0" u="none" strike="noStrike" kern="1200" cap="none" spc="0" normalizeH="0" baseline="0" noProof="0" dirty="0">
-              <a:ln>
-                <a:noFill/>
-              </a:ln>
+            <a:endParaRPr lang="zh-CN" altLang="en-US" sz="3200" b="1" dirty="0">
               <a:solidFill>
                 <a:srgbClr val="002060"/>
               </a:solidFill>
-              <a:effectLst/>
-              <a:uLnTx/>
-              <a:uFillTx/>
               <a:latin typeface="微软雅黑"/>
               <a:ea typeface="微软雅黑"/>
               <a:cs typeface="微软雅黑" charset="0"/>
             </a:endParaRPr>
           </a:p>
           <a:p>
-            <a:pPr marL="0" marR="0" lvl="0" indent="0" algn="ctr" defTabSz="914400" rtl="0" eaLnBrk="1" fontAlgn="base" latinLnBrk="0" hangingPunct="1">
+            <a:pPr>
               <a:lnSpc>
                 <a:spcPct val="120000"/>
               </a:lnSpc>
@@ -17312,30 +17257,20 @@
               <a:spcAft>
                 <a:spcPts val="0"/>
               </a:spcAft>
-              <a:buClrTx/>
               <a:buSzPct val="80000"/>
-              <a:buFontTx/>
-              <a:buNone/>
-              <a:tabLst/>
               <a:defRPr/>
             </a:pPr>
-            <a:endParaRPr kumimoji="0" lang="en-US" altLang="zh-CN" sz="2000" b="0" i="0" u="none" strike="noStrike" kern="1200" cap="none" spc="0" normalizeH="0" baseline="0" noProof="0" dirty="0">
-              <a:ln>
-                <a:noFill/>
-              </a:ln>
+            <a:endParaRPr lang="en-US" altLang="zh-CN" dirty="0">
               <a:solidFill>
                 <a:srgbClr val="002060"/>
               </a:solidFill>
-              <a:effectLst/>
-              <a:uLnTx/>
-              <a:uFillTx/>
               <a:latin typeface="微软雅黑"/>
               <a:ea typeface="微软雅黑"/>
               <a:cs typeface="微软雅黑" charset="0"/>
             </a:endParaRPr>
           </a:p>
           <a:p>
-            <a:pPr marL="0" marR="0" lvl="0" indent="0" algn="ctr" defTabSz="914400" rtl="0" eaLnBrk="1" fontAlgn="base" latinLnBrk="0" hangingPunct="1">
+            <a:pPr>
               <a:lnSpc>
                 <a:spcPct val="120000"/>
               </a:lnSpc>
@@ -17345,30 +17280,20 @@
               <a:spcAft>
                 <a:spcPts val="0"/>
               </a:spcAft>
-              <a:buClrTx/>
               <a:buSzPct val="80000"/>
-              <a:buFontTx/>
-              <a:buNone/>
-              <a:tabLst/>
               <a:defRPr/>
             </a:pPr>
-            <a:endParaRPr kumimoji="0" lang="en-US" altLang="zh-CN" sz="2000" b="0" i="0" u="none" strike="noStrike" kern="1200" cap="none" spc="0" normalizeH="0" baseline="0" noProof="0" dirty="0">
-              <a:ln>
-                <a:noFill/>
-              </a:ln>
+            <a:endParaRPr lang="en-US" altLang="zh-CN" dirty="0">
               <a:solidFill>
                 <a:srgbClr val="002060"/>
               </a:solidFill>
-              <a:effectLst/>
-              <a:uLnTx/>
-              <a:uFillTx/>
               <a:latin typeface="微软雅黑"/>
               <a:ea typeface="微软雅黑"/>
               <a:cs typeface="微软雅黑" charset="0"/>
             </a:endParaRPr>
           </a:p>
           <a:p>
-            <a:pPr marL="0" marR="0" lvl="0" indent="0" algn="ctr" defTabSz="914400" rtl="0" eaLnBrk="1" fontAlgn="base" latinLnBrk="0" hangingPunct="1">
+            <a:pPr>
               <a:lnSpc>
                 <a:spcPct val="120000"/>
               </a:lnSpc>
@@ -17378,23 +17303,13 @@
               <a:spcAft>
                 <a:spcPts val="0"/>
               </a:spcAft>
-              <a:buClrTx/>
               <a:buSzPct val="80000"/>
-              <a:buFontTx/>
-              <a:buNone/>
-              <a:tabLst/>
               <a:defRPr/>
             </a:pPr>
-            <a:endParaRPr kumimoji="0" lang="en-US" altLang="zh-CN" sz="1800" b="0" i="0" u="none" strike="noStrike" kern="1200" cap="none" spc="0" normalizeH="0" baseline="0" noProof="0" dirty="0">
-              <a:ln>
-                <a:noFill/>
-              </a:ln>
+            <a:endParaRPr lang="en-US" altLang="zh-CN" sz="2000" dirty="0">
               <a:solidFill>
                 <a:srgbClr val="002060"/>
               </a:solidFill>
-              <a:effectLst/>
-              <a:uLnTx/>
-              <a:uFillTx/>
               <a:latin typeface="微软雅黑"/>
               <a:ea typeface="微软雅黑"/>
               <a:cs typeface="微软雅黑" charset="0"/>
@@ -17410,7 +17325,7 @@
         </p:nvSpPr>
         <p:spPr>
           <a:xfrm flipV="1">
-            <a:off x="792000" y="3614404"/>
+            <a:off x="2316000" y="3614405"/>
             <a:ext cx="7560000" cy="45719"/>
           </a:xfrm>
           <a:prstGeom prst="rect">
@@ -17450,33 +17365,13 @@
           </a:bodyPr>
           <a:lstStyle/>
           <a:p>
-            <a:pPr marL="0" marR="0" lvl="0" indent="0" algn="l" defTabSz="914400" rtl="0" eaLnBrk="1" fontAlgn="base" latinLnBrk="0" hangingPunct="1">
-              <a:lnSpc>
-                <a:spcPct val="100000"/>
-              </a:lnSpc>
-              <a:spcBef>
-                <a:spcPct val="50000"/>
-              </a:spcBef>
-              <a:spcAft>
-                <a:spcPct val="0"/>
-              </a:spcAft>
-              <a:buClrTx/>
-              <a:buSzTx/>
-              <a:buFontTx/>
-              <a:buNone/>
-              <a:tabLst/>
+            <a:pPr algn="l">
               <a:defRPr/>
             </a:pPr>
-            <a:endParaRPr kumimoji="0" lang="zh-CN" altLang="en-US" sz="2400" b="1" i="0" u="none" strike="noStrike" kern="1200" cap="none" spc="0" normalizeH="0" baseline="0" noProof="0" dirty="0">
-              <a:ln>
-                <a:noFill/>
-              </a:ln>
+            <a:endParaRPr lang="zh-CN" altLang="en-US" sz="2800" b="1" dirty="0">
               <a:solidFill>
                 <a:srgbClr val="FF0000"/>
               </a:solidFill>
-              <a:effectLst/>
-              <a:uLnTx/>
-              <a:uFillTx/>
               <a:latin typeface="微软雅黑" pitchFamily="34" charset="-122"/>
               <a:ea typeface="微软雅黑" pitchFamily="34" charset="-122"/>
             </a:endParaRPr>
@@ -17497,8 +17392,8 @@
         </p:nvSpPr>
         <p:spPr>
           <a:xfrm>
-            <a:off x="307818" y="5474698"/>
-            <a:ext cx="8627953" cy="784830"/>
+            <a:off x="1831819" y="5474698"/>
+            <a:ext cx="8627953" cy="861774"/>
           </a:xfrm>
           <a:prstGeom prst="rect">
             <a:avLst/>
@@ -17510,50 +17405,24 @@
           </a:bodyPr>
           <a:lstStyle/>
           <a:p>
-            <a:pPr marL="0" marR="0" lvl="0" indent="0" algn="ctr" defTabSz="914400" rtl="0" eaLnBrk="1" fontAlgn="base" latinLnBrk="0" hangingPunct="1">
-              <a:lnSpc>
-                <a:spcPct val="100000"/>
-              </a:lnSpc>
-              <a:spcBef>
-                <a:spcPct val="50000"/>
-              </a:spcBef>
-              <a:spcAft>
-                <a:spcPct val="0"/>
-              </a:spcAft>
-              <a:buClrTx/>
-              <a:buSzTx/>
-              <a:buFontTx/>
-              <a:buNone/>
-              <a:tabLst/>
+            <a:pPr>
               <a:defRPr/>
             </a:pPr>
             <a:r>
-              <a:rPr kumimoji="0" lang="en-US" sz="1800" b="0" i="0" u="none" strike="noStrike" kern="1200" cap="none" spc="0" normalizeH="0" baseline="0" noProof="0" dirty="0">
-                <a:ln>
-                  <a:noFill/>
-                </a:ln>
+              <a:rPr lang="en-US" sz="2000" dirty="0">
                 <a:solidFill>
                   <a:prstClr val="black"/>
                 </a:solidFill>
-                <a:effectLst/>
-                <a:uLnTx/>
-                <a:uFillTx/>
                 <a:latin typeface="微软雅黑"/>
                 <a:ea typeface="微软雅黑"/>
               </a:rPr>
               <a:t>邮箱</a:t>
             </a:r>
             <a:r>
-              <a:rPr kumimoji="0" lang="en-CN" sz="1800" b="0" i="0" u="none" strike="noStrike" kern="1200" cap="none" spc="0" normalizeH="0" baseline="0" noProof="0" dirty="0">
-                <a:ln>
-                  <a:noFill/>
-                </a:ln>
+              <a:rPr lang="en-CN" sz="2000" dirty="0">
                 <a:solidFill>
                   <a:prstClr val="black"/>
                 </a:solidFill>
-                <a:effectLst/>
-                <a:uLnTx/>
-                <a:uFillTx/>
                 <a:latin typeface="微软雅黑"/>
                 <a:ea typeface="微软雅黑"/>
               </a:rPr>
@@ -17561,97 +17430,53 @@
             </a:r>
           </a:p>
           <a:p>
-            <a:pPr marL="0" marR="0" lvl="0" indent="0" algn="ctr" defTabSz="914400" rtl="0" eaLnBrk="1" fontAlgn="base" latinLnBrk="0" hangingPunct="1">
-              <a:lnSpc>
-                <a:spcPct val="100000"/>
-              </a:lnSpc>
-              <a:spcBef>
-                <a:spcPct val="50000"/>
-              </a:spcBef>
-              <a:spcAft>
-                <a:spcPct val="0"/>
-              </a:spcAft>
-              <a:buClrTx/>
-              <a:buSzTx/>
-              <a:buFontTx/>
-              <a:buNone/>
-              <a:tabLst/>
+            <a:pPr>
               <a:defRPr/>
             </a:pPr>
             <a:r>
-              <a:rPr kumimoji="0" lang="en-CN" sz="1800" b="0" i="0" u="none" strike="noStrike" kern="1200" cap="none" spc="0" normalizeH="0" baseline="0" noProof="0" dirty="0">
-                <a:ln>
-                  <a:noFill/>
-                </a:ln>
+              <a:rPr lang="en-CN" sz="2000" dirty="0">
                 <a:solidFill>
                   <a:prstClr val="black"/>
                 </a:solidFill>
-                <a:effectLst/>
-                <a:uLnTx/>
-                <a:uFillTx/>
                 <a:latin typeface="微软雅黑"/>
                 <a:ea typeface="微软雅黑"/>
               </a:rPr>
               <a:t>地址</a:t>
             </a:r>
             <a:r>
-              <a:rPr kumimoji="0" lang="zh-CN" altLang="en-US" sz="1800" b="0" i="0" u="none" strike="noStrike" kern="1200" cap="none" spc="0" normalizeH="0" baseline="0" noProof="0" dirty="0">
-                <a:ln>
-                  <a:noFill/>
-                </a:ln>
+              <a:rPr lang="zh-CN" altLang="en-US" sz="2000" dirty="0">
                 <a:solidFill>
                   <a:prstClr val="black"/>
                 </a:solidFill>
-                <a:effectLst/>
-                <a:uLnTx/>
-                <a:uFillTx/>
                 <a:latin typeface="微软雅黑"/>
                 <a:ea typeface="微软雅黑"/>
               </a:rPr>
               <a:t>：地球科学学院</a:t>
             </a:r>
             <a:r>
-              <a:rPr kumimoji="0" lang="en-US" altLang="zh-CN" sz="1800" b="0" i="0" u="none" strike="noStrike" kern="1200" cap="none" spc="0" normalizeH="0" baseline="0" noProof="0" dirty="0">
-                <a:ln>
-                  <a:noFill/>
-                </a:ln>
+              <a:rPr lang="en-US" altLang="zh-CN" sz="2000" dirty="0">
                 <a:solidFill>
                   <a:prstClr val="black"/>
                 </a:solidFill>
-                <a:effectLst/>
-                <a:uLnTx/>
-                <a:uFillTx/>
                 <a:latin typeface="微软雅黑"/>
                 <a:ea typeface="微软雅黑"/>
               </a:rPr>
               <a:t>1327</a:t>
             </a:r>
             <a:r>
-              <a:rPr kumimoji="0" lang="zh-CN" altLang="en-US" sz="1800" b="0" i="0" u="none" strike="noStrike" kern="1200" cap="none" spc="0" normalizeH="0" baseline="0" noProof="0" dirty="0">
-                <a:ln>
-                  <a:noFill/>
-                </a:ln>
+              <a:rPr lang="zh-CN" altLang="en-US" sz="2000" dirty="0">
                 <a:solidFill>
                   <a:prstClr val="black"/>
                 </a:solidFill>
-                <a:effectLst/>
-                <a:uLnTx/>
-                <a:uFillTx/>
                 <a:latin typeface="微软雅黑"/>
                 <a:ea typeface="微软雅黑"/>
               </a:rPr>
               <a:t>办公室</a:t>
             </a:r>
-            <a:endParaRPr kumimoji="0" lang="en-CN" sz="1800" b="0" i="0" u="none" strike="noStrike" kern="1200" cap="none" spc="0" normalizeH="0" baseline="0" noProof="0" dirty="0">
-              <a:ln>
-                <a:noFill/>
-              </a:ln>
+            <a:endParaRPr lang="en-CN" sz="2000" dirty="0">
               <a:solidFill>
                 <a:prstClr val="black"/>
               </a:solidFill>
-              <a:effectLst/>
-              <a:uLnTx/>
-              <a:uFillTx/>
               <a:latin typeface="微软雅黑"/>
               <a:ea typeface="微软雅黑"/>
             </a:endParaRPr>
@@ -17680,7 +17505,7 @@
         </p:blipFill>
         <p:spPr>
           <a:xfrm>
-            <a:off x="319693" y="243144"/>
+            <a:off x="1843694" y="243145"/>
             <a:ext cx="2866773" cy="1012641"/>
           </a:xfrm>
           <a:prstGeom prst="rect">
@@ -17710,7 +17535,7 @@
         </p:blipFill>
         <p:spPr>
           <a:xfrm>
-            <a:off x="6162261" y="6259528"/>
+            <a:off x="7686262" y="6259528"/>
             <a:ext cx="2996979" cy="622992"/>
           </a:xfrm>
           <a:prstGeom prst="rect">
@@ -17732,8 +17557,8 @@
         </p:nvSpPr>
         <p:spPr>
           <a:xfrm>
-            <a:off x="4867271" y="261082"/>
-            <a:ext cx="4339650" cy="369332"/>
+            <a:off x="6211735" y="261082"/>
+            <a:ext cx="4698722" cy="400110"/>
           </a:xfrm>
           <a:prstGeom prst="rect">
             <a:avLst/>
@@ -17747,7 +17572,7 @@
           <a:lstStyle/>
           <a:p>
             <a:r>
-              <a:rPr lang="en-CN" sz="1800" b="1" dirty="0">
+              <a:rPr lang="en-CN" sz="2000" b="1" dirty="0">
                 <a:solidFill>
                   <a:schemeClr val="bg2"/>
                 </a:solidFill>
@@ -17757,7 +17582,7 @@
               <a:t>云南大学</a:t>
             </a:r>
             <a:r>
-              <a:rPr lang="en-US" altLang="zh-CN" sz="1800" b="1" dirty="0">
+              <a:rPr lang="en-US" altLang="zh-CN" sz="2000" b="1" dirty="0">
                 <a:solidFill>
                   <a:schemeClr val="bg2"/>
                 </a:solidFill>
@@ -17767,7 +17592,7 @@
               <a:t>《</a:t>
             </a:r>
             <a:r>
-              <a:rPr lang="en-CN" sz="1800" b="1" dirty="0">
+              <a:rPr lang="en-CN" sz="2000" b="1" dirty="0">
                 <a:solidFill>
                   <a:schemeClr val="bg2"/>
                 </a:solidFill>
@@ -17777,7 +17602,7 @@
               <a:t> 空间数据处理 </a:t>
             </a:r>
             <a:r>
-              <a:rPr lang="en-US" altLang="zh-CN" sz="1800" b="1" dirty="0">
+              <a:rPr lang="en-US" altLang="zh-CN" sz="2000" b="1" dirty="0">
                 <a:solidFill>
                   <a:schemeClr val="bg2"/>
                 </a:solidFill>
@@ -17787,7 +17612,7 @@
               <a:t>》</a:t>
             </a:r>
             <a:r>
-              <a:rPr lang="en-CN" sz="1800" b="1" dirty="0">
+              <a:rPr lang="en-CN" sz="2000" b="1" dirty="0">
                 <a:solidFill>
                   <a:schemeClr val="bg2"/>
                 </a:solidFill>
@@ -17797,17 +17622,17 @@
               <a:t>课程第</a:t>
             </a:r>
             <a:r>
-              <a:rPr lang="zh-CN" altLang="en-US" sz="1800" b="1" dirty="0">
+              <a:rPr lang="zh-CN" altLang="en-US" sz="2000" b="1" dirty="0">
                 <a:solidFill>
                   <a:schemeClr val="bg2"/>
                 </a:solidFill>
                 <a:latin typeface="+mn-ea"/>
                 <a:ea typeface="+mn-ea"/>
               </a:rPr>
-              <a:t>三</a:t>
-            </a:r>
-            <a:r>
-              <a:rPr lang="en-CN" sz="1800" b="1" dirty="0">
+              <a:t>四</a:t>
+            </a:r>
+            <a:r>
+              <a:rPr lang="en-CN" sz="2000" b="1" dirty="0">
                 <a:solidFill>
                   <a:schemeClr val="bg2"/>
                 </a:solidFill>
@@ -17864,8 +17689,8 @@
         </p:nvSpPr>
         <p:spPr>
           <a:xfrm>
-            <a:off x="0" y="8526"/>
-            <a:ext cx="9013371" cy="792162"/>
+            <a:off x="1" y="8526"/>
+            <a:ext cx="10537372" cy="792162"/>
           </a:xfrm>
         </p:spPr>
         <p:txBody>
@@ -17896,8 +17721,8 @@
         </p:nvSpPr>
         <p:spPr>
           <a:xfrm>
-            <a:off x="612173" y="1015961"/>
-            <a:ext cx="8188927" cy="5274649"/>
+            <a:off x="522513" y="936132"/>
+            <a:ext cx="11110685" cy="3748014"/>
           </a:xfrm>
           <a:prstGeom prst="rect">
             <a:avLst/>
@@ -17916,7 +17741,7 @@
               </a:lnSpc>
             </a:pPr>
             <a:r>
-              <a:rPr lang="en-US" altLang="zh-CN" sz="2800" b="1" dirty="0" err="1">
+              <a:rPr lang="en-US" altLang="zh-CN" sz="3200" b="1" dirty="0" err="1">
                 <a:solidFill>
                   <a:srgbClr val="333333"/>
                 </a:solidFill>
@@ -17926,7 +17751,7 @@
               <a:t>Cartopy</a:t>
             </a:r>
             <a:r>
-              <a:rPr lang="zh-CN" altLang="en-US" sz="2800" b="1" dirty="0">
+              <a:rPr lang="zh-CN" altLang="en-US" sz="3200" b="1" dirty="0">
                 <a:solidFill>
                   <a:srgbClr val="333333"/>
                 </a:solidFill>
@@ -17935,7 +17760,7 @@
               </a:rPr>
               <a:t>开源库</a:t>
             </a:r>
-            <a:endParaRPr lang="en-US" altLang="zh-CN" sz="2800" b="1" dirty="0">
+            <a:endParaRPr lang="en-US" altLang="zh-CN" sz="3200" b="1" dirty="0">
               <a:solidFill>
                 <a:srgbClr val="333333"/>
               </a:solidFill>
@@ -17950,207 +17775,106 @@
               </a:lnSpc>
             </a:pPr>
             <a:r>
-              <a:rPr lang="zh-CN" altLang="en-US" b="1" dirty="0">
+              <a:rPr lang="zh-CN" altLang="en-US" sz="2800" b="1" dirty="0">
                 <a:solidFill>
                   <a:srgbClr val="333333"/>
                 </a:solidFill>
                 <a:latin typeface="+mn-ea"/>
                 <a:ea typeface="+mn-ea"/>
               </a:rPr>
-              <a:t>定义投影坐标系：</a:t>
-            </a:r>
-            <a:r>
-              <a:rPr lang="en-US" altLang="zh-CN" dirty="0" err="1">
+              <a:t>简介：</a:t>
+            </a:r>
+            <a:r>
+              <a:rPr lang="en-US" altLang="zh-CN" sz="2800" dirty="0" err="1">
                 <a:solidFill>
                   <a:srgbClr val="333333"/>
                 </a:solidFill>
                 <a:latin typeface="+mn-ea"/>
                 <a:ea typeface="+mn-ea"/>
               </a:rPr>
-              <a:t>cartopy.crs.xxxx</a:t>
-            </a:r>
-            <a:r>
-              <a:rPr lang="en-US" altLang="zh-CN" dirty="0">
+              <a:t>C</a:t>
+            </a:r>
+            <a:r>
+              <a:rPr lang="en-US" sz="2800" dirty="0" err="1">
                 <a:solidFill>
                   <a:srgbClr val="333333"/>
                 </a:solidFill>
                 <a:latin typeface="+mn-ea"/>
                 <a:ea typeface="+mn-ea"/>
               </a:rPr>
-              <a:t> (), </a:t>
-            </a:r>
-            <a:r>
-              <a:rPr lang="en-US" altLang="zh-CN" dirty="0" err="1">
+              <a:t>artopy</a:t>
+            </a:r>
+            <a:r>
+              <a:rPr lang="zh-CN" altLang="en-US" sz="2800" dirty="0">
                 <a:solidFill>
                   <a:srgbClr val="333333"/>
                 </a:solidFill>
                 <a:latin typeface="+mn-ea"/>
                 <a:ea typeface="+mn-ea"/>
               </a:rPr>
-              <a:t>xxxx</a:t>
-            </a:r>
-            <a:r>
-              <a:rPr lang="zh-CN" altLang="en-US" dirty="0">
+              <a:t>是英国气象局开发的用于绘制地图投影和地理数据可视化的</a:t>
+            </a:r>
+            <a:r>
+              <a:rPr lang="en-US" sz="2800" dirty="0">
                 <a:solidFill>
                   <a:srgbClr val="333333"/>
                 </a:solidFill>
                 <a:latin typeface="+mn-ea"/>
                 <a:ea typeface="+mn-ea"/>
               </a:rPr>
-              <a:t>为坐标系名称。常用坐标系有</a:t>
-            </a:r>
-            <a:r>
-              <a:rPr lang="en-US" altLang="zh-CN" dirty="0">
+              <a:t>Python</a:t>
+            </a:r>
+            <a:r>
+              <a:rPr lang="zh-CN" altLang="en-US" sz="2800" dirty="0">
                 <a:solidFill>
                   <a:srgbClr val="333333"/>
                 </a:solidFill>
                 <a:latin typeface="+mn-ea"/>
                 <a:ea typeface="+mn-ea"/>
               </a:rPr>
-              <a:t>: .</a:t>
-            </a:r>
-            <a:r>
-              <a:rPr lang="en-US" altLang="zh-CN" dirty="0" err="1">
+              <a:t>库。 </a:t>
+            </a:r>
+            <a:r>
+              <a:rPr lang="en-US" altLang="zh-CN" sz="2800" dirty="0" err="1">
                 <a:solidFill>
                   <a:srgbClr val="333333"/>
                 </a:solidFill>
                 <a:latin typeface="+mn-ea"/>
                 <a:ea typeface="+mn-ea"/>
               </a:rPr>
-              <a:t>PlateCarree</a:t>
-            </a:r>
-            <a:r>
-              <a:rPr lang="en-US" altLang="zh-CN" dirty="0">
+              <a:t>Cartopy</a:t>
+            </a:r>
+            <a:r>
+              <a:rPr lang="zh-CN" altLang="en-US" sz="2800" dirty="0">
                 <a:solidFill>
                   <a:srgbClr val="333333"/>
                 </a:solidFill>
                 <a:latin typeface="+mn-ea"/>
                 <a:ea typeface="+mn-ea"/>
               </a:rPr>
-              <a:t>()</a:t>
-            </a:r>
-            <a:r>
-              <a:rPr lang="zh-CN" altLang="en-US" dirty="0">
+              <a:t>基于</a:t>
+            </a:r>
+            <a:r>
+              <a:rPr lang="en-US" altLang="zh-CN" sz="2800" dirty="0">
                 <a:solidFill>
                   <a:srgbClr val="333333"/>
                 </a:solidFill>
                 <a:latin typeface="+mn-ea"/>
                 <a:ea typeface="+mn-ea"/>
               </a:rPr>
-              <a:t>，</a:t>
-            </a:r>
-            <a:r>
-              <a:rPr lang="en-US" altLang="zh-CN" dirty="0">
+              <a:t>matplotlib</a:t>
+            </a:r>
+            <a:r>
+              <a:rPr lang="zh-CN" altLang="en-US" sz="2800" dirty="0">
                 <a:solidFill>
                   <a:srgbClr val="333333"/>
                 </a:solidFill>
                 <a:latin typeface="+mn-ea"/>
                 <a:ea typeface="+mn-ea"/>
               </a:rPr>
-              <a:t>.Mercator(), UTM()..</a:t>
-            </a:r>
-          </a:p>
-          <a:p>
-            <a:pPr algn="just">
-              <a:lnSpc>
-                <a:spcPct val="200000"/>
-              </a:lnSpc>
-            </a:pPr>
-            <a:r>
-              <a:rPr lang="zh-CN" altLang="en-US" b="1" dirty="0">
-                <a:solidFill>
-                  <a:srgbClr val="333333"/>
-                </a:solidFill>
-                <a:latin typeface="+mn-ea"/>
-                <a:ea typeface="+mn-ea"/>
-              </a:rPr>
-              <a:t>设置显示范围：</a:t>
-            </a:r>
-            <a:r>
-              <a:rPr lang="en-US" altLang="zh-CN" dirty="0" err="1">
-                <a:solidFill>
-                  <a:srgbClr val="333333"/>
-                </a:solidFill>
-                <a:latin typeface="+mn-ea"/>
-                <a:ea typeface="+mn-ea"/>
-              </a:rPr>
-              <a:t>ax.set_extent</a:t>
-            </a:r>
-            <a:r>
-              <a:rPr lang="en-US" altLang="zh-CN" dirty="0">
-                <a:solidFill>
-                  <a:srgbClr val="333333"/>
-                </a:solidFill>
-                <a:latin typeface="+mn-ea"/>
-                <a:ea typeface="+mn-ea"/>
-              </a:rPr>
-              <a:t>()</a:t>
-            </a:r>
-          </a:p>
-          <a:p>
-            <a:pPr algn="just">
-              <a:lnSpc>
-                <a:spcPct val="200000"/>
-              </a:lnSpc>
-            </a:pPr>
-            <a:r>
-              <a:rPr lang="zh-CN" altLang="en-US" b="1" dirty="0">
-                <a:solidFill>
-                  <a:srgbClr val="333333"/>
-                </a:solidFill>
-                <a:latin typeface="+mn-ea"/>
-                <a:ea typeface="+mn-ea"/>
-              </a:rPr>
-              <a:t>添加地图要素：</a:t>
-            </a:r>
-            <a:r>
-              <a:rPr lang="en-US" altLang="zh-CN" dirty="0" err="1">
-                <a:solidFill>
-                  <a:srgbClr val="333333"/>
-                </a:solidFill>
-                <a:latin typeface="+mn-ea"/>
-                <a:ea typeface="+mn-ea"/>
-              </a:rPr>
-              <a:t>ax.add_feature</a:t>
-            </a:r>
-            <a:r>
-              <a:rPr lang="en-US" altLang="zh-CN" dirty="0">
-                <a:solidFill>
-                  <a:srgbClr val="333333"/>
-                </a:solidFill>
-                <a:latin typeface="+mn-ea"/>
-                <a:ea typeface="+mn-ea"/>
-              </a:rPr>
-              <a:t>(</a:t>
-            </a:r>
-            <a:r>
-              <a:rPr lang="en-US" altLang="zh-CN" dirty="0" err="1">
-                <a:solidFill>
-                  <a:srgbClr val="333333"/>
-                </a:solidFill>
-                <a:latin typeface="+mn-ea"/>
-                <a:ea typeface="+mn-ea"/>
-              </a:rPr>
-              <a:t>cfeature.LAND</a:t>
-            </a:r>
-            <a:r>
-              <a:rPr lang="en-US" altLang="zh-CN" dirty="0">
-                <a:solidFill>
-                  <a:srgbClr val="333333"/>
-                </a:solidFill>
-                <a:latin typeface="+mn-ea"/>
-                <a:ea typeface="+mn-ea"/>
-              </a:rPr>
-              <a:t>)</a:t>
-            </a:r>
-          </a:p>
-          <a:p>
-            <a:pPr algn="just">
-              <a:lnSpc>
-                <a:spcPct val="200000"/>
-              </a:lnSpc>
-            </a:pPr>
-            <a:endParaRPr lang="en-US" altLang="zh-CN" dirty="0">
+              <a:t>构建编程接口，具备高效处理地理数据和投影的功能，利用其制作地图简单、直观。</a:t>
+            </a:r>
+            <a:endParaRPr lang="en-US" altLang="zh-CN" sz="2800" dirty="0">
               <a:solidFill>
                 <a:srgbClr val="333333"/>
               </a:solidFill>
@@ -18160,79 +17884,10 @@
           </a:p>
         </p:txBody>
       </p:sp>
-      <p:sp>
-        <p:nvSpPr>
-          <p:cNvPr id="2" name="TextBox 1">
-            <a:extLst>
-              <a:ext uri="{FF2B5EF4-FFF2-40B4-BE49-F238E27FC236}">
-                <a16:creationId xmlns:a16="http://schemas.microsoft.com/office/drawing/2014/main" id="{E664620E-A837-9AC1-7875-9CB087F542B9}"/>
-              </a:ext>
-            </a:extLst>
-          </p:cNvPr>
-          <p:cNvSpPr txBox="1"/>
-          <p:nvPr/>
-        </p:nvSpPr>
-        <p:spPr>
-          <a:xfrm>
-            <a:off x="6858000" y="6349151"/>
-            <a:ext cx="2155371" cy="369332"/>
-          </a:xfrm>
-          <a:prstGeom prst="rect">
-            <a:avLst/>
-          </a:prstGeom>
-          <a:noFill/>
-        </p:spPr>
-        <p:txBody>
-          <a:bodyPr wrap="square" rtlCol="0">
-            <a:spAutoFit/>
-          </a:bodyPr>
-          <a:lstStyle/>
-          <a:p>
-            <a:pPr algn="l"/>
-            <a:r>
-              <a:rPr lang="en-US" sz="1800" dirty="0">
-                <a:solidFill>
-                  <a:schemeClr val="accent2"/>
-                </a:solidFill>
-                <a:latin typeface="+mn-ea"/>
-                <a:ea typeface="+mn-ea"/>
-              </a:rPr>
-              <a:t>…</a:t>
-            </a:r>
-            <a:r>
-              <a:rPr lang="zh-CN" altLang="en-US" sz="1800" dirty="0">
-                <a:solidFill>
-                  <a:schemeClr val="accent2"/>
-                </a:solidFill>
-                <a:latin typeface="+mn-ea"/>
-                <a:ea typeface="+mn-ea"/>
-              </a:rPr>
-              <a:t> </a:t>
-            </a:r>
-            <a:r>
-              <a:rPr lang="en-US" sz="1800" dirty="0" err="1">
-                <a:solidFill>
-                  <a:schemeClr val="accent2"/>
-                </a:solidFill>
-                <a:latin typeface="+mn-ea"/>
-                <a:ea typeface="+mn-ea"/>
-              </a:rPr>
-              <a:t>附代码演示</a:t>
-            </a:r>
-            <a:endParaRPr lang="en-CN" sz="1800" dirty="0">
-              <a:solidFill>
-                <a:schemeClr val="accent2"/>
-              </a:solidFill>
-              <a:latin typeface="+mn-ea"/>
-              <a:ea typeface="+mn-ea"/>
-            </a:endParaRPr>
-          </a:p>
-        </p:txBody>
-      </p:sp>
     </p:spTree>
     <p:extLst>
       <p:ext uri="{BB962C8B-B14F-4D97-AF65-F5344CB8AC3E}">
-        <p14:creationId xmlns:p14="http://schemas.microsoft.com/office/powerpoint/2010/main" val="2343539406"/>
+        <p14:creationId xmlns:p14="http://schemas.microsoft.com/office/powerpoint/2010/main" val="2576220137"/>
       </p:ext>
     </p:extLst>
   </p:cSld>
@@ -18274,8 +17929,404 @@
         </p:nvSpPr>
         <p:spPr>
           <a:xfrm>
-            <a:off x="0" y="8526"/>
-            <a:ext cx="9013371" cy="792162"/>
+            <a:off x="1" y="8526"/>
+            <a:ext cx="10537372" cy="792162"/>
+          </a:xfrm>
+        </p:spPr>
+        <p:txBody>
+          <a:bodyPr/>
+          <a:lstStyle/>
+          <a:p>
+            <a:r>
+              <a:rPr lang="zh-CN" altLang="en-US" dirty="0">
+                <a:latin typeface="微软雅黑" pitchFamily="34" charset="-122"/>
+                <a:ea typeface="微软雅黑" pitchFamily="34" charset="-122"/>
+              </a:rPr>
+              <a:t>二、地理坐标系</a:t>
+            </a:r>
+          </a:p>
+        </p:txBody>
+      </p:sp>
+      <p:sp>
+        <p:nvSpPr>
+          <p:cNvPr id="7" name="TextBox 6">
+            <a:extLst>
+              <a:ext uri="{FF2B5EF4-FFF2-40B4-BE49-F238E27FC236}">
+                <a16:creationId xmlns:a16="http://schemas.microsoft.com/office/drawing/2014/main" id="{3DC73F52-8630-3936-0F04-2680DDF7D3C8}"/>
+              </a:ext>
+            </a:extLst>
+          </p:cNvPr>
+          <p:cNvSpPr txBox="1"/>
+          <p:nvPr/>
+        </p:nvSpPr>
+        <p:spPr>
+          <a:xfrm>
+            <a:off x="413657" y="1015962"/>
+            <a:ext cx="11328399" cy="5040675"/>
+          </a:xfrm>
+          <a:prstGeom prst="rect">
+            <a:avLst/>
+          </a:prstGeom>
+          <a:noFill/>
+        </p:spPr>
+        <p:txBody>
+          <a:bodyPr wrap="square">
+            <a:spAutoFit/>
+          </a:bodyPr>
+          <a:lstStyle/>
+          <a:p>
+            <a:pPr algn="just">
+              <a:lnSpc>
+                <a:spcPct val="200000"/>
+              </a:lnSpc>
+            </a:pPr>
+            <a:r>
+              <a:rPr lang="en-US" altLang="zh-CN" sz="3200" b="1" dirty="0" err="1">
+                <a:solidFill>
+                  <a:srgbClr val="333333"/>
+                </a:solidFill>
+                <a:latin typeface="+mn-ea"/>
+                <a:ea typeface="+mn-ea"/>
+              </a:rPr>
+              <a:t>Cartopy</a:t>
+            </a:r>
+            <a:r>
+              <a:rPr lang="zh-CN" altLang="en-US" sz="3200" b="1" dirty="0">
+                <a:solidFill>
+                  <a:srgbClr val="333333"/>
+                </a:solidFill>
+                <a:latin typeface="+mn-ea"/>
+                <a:ea typeface="+mn-ea"/>
+              </a:rPr>
+              <a:t>开源库</a:t>
+            </a:r>
+            <a:endParaRPr lang="en-US" altLang="zh-CN" sz="3200" b="1" dirty="0">
+              <a:solidFill>
+                <a:srgbClr val="333333"/>
+              </a:solidFill>
+              <a:latin typeface="+mn-ea"/>
+              <a:ea typeface="+mn-ea"/>
+            </a:endParaRPr>
+          </a:p>
+          <a:p>
+            <a:pPr algn="just">
+              <a:lnSpc>
+                <a:spcPct val="200000"/>
+              </a:lnSpc>
+            </a:pPr>
+            <a:r>
+              <a:rPr lang="zh-CN" altLang="en-US" sz="2800" b="1" dirty="0">
+                <a:solidFill>
+                  <a:srgbClr val="333333"/>
+                </a:solidFill>
+                <a:latin typeface="+mn-ea"/>
+                <a:ea typeface="+mn-ea"/>
+              </a:rPr>
+              <a:t>定义投影坐标系：</a:t>
+            </a:r>
+            <a:r>
+              <a:rPr lang="en-US" altLang="zh-CN" sz="2800" dirty="0" err="1">
+                <a:solidFill>
+                  <a:srgbClr val="333333"/>
+                </a:solidFill>
+                <a:latin typeface="+mn-ea"/>
+                <a:ea typeface="+mn-ea"/>
+              </a:rPr>
+              <a:t>cartopy.crs.xxxx</a:t>
+            </a:r>
+            <a:r>
+              <a:rPr lang="en-US" altLang="zh-CN" sz="2800" dirty="0">
+                <a:solidFill>
+                  <a:srgbClr val="333333"/>
+                </a:solidFill>
+                <a:latin typeface="+mn-ea"/>
+                <a:ea typeface="+mn-ea"/>
+              </a:rPr>
+              <a:t> (), </a:t>
+            </a:r>
+            <a:r>
+              <a:rPr lang="en-US" altLang="zh-CN" sz="2800" dirty="0" err="1">
+                <a:solidFill>
+                  <a:srgbClr val="333333"/>
+                </a:solidFill>
+                <a:latin typeface="+mn-ea"/>
+                <a:ea typeface="+mn-ea"/>
+              </a:rPr>
+              <a:t>xxxx</a:t>
+            </a:r>
+            <a:r>
+              <a:rPr lang="zh-CN" altLang="en-US" sz="2800" dirty="0">
+                <a:solidFill>
+                  <a:srgbClr val="333333"/>
+                </a:solidFill>
+                <a:latin typeface="+mn-ea"/>
+                <a:ea typeface="+mn-ea"/>
+              </a:rPr>
+              <a:t>为坐标系名称。常用坐标系有</a:t>
+            </a:r>
+            <a:r>
+              <a:rPr lang="en-US" altLang="zh-CN" sz="2800" dirty="0">
+                <a:solidFill>
+                  <a:srgbClr val="333333"/>
+                </a:solidFill>
+                <a:latin typeface="+mn-ea"/>
+                <a:ea typeface="+mn-ea"/>
+              </a:rPr>
+              <a:t>: .</a:t>
+            </a:r>
+            <a:r>
+              <a:rPr lang="en-US" altLang="zh-CN" sz="2800" dirty="0" err="1">
+                <a:solidFill>
+                  <a:srgbClr val="333333"/>
+                </a:solidFill>
+                <a:latin typeface="+mn-ea"/>
+                <a:ea typeface="+mn-ea"/>
+              </a:rPr>
+              <a:t>PlateCarree</a:t>
+            </a:r>
+            <a:r>
+              <a:rPr lang="en-US" altLang="zh-CN" sz="2800" dirty="0">
+                <a:solidFill>
+                  <a:srgbClr val="333333"/>
+                </a:solidFill>
+                <a:latin typeface="+mn-ea"/>
+                <a:ea typeface="+mn-ea"/>
+              </a:rPr>
+              <a:t>()</a:t>
+            </a:r>
+            <a:r>
+              <a:rPr lang="zh-CN" altLang="en-US" sz="2800" dirty="0">
+                <a:solidFill>
+                  <a:srgbClr val="333333"/>
+                </a:solidFill>
+                <a:latin typeface="+mn-ea"/>
+                <a:ea typeface="+mn-ea"/>
+              </a:rPr>
+              <a:t>，</a:t>
+            </a:r>
+            <a:r>
+              <a:rPr lang="en-US" altLang="zh-CN" sz="2800" dirty="0">
+                <a:solidFill>
+                  <a:srgbClr val="333333"/>
+                </a:solidFill>
+                <a:latin typeface="+mn-ea"/>
+                <a:ea typeface="+mn-ea"/>
+              </a:rPr>
+              <a:t>.Mercator(), UTM()..</a:t>
+            </a:r>
+          </a:p>
+          <a:p>
+            <a:pPr algn="just">
+              <a:lnSpc>
+                <a:spcPct val="200000"/>
+              </a:lnSpc>
+            </a:pPr>
+            <a:r>
+              <a:rPr lang="zh-CN" altLang="en-US" sz="2800" b="1" dirty="0">
+                <a:solidFill>
+                  <a:srgbClr val="333333"/>
+                </a:solidFill>
+                <a:latin typeface="+mn-ea"/>
+                <a:ea typeface="+mn-ea"/>
+              </a:rPr>
+              <a:t>设置显示范围：</a:t>
+            </a:r>
+            <a:r>
+              <a:rPr lang="en-US" altLang="zh-CN" sz="2800" dirty="0" err="1">
+                <a:solidFill>
+                  <a:srgbClr val="333333"/>
+                </a:solidFill>
+                <a:latin typeface="+mn-ea"/>
+                <a:ea typeface="+mn-ea"/>
+              </a:rPr>
+              <a:t>ax.set_extent</a:t>
+            </a:r>
+            <a:r>
+              <a:rPr lang="en-US" altLang="zh-CN" sz="2800" dirty="0">
+                <a:solidFill>
+                  <a:srgbClr val="333333"/>
+                </a:solidFill>
+                <a:latin typeface="+mn-ea"/>
+                <a:ea typeface="+mn-ea"/>
+              </a:rPr>
+              <a:t>()</a:t>
+            </a:r>
+          </a:p>
+          <a:p>
+            <a:pPr algn="just">
+              <a:lnSpc>
+                <a:spcPct val="200000"/>
+              </a:lnSpc>
+            </a:pPr>
+            <a:r>
+              <a:rPr lang="zh-CN" altLang="en-US" sz="2800" b="1" dirty="0">
+                <a:solidFill>
+                  <a:srgbClr val="333333"/>
+                </a:solidFill>
+                <a:latin typeface="+mn-ea"/>
+                <a:ea typeface="+mn-ea"/>
+              </a:rPr>
+              <a:t>添加地图要素：</a:t>
+            </a:r>
+            <a:r>
+              <a:rPr lang="en-US" altLang="zh-CN" sz="2800" dirty="0" err="1">
+                <a:solidFill>
+                  <a:srgbClr val="333333"/>
+                </a:solidFill>
+                <a:latin typeface="+mn-ea"/>
+                <a:ea typeface="+mn-ea"/>
+              </a:rPr>
+              <a:t>ax.add_feature</a:t>
+            </a:r>
+            <a:r>
+              <a:rPr lang="en-US" altLang="zh-CN" sz="2800" dirty="0">
+                <a:solidFill>
+                  <a:srgbClr val="333333"/>
+                </a:solidFill>
+                <a:latin typeface="+mn-ea"/>
+                <a:ea typeface="+mn-ea"/>
+              </a:rPr>
+              <a:t>(</a:t>
+            </a:r>
+            <a:r>
+              <a:rPr lang="en-US" altLang="zh-CN" sz="2800" dirty="0" err="1">
+                <a:solidFill>
+                  <a:srgbClr val="333333"/>
+                </a:solidFill>
+                <a:latin typeface="+mn-ea"/>
+                <a:ea typeface="+mn-ea"/>
+              </a:rPr>
+              <a:t>cfeature.LAND</a:t>
+            </a:r>
+            <a:r>
+              <a:rPr lang="en-US" altLang="zh-CN" sz="2800" dirty="0">
+                <a:solidFill>
+                  <a:srgbClr val="333333"/>
+                </a:solidFill>
+                <a:latin typeface="+mn-ea"/>
+                <a:ea typeface="+mn-ea"/>
+              </a:rPr>
+              <a:t>)</a:t>
+            </a:r>
+          </a:p>
+        </p:txBody>
+      </p:sp>
+      <p:sp>
+        <p:nvSpPr>
+          <p:cNvPr id="2" name="TextBox 1">
+            <a:extLst>
+              <a:ext uri="{FF2B5EF4-FFF2-40B4-BE49-F238E27FC236}">
+                <a16:creationId xmlns:a16="http://schemas.microsoft.com/office/drawing/2014/main" id="{E664620E-A837-9AC1-7875-9CB087F542B9}"/>
+              </a:ext>
+            </a:extLst>
+          </p:cNvPr>
+          <p:cNvSpPr txBox="1"/>
+          <p:nvPr/>
+        </p:nvSpPr>
+        <p:spPr>
+          <a:xfrm>
+            <a:off x="9884230" y="6298351"/>
+            <a:ext cx="2155371" cy="369332"/>
+          </a:xfrm>
+          <a:prstGeom prst="rect">
+            <a:avLst/>
+          </a:prstGeom>
+          <a:noFill/>
+        </p:spPr>
+        <p:txBody>
+          <a:bodyPr wrap="square" rtlCol="0">
+            <a:spAutoFit/>
+          </a:bodyPr>
+          <a:lstStyle/>
+          <a:p>
+            <a:pPr algn="l"/>
+            <a:r>
+              <a:rPr lang="en-US" sz="1800" dirty="0">
+                <a:solidFill>
+                  <a:schemeClr val="accent2"/>
+                </a:solidFill>
+                <a:latin typeface="+mn-ea"/>
+                <a:ea typeface="+mn-ea"/>
+              </a:rPr>
+              <a:t>…</a:t>
+            </a:r>
+            <a:r>
+              <a:rPr lang="zh-CN" altLang="en-US" sz="1800" dirty="0">
+                <a:solidFill>
+                  <a:schemeClr val="accent2"/>
+                </a:solidFill>
+                <a:latin typeface="+mn-ea"/>
+                <a:ea typeface="+mn-ea"/>
+              </a:rPr>
+              <a:t> </a:t>
+            </a:r>
+            <a:r>
+              <a:rPr lang="en-US" sz="1800" dirty="0" err="1">
+                <a:solidFill>
+                  <a:schemeClr val="accent2"/>
+                </a:solidFill>
+                <a:latin typeface="+mn-ea"/>
+                <a:ea typeface="+mn-ea"/>
+              </a:rPr>
+              <a:t>附代码演示</a:t>
+            </a:r>
+            <a:endParaRPr lang="en-CN" sz="1800" dirty="0">
+              <a:solidFill>
+                <a:schemeClr val="accent2"/>
+              </a:solidFill>
+              <a:latin typeface="+mn-ea"/>
+              <a:ea typeface="+mn-ea"/>
+            </a:endParaRPr>
+          </a:p>
+        </p:txBody>
+      </p:sp>
+    </p:spTree>
+    <p:extLst>
+      <p:ext uri="{BB962C8B-B14F-4D97-AF65-F5344CB8AC3E}">
+        <p14:creationId xmlns:p14="http://schemas.microsoft.com/office/powerpoint/2010/main" val="2343539406"/>
+      </p:ext>
+    </p:extLst>
+  </p:cSld>
+  <p:clrMapOvr>
+    <a:masterClrMapping/>
+  </p:clrMapOvr>
+  <p:transition>
+    <p:fade/>
+  </p:transition>
+</p:sld>
+</file>
+
+<file path=ppt/slides/slide12.xml><?xml version="1.0" encoding="utf-8"?>
+<p:sld xmlns:a="http://schemas.openxmlformats.org/drawingml/2006/main" xmlns:r="http://schemas.openxmlformats.org/officeDocument/2006/relationships" xmlns:p="http://schemas.openxmlformats.org/presentationml/2006/main">
+  <p:cSld>
+    <p:spTree>
+      <p:nvGrpSpPr>
+        <p:cNvPr id="1" name=""/>
+        <p:cNvGrpSpPr/>
+        <p:nvPr/>
+      </p:nvGrpSpPr>
+      <p:grpSpPr>
+        <a:xfrm>
+          <a:off x="0" y="0"/>
+          <a:ext cx="0" cy="0"/>
+          <a:chOff x="0" y="0"/>
+          <a:chExt cx="0" cy="0"/>
+        </a:xfrm>
+      </p:grpSpPr>
+      <p:sp>
+        <p:nvSpPr>
+          <p:cNvPr id="3" name="标题 2"/>
+          <p:cNvSpPr>
+            <a:spLocks noGrp="1"/>
+          </p:cNvSpPr>
+          <p:nvPr>
+            <p:ph type="title"/>
+          </p:nvPr>
+        </p:nvSpPr>
+        <p:spPr>
+          <a:xfrm>
+            <a:off x="1" y="8526"/>
+            <a:ext cx="10537372" cy="792162"/>
           </a:xfrm>
         </p:spPr>
         <p:txBody>
@@ -18307,8 +18358,8 @@
         </p:nvSpPr>
         <p:spPr>
           <a:xfrm>
-            <a:off x="414554" y="1013040"/>
-            <a:ext cx="8314891" cy="743986"/>
+            <a:off x="660399" y="1013040"/>
+            <a:ext cx="9593047" cy="743986"/>
           </a:xfrm>
           <a:prstGeom prst="rect">
             <a:avLst/>
@@ -18360,8 +18411,8 @@
         </p:nvSpPr>
         <p:spPr>
           <a:xfrm>
-            <a:off x="414554" y="1783013"/>
-            <a:ext cx="8132546" cy="2360070"/>
+            <a:off x="660399" y="1783013"/>
+            <a:ext cx="10747829" cy="667299"/>
           </a:xfrm>
           <a:prstGeom prst="rect">
             <a:avLst/>
@@ -18410,34 +18461,6 @@
               </a:rPr>
               <a:t>对不同投影坐标系统下空间数据进行可视化展示。</a:t>
             </a:r>
-            <a:endParaRPr lang="en-US" altLang="zh-CN" sz="2200" dirty="0">
-              <a:solidFill>
-                <a:srgbClr val="333333"/>
-              </a:solidFill>
-              <a:latin typeface="+mn-ea"/>
-              <a:ea typeface="+mn-ea"/>
-            </a:endParaRPr>
-          </a:p>
-          <a:p>
-            <a:pPr algn="just">
-              <a:lnSpc>
-                <a:spcPct val="200000"/>
-              </a:lnSpc>
-            </a:pPr>
-            <a:endParaRPr lang="en-US" altLang="zh-CN" sz="2200" dirty="0">
-              <a:solidFill>
-                <a:srgbClr val="333333"/>
-              </a:solidFill>
-              <a:latin typeface="+mn-ea"/>
-              <a:ea typeface="+mn-ea"/>
-            </a:endParaRPr>
-          </a:p>
-          <a:p>
-            <a:pPr algn="just">
-              <a:lnSpc>
-                <a:spcPct val="200000"/>
-              </a:lnSpc>
-            </a:pPr>
             <a:endParaRPr lang="en-US" altLang="zh-CN" sz="2200" dirty="0">
               <a:solidFill>
                 <a:srgbClr val="333333"/>
@@ -18489,7 +18512,7 @@
         </p:nvSpPr>
         <p:spPr>
           <a:xfrm>
-            <a:off x="0" y="0"/>
+            <a:off x="7191" y="0"/>
             <a:ext cx="1835696" cy="6858000"/>
           </a:xfrm>
           <a:prstGeom prst="rect">
@@ -18509,7 +18532,7 @@
           <a:bodyPr wrap="none" anchor="ctr"/>
           <a:lstStyle/>
           <a:p>
-            <a:pPr eaLnBrk="1" fontAlgn="auto" hangingPunct="1">
+            <a:pPr fontAlgn="auto">
               <a:spcBef>
                 <a:spcPts val="0"/>
               </a:spcBef>
@@ -18540,7 +18563,7 @@
         </p:nvGrpSpPr>
         <p:grpSpPr>
           <a:xfrm>
-            <a:off x="2175285" y="3892042"/>
+            <a:off x="1925666" y="3834893"/>
             <a:ext cx="6649827" cy="717997"/>
             <a:chOff x="2121801" y="3511390"/>
             <a:chExt cx="5938688" cy="576000"/>
@@ -18591,7 +18614,7 @@
             <a:bodyPr rtlCol="0" anchor="ctr"/>
             <a:lstStyle/>
             <a:p>
-              <a:pPr algn="ctr" eaLnBrk="1" fontAlgn="auto" hangingPunct="1">
+              <a:pPr fontAlgn="auto">
                 <a:spcBef>
                   <a:spcPts val="0"/>
                 </a:spcBef>
@@ -18676,8 +18699,8 @@
         </p:nvSpPr>
         <p:spPr>
           <a:xfrm>
-            <a:off x="7172373" y="260648"/>
-            <a:ext cx="1608134" cy="923330"/>
+            <a:off x="8696372" y="260648"/>
+            <a:ext cx="3305127" cy="923330"/>
           </a:xfrm>
           <a:prstGeom prst="rect">
             <a:avLst/>
@@ -18685,12 +18708,12 @@
           <a:noFill/>
         </p:spPr>
         <p:txBody>
-          <a:bodyPr wrap="none" rtlCol="0">
+          <a:bodyPr wrap="square" rtlCol="0">
             <a:spAutoFit/>
           </a:bodyPr>
           <a:lstStyle/>
           <a:p>
-            <a:pPr algn="r" eaLnBrk="1" fontAlgn="auto" hangingPunct="1">
+            <a:pPr algn="r" fontAlgn="auto">
               <a:spcBef>
                 <a:spcPts val="0"/>
               </a:spcBef>
@@ -18732,7 +18755,7 @@
         </p:nvGrpSpPr>
         <p:grpSpPr>
           <a:xfrm>
-            <a:off x="2175285" y="2605776"/>
+            <a:off x="1925666" y="2548626"/>
             <a:ext cx="6649827" cy="772176"/>
             <a:chOff x="2121802" y="2115450"/>
             <a:chExt cx="5221533" cy="576000"/>
@@ -18789,7 +18812,7 @@
             <a:bodyPr rtlCol="0" anchor="ctr"/>
             <a:lstStyle/>
             <a:p>
-              <a:pPr algn="ctr" eaLnBrk="1" fontAlgn="auto" hangingPunct="1">
+              <a:pPr fontAlgn="auto">
                 <a:spcBef>
                   <a:spcPts val="0"/>
                 </a:spcBef>
@@ -18837,7 +18860,7 @@
             </a:bodyPr>
             <a:lstStyle/>
             <a:p>
-              <a:pPr algn="l" eaLnBrk="1" fontAlgn="auto" hangingPunct="1">
+              <a:pPr algn="l" fontAlgn="auto">
                 <a:spcBef>
                   <a:spcPts val="0"/>
                 </a:spcBef>
@@ -18903,8 +18926,8 @@
         </p:nvSpPr>
         <p:spPr>
           <a:xfrm>
-            <a:off x="0" y="3471863"/>
-            <a:ext cx="9144000" cy="1543050"/>
+            <a:off x="3085" y="3471863"/>
+            <a:ext cx="12188915" cy="1543050"/>
           </a:xfrm>
           <a:prstGeom prst="rect">
             <a:avLst/>
@@ -18941,8 +18964,8 @@
         </p:nvSpPr>
         <p:spPr>
           <a:xfrm>
-            <a:off x="189064" y="3868892"/>
-            <a:ext cx="8753057" cy="707886"/>
+            <a:off x="257175" y="3868892"/>
+            <a:ext cx="11667790" cy="707886"/>
           </a:xfrm>
           <a:prstGeom prst="rect">
             <a:avLst/>
@@ -18991,8 +19014,8 @@
         </p:nvSpPr>
         <p:spPr>
           <a:xfrm>
-            <a:off x="0" y="5014912"/>
-            <a:ext cx="9144000" cy="72000"/>
+            <a:off x="3085" y="5014912"/>
+            <a:ext cx="12188915" cy="72000"/>
           </a:xfrm>
           <a:prstGeom prst="rect">
             <a:avLst/>
@@ -19066,8 +19089,8 @@
         </p:nvSpPr>
         <p:spPr>
           <a:xfrm>
-            <a:off x="0" y="8526"/>
-            <a:ext cx="9013371" cy="792162"/>
+            <a:off x="1" y="8526"/>
+            <a:ext cx="10537372" cy="792162"/>
           </a:xfrm>
         </p:spPr>
         <p:txBody>
@@ -19098,8 +19121,8 @@
         </p:nvSpPr>
         <p:spPr>
           <a:xfrm>
-            <a:off x="317665" y="846748"/>
-            <a:ext cx="8508670" cy="662489"/>
+            <a:off x="171450" y="846749"/>
+            <a:ext cx="10178885" cy="662489"/>
           </a:xfrm>
           <a:prstGeom prst="rect">
             <a:avLst/>
@@ -19182,8 +19205,8 @@
         </p:nvSpPr>
         <p:spPr>
           <a:xfrm>
-            <a:off x="462543" y="1562799"/>
-            <a:ext cx="8363791" cy="540341"/>
+            <a:off x="695325" y="1442563"/>
+            <a:ext cx="8750135" cy="581057"/>
           </a:xfrm>
           <a:prstGeom prst="rect">
             <a:avLst/>
@@ -19202,7 +19225,7 @@
               </a:lnSpc>
             </a:pPr>
             <a:r>
-              <a:rPr lang="zh-CN" altLang="en-US" sz="2200" b="1" dirty="0">
+              <a:rPr lang="zh-CN" altLang="en-US" b="1" dirty="0">
                 <a:solidFill>
                   <a:srgbClr val="333333"/>
                 </a:solidFill>
@@ -19212,7 +19235,7 @@
               <a:t>点击</a:t>
             </a:r>
             <a:r>
-              <a:rPr lang="en-US" altLang="zh-CN" sz="2200" b="1" dirty="0">
+              <a:rPr lang="en-US" altLang="zh-CN" b="1" dirty="0">
                 <a:solidFill>
                   <a:srgbClr val="333333"/>
                 </a:solidFill>
@@ -19222,7 +19245,7 @@
               <a:t>vector</a:t>
             </a:r>
             <a:r>
-              <a:rPr lang="zh-CN" altLang="en-US" sz="2200" b="1" dirty="0">
+              <a:rPr lang="zh-CN" altLang="en-US" b="1" dirty="0">
                 <a:solidFill>
                   <a:srgbClr val="333333"/>
                 </a:solidFill>
@@ -19232,7 +19255,7 @@
               <a:t> </a:t>
             </a:r>
             <a:r>
-              <a:rPr lang="en-US" altLang="zh-CN" sz="2200" b="1" dirty="0">
+              <a:rPr lang="en-US" altLang="zh-CN" b="1" dirty="0">
                 <a:solidFill>
                   <a:srgbClr val="333333"/>
                 </a:solidFill>
@@ -19266,7 +19289,7 @@
         </p:blipFill>
         <p:spPr>
           <a:xfrm>
-            <a:off x="424772" y="2260349"/>
+            <a:off x="1043897" y="2206788"/>
             <a:ext cx="4147228" cy="4359907"/>
           </a:xfrm>
           <a:prstGeom prst="rect">
@@ -19293,7 +19316,7 @@
         </p:nvSpPr>
         <p:spPr>
           <a:xfrm>
-            <a:off x="3063240" y="5431536"/>
+            <a:off x="3682365" y="5377974"/>
             <a:ext cx="1609344" cy="310896"/>
           </a:xfrm>
           <a:prstGeom prst="rect">
@@ -19345,7 +19368,7 @@
         </p:blipFill>
         <p:spPr>
           <a:xfrm>
-            <a:off x="4205269" y="2845953"/>
+            <a:off x="5757844" y="2792391"/>
             <a:ext cx="4808102" cy="3310128"/>
           </a:xfrm>
           <a:prstGeom prst="rect">
@@ -19367,7 +19390,7 @@
         </p:nvSpPr>
         <p:spPr>
           <a:xfrm>
-            <a:off x="8631936" y="3776472"/>
+            <a:off x="10184511" y="3722910"/>
             <a:ext cx="512064" cy="365760"/>
           </a:xfrm>
           <a:prstGeom prst="ellipse">
@@ -19411,7 +19434,7 @@
         </p:nvSpPr>
         <p:spPr>
           <a:xfrm>
-            <a:off x="4736592" y="2414016"/>
+            <a:off x="6289168" y="2360454"/>
             <a:ext cx="3438143" cy="400110"/>
           </a:xfrm>
           <a:prstGeom prst="rect">
@@ -19460,7 +19483,7 @@
         </p:nvSpPr>
         <p:spPr>
           <a:xfrm>
-            <a:off x="6523160" y="6413005"/>
+            <a:off x="8075736" y="6359443"/>
             <a:ext cx="2490211" cy="369332"/>
           </a:xfrm>
           <a:prstGeom prst="rect">
@@ -19560,8 +19583,8 @@
         </p:nvSpPr>
         <p:spPr>
           <a:xfrm>
-            <a:off x="0" y="8526"/>
-            <a:ext cx="9013371" cy="792162"/>
+            <a:off x="1" y="8526"/>
+            <a:ext cx="10537372" cy="792162"/>
           </a:xfrm>
         </p:spPr>
         <p:txBody>
@@ -19592,8 +19615,8 @@
         </p:nvSpPr>
         <p:spPr>
           <a:xfrm>
-            <a:off x="317665" y="846748"/>
-            <a:ext cx="8508670" cy="662489"/>
+            <a:off x="361950" y="846749"/>
+            <a:ext cx="9988385" cy="743986"/>
           </a:xfrm>
           <a:prstGeom prst="rect">
             <a:avLst/>
@@ -19613,7 +19636,7 @@
               <a:buAutoNum type="arabicPeriod"/>
             </a:pPr>
             <a:r>
-              <a:rPr lang="en-US" altLang="zh-CN" sz="2800" b="1" dirty="0">
+              <a:rPr lang="en-US" altLang="zh-CN" sz="3200" b="1" dirty="0">
                 <a:solidFill>
                   <a:srgbClr val="333333"/>
                 </a:solidFill>
@@ -19623,7 +19646,7 @@
               <a:t>QGIS</a:t>
             </a:r>
             <a:r>
-              <a:rPr lang="zh-CN" altLang="en-US" sz="2800" b="1" dirty="0">
+              <a:rPr lang="zh-CN" altLang="en-US" sz="3200" b="1" dirty="0">
                 <a:solidFill>
                   <a:srgbClr val="333333"/>
                 </a:solidFill>
@@ -19633,7 +19656,7 @@
               <a:t>操作</a:t>
             </a:r>
             <a:r>
-              <a:rPr lang="en-US" altLang="zh-CN" sz="2800" b="1" dirty="0">
+              <a:rPr lang="en-US" altLang="zh-CN" sz="3200" b="1" dirty="0">
                 <a:solidFill>
                   <a:srgbClr val="333333"/>
                 </a:solidFill>
@@ -19643,7 +19666,7 @@
               <a:t>-</a:t>
             </a:r>
             <a:r>
-              <a:rPr lang="zh-CN" altLang="en-US" sz="2800" b="1" dirty="0">
+              <a:rPr lang="zh-CN" altLang="en-US" sz="3200" b="1" dirty="0">
                 <a:solidFill>
                   <a:srgbClr val="333333"/>
                 </a:solidFill>
@@ -19652,7 +19675,7 @@
               </a:rPr>
               <a:t>坐标系统可视化切换</a:t>
             </a:r>
-            <a:endParaRPr lang="en-US" altLang="zh-CN" sz="2800" b="1" dirty="0">
+            <a:endParaRPr lang="en-US" altLang="zh-CN" sz="3200" b="1" dirty="0">
               <a:solidFill>
                 <a:srgbClr val="333333"/>
               </a:solidFill>
@@ -19676,8 +19699,8 @@
         </p:nvSpPr>
         <p:spPr>
           <a:xfrm>
-            <a:off x="462543" y="1617663"/>
-            <a:ext cx="3816849" cy="540341"/>
+            <a:off x="1310269" y="1627189"/>
+            <a:ext cx="3816849" cy="581057"/>
           </a:xfrm>
           <a:prstGeom prst="rect">
             <a:avLst/>
@@ -19696,7 +19719,7 @@
               </a:lnSpc>
             </a:pPr>
             <a:r>
-              <a:rPr lang="zh-CN" altLang="en-US" sz="2200" dirty="0">
+              <a:rPr lang="zh-CN" altLang="en-US" dirty="0">
                 <a:solidFill>
                   <a:srgbClr val="333333"/>
                 </a:solidFill>
@@ -19706,7 +19729,7 @@
               <a:t>点击右下角</a:t>
             </a:r>
             <a:r>
-              <a:rPr lang="en-US" altLang="zh-CN" sz="2200" dirty="0">
+              <a:rPr lang="en-US" altLang="zh-CN" dirty="0">
                 <a:solidFill>
                   <a:srgbClr val="333333"/>
                 </a:solidFill>
@@ -19716,7 +19739,7 @@
               <a:t>: </a:t>
             </a:r>
             <a:r>
-              <a:rPr lang="en-US" altLang="zh-CN" sz="2200" dirty="0" err="1">
+              <a:rPr lang="en-US" altLang="zh-CN" dirty="0" err="1">
                 <a:solidFill>
                   <a:srgbClr val="333333"/>
                 </a:solidFill>
@@ -19726,7 +19749,7 @@
               <a:t>EPSG:xxxx</a:t>
             </a:r>
             <a:r>
-              <a:rPr lang="en-US" altLang="zh-CN" sz="2200" dirty="0">
+              <a:rPr lang="en-US" altLang="zh-CN" dirty="0">
                 <a:solidFill>
                   <a:srgbClr val="333333"/>
                 </a:solidFill>
@@ -19752,8 +19775,8 @@
         </p:nvSpPr>
         <p:spPr>
           <a:xfrm>
-            <a:off x="5566084" y="2215721"/>
-            <a:ext cx="3148148" cy="400110"/>
+            <a:off x="7623484" y="2044271"/>
+            <a:ext cx="3148148" cy="830997"/>
           </a:xfrm>
           <a:prstGeom prst="rect">
             <a:avLst/>
@@ -19768,7 +19791,7 @@
           <a:p>
             <a:pPr algn="l"/>
             <a:r>
-              <a:rPr lang="en-US" sz="2000" b="1" dirty="0" err="1">
+              <a:rPr lang="en-US" b="1" dirty="0" err="1">
                 <a:solidFill>
                   <a:schemeClr val="accent2"/>
                 </a:solidFill>
@@ -19777,7 +19800,7 @@
               </a:rPr>
               <a:t>选择需要切换的坐标系</a:t>
             </a:r>
-            <a:endParaRPr lang="en-CN" sz="2000" b="1" dirty="0">
+            <a:endParaRPr lang="en-CN" b="1" dirty="0">
               <a:solidFill>
                 <a:schemeClr val="accent2"/>
               </a:solidFill>
@@ -19808,7 +19831,7 @@
         </p:blipFill>
         <p:spPr>
           <a:xfrm>
-            <a:off x="219025" y="2551823"/>
+            <a:off x="1066750" y="2380374"/>
             <a:ext cx="4795786" cy="4125711"/>
           </a:xfrm>
           <a:prstGeom prst="rect">
@@ -19835,7 +19858,7 @@
         </p:nvSpPr>
         <p:spPr>
           <a:xfrm>
-            <a:off x="3547872" y="6366638"/>
+            <a:off x="4395597" y="6195188"/>
             <a:ext cx="1609344" cy="310896"/>
           </a:xfrm>
           <a:prstGeom prst="rect">
@@ -19855,7 +19878,7 @@
           <a:lstStyle/>
           <a:p>
             <a:pPr algn="l"/>
-            <a:endParaRPr lang="en-CN" b="1" dirty="0">
+            <a:endParaRPr lang="en-CN" sz="2800" b="1" dirty="0">
               <a:solidFill>
                 <a:schemeClr val="accent3"/>
               </a:solidFill>
@@ -19887,7 +19910,7 @@
         </p:blipFill>
         <p:spPr>
           <a:xfrm>
-            <a:off x="4250237" y="2615831"/>
+            <a:off x="6307638" y="2444381"/>
             <a:ext cx="4537147" cy="3696590"/>
           </a:xfrm>
           <a:prstGeom prst="rect">
@@ -19909,8 +19932,8 @@
         </p:nvSpPr>
         <p:spPr>
           <a:xfrm>
-            <a:off x="6523160" y="6413005"/>
-            <a:ext cx="2490211" cy="369332"/>
+            <a:off x="8580561" y="6241555"/>
+            <a:ext cx="2490211" cy="400110"/>
           </a:xfrm>
           <a:prstGeom prst="rect">
             <a:avLst/>
@@ -19925,7 +19948,7 @@
           <a:p>
             <a:pPr algn="l"/>
             <a:r>
-              <a:rPr lang="en-US" sz="1800" dirty="0">
+              <a:rPr lang="en-US" sz="2000" dirty="0">
                 <a:solidFill>
                   <a:schemeClr val="accent2"/>
                 </a:solidFill>
@@ -19935,7 +19958,7 @@
               <a:t>…</a:t>
             </a:r>
             <a:r>
-              <a:rPr lang="zh-CN" altLang="en-US" sz="1800" dirty="0">
+              <a:rPr lang="zh-CN" altLang="en-US" sz="2000" dirty="0">
                 <a:solidFill>
                   <a:schemeClr val="accent2"/>
                 </a:solidFill>
@@ -19945,7 +19968,7 @@
               <a:t> </a:t>
             </a:r>
             <a:r>
-              <a:rPr lang="en-US" sz="1800" dirty="0" err="1">
+              <a:rPr lang="en-US" sz="2000" dirty="0" err="1">
                 <a:solidFill>
                   <a:schemeClr val="accent2"/>
                 </a:solidFill>
@@ -19954,7 +19977,7 @@
               </a:rPr>
               <a:t>附软件操作演示</a:t>
             </a:r>
-            <a:endParaRPr lang="en-CN" sz="1800" dirty="0">
+            <a:endParaRPr lang="en-CN" sz="2000" dirty="0">
               <a:solidFill>
                 <a:schemeClr val="accent2"/>
               </a:solidFill>
@@ -20009,8 +20032,8 @@
         </p:nvSpPr>
         <p:spPr>
           <a:xfrm>
-            <a:off x="0" y="8526"/>
-            <a:ext cx="9013371" cy="792162"/>
+            <a:off x="1" y="8526"/>
+            <a:ext cx="10537372" cy="792162"/>
           </a:xfrm>
         </p:spPr>
         <p:txBody>
@@ -20041,8 +20064,8 @@
         </p:nvSpPr>
         <p:spPr>
           <a:xfrm>
-            <a:off x="317665" y="846748"/>
-            <a:ext cx="8508670" cy="2386038"/>
+            <a:off x="504825" y="945133"/>
+            <a:ext cx="11277600" cy="743986"/>
           </a:xfrm>
           <a:prstGeom prst="rect">
             <a:avLst/>
@@ -20061,7 +20084,7 @@
               </a:lnSpc>
             </a:pPr>
             <a:r>
-              <a:rPr lang="en-US" altLang="zh-CN" sz="2800" b="1" dirty="0">
+              <a:rPr lang="en-US" altLang="zh-CN" sz="3200" b="1" dirty="0">
                 <a:solidFill>
                   <a:srgbClr val="333333"/>
                 </a:solidFill>
@@ -20071,7 +20094,7 @@
               <a:t>Python</a:t>
             </a:r>
             <a:r>
-              <a:rPr lang="zh-CN" altLang="en-US" sz="2800" b="1" dirty="0">
+              <a:rPr lang="zh-CN" altLang="en-US" sz="3200" b="1" dirty="0">
                 <a:solidFill>
                   <a:srgbClr val="333333"/>
                 </a:solidFill>
@@ -20081,7 +20104,7 @@
               <a:t>程序设计</a:t>
             </a:r>
             <a:r>
-              <a:rPr lang="en-US" altLang="zh-CN" sz="2800" b="1" dirty="0">
+              <a:rPr lang="en-US" altLang="zh-CN" sz="3200" b="1" dirty="0">
                 <a:solidFill>
                   <a:srgbClr val="333333"/>
                 </a:solidFill>
@@ -20091,7 +20114,7 @@
               <a:t>-</a:t>
             </a:r>
             <a:r>
-              <a:rPr lang="zh-CN" altLang="en-US" sz="2800" b="1" dirty="0">
+              <a:rPr lang="zh-CN" altLang="en-US" sz="3200" b="1" dirty="0">
                 <a:solidFill>
                   <a:srgbClr val="333333"/>
                 </a:solidFill>
@@ -20100,35 +20123,7 @@
               </a:rPr>
               <a:t>坐标转换</a:t>
             </a:r>
-            <a:endParaRPr lang="en-US" altLang="zh-CN" sz="2800" b="1" dirty="0">
-              <a:solidFill>
-                <a:srgbClr val="333333"/>
-              </a:solidFill>
-              <a:latin typeface="+mn-ea"/>
-              <a:ea typeface="+mn-ea"/>
-            </a:endParaRPr>
-          </a:p>
-          <a:p>
-            <a:pPr algn="just">
-              <a:lnSpc>
-                <a:spcPct val="150000"/>
-              </a:lnSpc>
-            </a:pPr>
-            <a:endParaRPr lang="en-US" altLang="zh-CN" sz="2800" b="1" dirty="0">
-              <a:solidFill>
-                <a:srgbClr val="333333"/>
-              </a:solidFill>
-              <a:latin typeface="+mn-ea"/>
-              <a:ea typeface="+mn-ea"/>
-            </a:endParaRPr>
-          </a:p>
-          <a:p>
-            <a:pPr algn="just">
-              <a:lnSpc>
-                <a:spcPct val="150000"/>
-              </a:lnSpc>
-            </a:pPr>
-            <a:endParaRPr lang="en-US" altLang="zh-CN" sz="2800" b="1" dirty="0">
+            <a:endParaRPr lang="en-US" altLang="zh-CN" sz="3200" b="1" dirty="0">
               <a:solidFill>
                 <a:srgbClr val="333333"/>
               </a:solidFill>
@@ -20152,8 +20147,8 @@
         </p:nvSpPr>
         <p:spPr>
           <a:xfrm>
-            <a:off x="493776" y="1617663"/>
-            <a:ext cx="8046720" cy="3166380"/>
+            <a:off x="504825" y="1979160"/>
+            <a:ext cx="11210925" cy="3678764"/>
           </a:xfrm>
           <a:prstGeom prst="rect">
             <a:avLst/>
@@ -20172,7 +20167,7 @@
               </a:lnSpc>
             </a:pPr>
             <a:r>
-              <a:rPr lang="en-US" altLang="zh-CN" b="1" dirty="0">
+              <a:rPr lang="en-US" altLang="zh-CN" sz="2800" b="1" dirty="0">
                 <a:solidFill>
                   <a:srgbClr val="333333"/>
                 </a:solidFill>
@@ -20182,7 +20177,7 @@
               <a:t>EPSG</a:t>
             </a:r>
             <a:r>
-              <a:rPr lang="zh-CN" altLang="en-US" dirty="0">
+              <a:rPr lang="zh-CN" altLang="en-US" sz="2800" dirty="0">
                 <a:solidFill>
                   <a:srgbClr val="333333"/>
                 </a:solidFill>
@@ -20192,7 +20187,7 @@
               <a:t>：全称</a:t>
             </a:r>
             <a:r>
-              <a:rPr lang="en-US" dirty="0">
+              <a:rPr lang="en-US" sz="2800" dirty="0">
                 <a:solidFill>
                   <a:srgbClr val="333333"/>
                 </a:solidFill>
@@ -20202,7 +20197,7 @@
               <a:t>The European Petroleum Survey Group</a:t>
             </a:r>
             <a:r>
-              <a:rPr lang="zh-CN" altLang="en-US" dirty="0">
+              <a:rPr lang="zh-CN" altLang="en-US" sz="2800" dirty="0">
                 <a:solidFill>
                   <a:srgbClr val="333333"/>
                 </a:solidFill>
@@ -20211,7 +20206,7 @@
               </a:rPr>
               <a:t>即欧洲石油调查组织。 该组织维护了几乎全球各种空间参考系统的数据，并对这些参考系统进行了编码。 </a:t>
             </a:r>
-            <a:endParaRPr lang="en-US" altLang="zh-CN" dirty="0">
+            <a:endParaRPr lang="en-US" altLang="zh-CN" sz="2800" dirty="0">
               <a:solidFill>
                 <a:srgbClr val="333333"/>
               </a:solidFill>
@@ -20226,7 +20221,7 @@
               </a:lnSpc>
             </a:pPr>
             <a:r>
-              <a:rPr lang="zh-CN" altLang="en-US" dirty="0">
+              <a:rPr lang="zh-CN" altLang="en-US" sz="2800" dirty="0">
                 <a:solidFill>
                   <a:srgbClr val="333333"/>
                 </a:solidFill>
@@ -20236,7 +20231,7 @@
               <a:t>如</a:t>
             </a:r>
             <a:r>
-              <a:rPr lang="en-US" altLang="zh-CN" dirty="0">
+              <a:rPr lang="en-US" altLang="zh-CN" sz="2800" dirty="0">
                 <a:solidFill>
                   <a:srgbClr val="333333"/>
                 </a:solidFill>
@@ -20246,7 +20241,7 @@
               <a:t>WGS84</a:t>
             </a:r>
             <a:r>
-              <a:rPr lang="zh-CN" altLang="en-US" dirty="0">
+              <a:rPr lang="zh-CN" altLang="en-US" sz="2800" dirty="0">
                 <a:solidFill>
                   <a:srgbClr val="333333"/>
                 </a:solidFill>
@@ -20256,7 +20251,7 @@
               <a:t>坐标系编码为：</a:t>
             </a:r>
             <a:r>
-              <a:rPr lang="en-US" altLang="zh-CN" dirty="0">
+              <a:rPr lang="en-US" altLang="zh-CN" sz="2800" dirty="0">
                 <a:solidFill>
                   <a:srgbClr val="333333"/>
                 </a:solidFill>
@@ -20266,7 +20261,7 @@
               <a:t>4326;</a:t>
             </a:r>
             <a:r>
-              <a:rPr lang="zh-CN" altLang="en-US" dirty="0">
+              <a:rPr lang="zh-CN" altLang="en-US" sz="2800" dirty="0">
                 <a:solidFill>
                   <a:srgbClr val="333333"/>
                 </a:solidFill>
@@ -20275,7 +20270,7 @@
               </a:rPr>
               <a:t> </a:t>
             </a:r>
-            <a:endParaRPr lang="en-US" altLang="zh-CN" dirty="0">
+            <a:endParaRPr lang="en-US" altLang="zh-CN" sz="2800" dirty="0">
               <a:solidFill>
                 <a:srgbClr val="333333"/>
               </a:solidFill>
@@ -20290,7 +20285,7 @@
               </a:lnSpc>
             </a:pPr>
             <a:r>
-              <a:rPr lang="en-US" altLang="zh-CN" dirty="0">
+              <a:rPr lang="en-US" altLang="zh-CN" sz="2800" dirty="0">
                 <a:solidFill>
                   <a:srgbClr val="333333"/>
                 </a:solidFill>
@@ -20300,7 +20295,7 @@
               <a:t>WGS84</a:t>
             </a:r>
             <a:r>
-              <a:rPr lang="zh-CN" altLang="en-US" dirty="0">
+              <a:rPr lang="zh-CN" altLang="en-US" sz="2800" dirty="0">
                 <a:solidFill>
                   <a:srgbClr val="333333"/>
                 </a:solidFill>
@@ -20310,7 +20305,7 @@
               <a:t>坐标系下</a:t>
             </a:r>
             <a:r>
-              <a:rPr lang="en-US" altLang="zh-CN" dirty="0">
+              <a:rPr lang="en-US" altLang="zh-CN" sz="2800" dirty="0">
                 <a:solidFill>
                   <a:srgbClr val="333333"/>
                 </a:solidFill>
@@ -20320,7 +20315,7 @@
               <a:t>UTM</a:t>
             </a:r>
             <a:r>
-              <a:rPr lang="zh-CN" altLang="en-US" dirty="0">
+              <a:rPr lang="zh-CN" altLang="en-US" sz="2800" dirty="0">
                 <a:solidFill>
                   <a:srgbClr val="333333"/>
                 </a:solidFill>
@@ -20330,7 +20325,7 @@
               <a:t>投影，则编码为</a:t>
             </a:r>
             <a:r>
-              <a:rPr lang="en-US" altLang="zh-CN" dirty="0">
+              <a:rPr lang="en-US" altLang="zh-CN" sz="2800" dirty="0">
                 <a:solidFill>
                   <a:srgbClr val="333333"/>
                 </a:solidFill>
@@ -20340,7 +20335,7 @@
               <a:t>326xx</a:t>
             </a:r>
             <a:r>
-              <a:rPr lang="zh-CN" altLang="en-US" dirty="0">
+              <a:rPr lang="zh-CN" altLang="en-US" sz="2800" dirty="0">
                 <a:solidFill>
                   <a:srgbClr val="333333"/>
                 </a:solidFill>
@@ -20350,7 +20345,7 @@
               <a:t>，</a:t>
             </a:r>
             <a:r>
-              <a:rPr lang="en-US" altLang="zh-CN" dirty="0">
+              <a:rPr lang="en-US" altLang="zh-CN" sz="2800" dirty="0">
                 <a:solidFill>
                   <a:srgbClr val="333333"/>
                 </a:solidFill>
@@ -20360,7 +20355,7 @@
               <a:t>xx</a:t>
             </a:r>
             <a:r>
-              <a:rPr lang="zh-CN" altLang="en-US" dirty="0">
+              <a:rPr lang="zh-CN" altLang="en-US" sz="2800" dirty="0">
                 <a:solidFill>
                   <a:srgbClr val="333333"/>
                 </a:solidFill>
@@ -20369,7 +20364,7 @@
               </a:rPr>
               <a:t>为投影带。</a:t>
             </a:r>
-            <a:endParaRPr lang="en-US" altLang="zh-CN" dirty="0">
+            <a:endParaRPr lang="en-US" altLang="zh-CN" sz="2800" dirty="0">
               <a:solidFill>
                 <a:srgbClr val="333333"/>
               </a:solidFill>
@@ -20393,7 +20388,7 @@
         </p:nvSpPr>
         <p:spPr>
           <a:xfrm>
-            <a:off x="6523160" y="6413005"/>
+            <a:off x="9399711" y="6222505"/>
             <a:ext cx="2490211" cy="369332"/>
           </a:xfrm>
           <a:prstGeom prst="rect">
@@ -20493,8 +20488,8 @@
         </p:nvSpPr>
         <p:spPr>
           <a:xfrm>
-            <a:off x="0" y="8526"/>
-            <a:ext cx="9013371" cy="792162"/>
+            <a:off x="1" y="8526"/>
+            <a:ext cx="10537372" cy="792162"/>
           </a:xfrm>
         </p:spPr>
         <p:txBody>
@@ -20525,8 +20520,8 @@
         </p:nvSpPr>
         <p:spPr>
           <a:xfrm>
-            <a:off x="317665" y="846748"/>
-            <a:ext cx="8508670" cy="2386038"/>
+            <a:off x="338978" y="882607"/>
+            <a:ext cx="9312110" cy="743986"/>
           </a:xfrm>
           <a:prstGeom prst="rect">
             <a:avLst/>
@@ -20545,7 +20540,7 @@
               </a:lnSpc>
             </a:pPr>
             <a:r>
-              <a:rPr lang="en-US" altLang="zh-CN" sz="2800" b="1" dirty="0">
+              <a:rPr lang="en-US" altLang="zh-CN" sz="3200" b="1" dirty="0">
                 <a:solidFill>
                   <a:srgbClr val="333333"/>
                 </a:solidFill>
@@ -20555,7 +20550,7 @@
               <a:t>Python</a:t>
             </a:r>
             <a:r>
-              <a:rPr lang="zh-CN" altLang="en-US" sz="2800" b="1" dirty="0">
+              <a:rPr lang="zh-CN" altLang="en-US" sz="3200" b="1" dirty="0">
                 <a:solidFill>
                   <a:srgbClr val="333333"/>
                 </a:solidFill>
@@ -20565,7 +20560,7 @@
               <a:t>程序设计</a:t>
             </a:r>
             <a:r>
-              <a:rPr lang="en-US" altLang="zh-CN" sz="2800" b="1" dirty="0">
+              <a:rPr lang="en-US" altLang="zh-CN" sz="3200" b="1" dirty="0">
                 <a:solidFill>
                   <a:srgbClr val="333333"/>
                 </a:solidFill>
@@ -20575,44 +20570,16 @@
               <a:t>-</a:t>
             </a:r>
             <a:r>
-              <a:rPr lang="zh-CN" altLang="en-US" sz="2800" b="1" dirty="0">
+              <a:rPr lang="zh-CN" altLang="en-US" sz="3200" b="1" dirty="0">
                 <a:solidFill>
                   <a:srgbClr val="333333"/>
                 </a:solidFill>
                 <a:latin typeface="+mn-ea"/>
                 <a:ea typeface="+mn-ea"/>
               </a:rPr>
-              <a:t>坐标转换</a:t>
-            </a:r>
-            <a:endParaRPr lang="en-US" altLang="zh-CN" sz="2800" b="1" dirty="0">
-              <a:solidFill>
-                <a:srgbClr val="333333"/>
-              </a:solidFill>
-              <a:latin typeface="+mn-ea"/>
-              <a:ea typeface="+mn-ea"/>
-            </a:endParaRPr>
-          </a:p>
-          <a:p>
-            <a:pPr algn="just">
-              <a:lnSpc>
-                <a:spcPct val="150000"/>
-              </a:lnSpc>
-            </a:pPr>
-            <a:endParaRPr lang="en-US" altLang="zh-CN" sz="2800" b="1" dirty="0">
-              <a:solidFill>
-                <a:srgbClr val="333333"/>
-              </a:solidFill>
-              <a:latin typeface="+mn-ea"/>
-              <a:ea typeface="+mn-ea"/>
-            </a:endParaRPr>
-          </a:p>
-          <a:p>
-            <a:pPr algn="just">
-              <a:lnSpc>
-                <a:spcPct val="150000"/>
-              </a:lnSpc>
-            </a:pPr>
-            <a:endParaRPr lang="en-US" altLang="zh-CN" sz="2800" b="1" dirty="0">
+              <a:t>坐标系统转换</a:t>
+            </a:r>
+            <a:endParaRPr lang="en-US" altLang="zh-CN" sz="3200" b="1" dirty="0">
               <a:solidFill>
                 <a:srgbClr val="333333"/>
               </a:solidFill>
@@ -20636,8 +20603,8 @@
         </p:nvSpPr>
         <p:spPr>
           <a:xfrm>
-            <a:off x="493775" y="1617663"/>
-            <a:ext cx="8332559" cy="2977225"/>
+            <a:off x="577290" y="1699482"/>
+            <a:ext cx="10877550" cy="662554"/>
           </a:xfrm>
           <a:prstGeom prst="rect">
             <a:avLst/>
@@ -20656,7 +20623,7 @@
               </a:lnSpc>
             </a:pPr>
             <a:r>
-              <a:rPr lang="zh-CN" altLang="en-US" sz="2200" b="1" dirty="0">
+              <a:rPr lang="zh-CN" altLang="en-US" sz="2800" b="1" dirty="0">
                 <a:solidFill>
                   <a:srgbClr val="333333"/>
                 </a:solidFill>
@@ -20666,7 +20633,7 @@
               <a:t>矢量数据重投影：</a:t>
             </a:r>
             <a:r>
-              <a:rPr lang="en-US" altLang="zh-CN" sz="2200" dirty="0" err="1">
+              <a:rPr lang="en-US" altLang="zh-CN" sz="2800" dirty="0" err="1">
                 <a:solidFill>
                   <a:srgbClr val="333333"/>
                 </a:solidFill>
@@ -20676,7 +20643,7 @@
               <a:t>geopandas.to_crs</a:t>
             </a:r>
             <a:r>
-              <a:rPr lang="en-US" altLang="zh-CN" sz="2200" dirty="0">
+              <a:rPr lang="en-US" altLang="zh-CN" sz="2800" dirty="0">
                 <a:solidFill>
                   <a:srgbClr val="333333"/>
                 </a:solidFill>
@@ -20686,7 +20653,7 @@
               <a:t>(</a:t>
             </a:r>
             <a:r>
-              <a:rPr lang="en-US" altLang="zh-CN" sz="2200" dirty="0" err="1">
+              <a:rPr lang="en-US" altLang="zh-CN" sz="2800" dirty="0" err="1">
                 <a:solidFill>
                   <a:srgbClr val="333333"/>
                 </a:solidFill>
@@ -20696,7 +20663,7 @@
               <a:t>epsg</a:t>
             </a:r>
             <a:r>
-              <a:rPr lang="en-US" altLang="zh-CN" sz="2200" dirty="0">
+              <a:rPr lang="en-US" altLang="zh-CN" sz="2800" dirty="0">
                 <a:solidFill>
                   <a:srgbClr val="333333"/>
                 </a:solidFill>
@@ -20706,7 +20673,7 @@
               <a:t>=</a:t>
             </a:r>
             <a:r>
-              <a:rPr lang="en-US" altLang="zh-CN" sz="2200" dirty="0" err="1">
+              <a:rPr lang="en-US" altLang="zh-CN" sz="2800" dirty="0" err="1">
                 <a:solidFill>
                   <a:srgbClr val="333333"/>
                 </a:solidFill>
@@ -20716,7 +20683,7 @@
               <a:t>xxxx</a:t>
             </a:r>
             <a:r>
-              <a:rPr lang="en-US" altLang="zh-CN" sz="2200" dirty="0">
+              <a:rPr lang="en-US" altLang="zh-CN" sz="2800" dirty="0">
                 <a:solidFill>
                   <a:srgbClr val="333333"/>
                 </a:solidFill>
@@ -20725,218 +20692,6 @@
               </a:rPr>
               <a:t>)</a:t>
             </a:r>
-          </a:p>
-          <a:p>
-            <a:pPr algn="just">
-              <a:lnSpc>
-                <a:spcPct val="150000"/>
-              </a:lnSpc>
-            </a:pPr>
-            <a:r>
-              <a:rPr lang="zh-CN" altLang="en-US" sz="2200" b="1" dirty="0">
-                <a:solidFill>
-                  <a:srgbClr val="333333"/>
-                </a:solidFill>
-                <a:latin typeface="+mn-ea"/>
-                <a:ea typeface="+mn-ea"/>
-              </a:rPr>
-              <a:t>栅格数据重投影</a:t>
-            </a:r>
-            <a:r>
-              <a:rPr lang="zh-CN" altLang="en-US" sz="2200" dirty="0">
-                <a:solidFill>
-                  <a:srgbClr val="333333"/>
-                </a:solidFill>
-                <a:latin typeface="+mn-ea"/>
-                <a:ea typeface="+mn-ea"/>
-              </a:rPr>
-              <a:t>：</a:t>
-            </a:r>
-            <a:endParaRPr lang="en-US" altLang="zh-CN" sz="2200" dirty="0">
-              <a:solidFill>
-                <a:srgbClr val="333333"/>
-              </a:solidFill>
-              <a:latin typeface="+mn-ea"/>
-              <a:ea typeface="+mn-ea"/>
-            </a:endParaRPr>
-          </a:p>
-          <a:p>
-            <a:pPr algn="just">
-              <a:lnSpc>
-                <a:spcPct val="150000"/>
-              </a:lnSpc>
-            </a:pPr>
-            <a:r>
-              <a:rPr lang="en-US" altLang="zh-CN" sz="2200" dirty="0" err="1">
-                <a:solidFill>
-                  <a:srgbClr val="333333"/>
-                </a:solidFill>
-                <a:latin typeface="+mn-ea"/>
-                <a:ea typeface="+mn-ea"/>
-              </a:rPr>
-              <a:t>gdal</a:t>
-            </a:r>
-            <a:r>
-              <a:rPr lang="zh-CN" altLang="en-US" sz="2200" dirty="0">
-                <a:solidFill>
-                  <a:srgbClr val="333333"/>
-                </a:solidFill>
-                <a:latin typeface="+mn-ea"/>
-                <a:ea typeface="+mn-ea"/>
-              </a:rPr>
-              <a:t>命令</a:t>
-            </a:r>
-            <a:endParaRPr lang="en-US" altLang="zh-CN" sz="2200" dirty="0">
-              <a:solidFill>
-                <a:srgbClr val="333333"/>
-              </a:solidFill>
-              <a:latin typeface="+mn-ea"/>
-              <a:ea typeface="+mn-ea"/>
-            </a:endParaRPr>
-          </a:p>
-          <a:p>
-            <a:pPr algn="just">
-              <a:lnSpc>
-                <a:spcPct val="150000"/>
-              </a:lnSpc>
-            </a:pPr>
-            <a:r>
-              <a:rPr lang="en-US" sz="2000" dirty="0" err="1">
-                <a:solidFill>
-                  <a:srgbClr val="333333"/>
-                </a:solidFill>
-                <a:latin typeface="+mn-ea"/>
-                <a:ea typeface="+mn-ea"/>
-              </a:rPr>
-              <a:t>gdalwarp</a:t>
-            </a:r>
-            <a:r>
-              <a:rPr lang="en-US" sz="2000" dirty="0">
-                <a:solidFill>
-                  <a:srgbClr val="333333"/>
-                </a:solidFill>
-                <a:latin typeface="+mn-ea"/>
-                <a:ea typeface="+mn-ea"/>
-              </a:rPr>
-              <a:t> -</a:t>
-            </a:r>
-            <a:r>
-              <a:rPr lang="en-US" sz="2000" dirty="0" err="1">
-                <a:solidFill>
-                  <a:srgbClr val="333333"/>
-                </a:solidFill>
-                <a:latin typeface="+mn-ea"/>
-                <a:ea typeface="+mn-ea"/>
-              </a:rPr>
-              <a:t>s_srs</a:t>
-            </a:r>
-            <a:r>
-              <a:rPr lang="en-US" sz="2000" dirty="0">
-                <a:solidFill>
-                  <a:srgbClr val="333333"/>
-                </a:solidFill>
-                <a:latin typeface="+mn-ea"/>
-                <a:ea typeface="+mn-ea"/>
-              </a:rPr>
-              <a:t> </a:t>
-            </a:r>
-            <a:r>
-              <a:rPr lang="en-US" sz="2000" dirty="0" err="1">
-                <a:solidFill>
-                  <a:srgbClr val="333333"/>
-                </a:solidFill>
-                <a:latin typeface="+mn-ea"/>
-                <a:ea typeface="+mn-ea"/>
-              </a:rPr>
-              <a:t>EPSG:xxxx</a:t>
-            </a:r>
-            <a:r>
-              <a:rPr lang="en-US" sz="2000" dirty="0">
-                <a:solidFill>
-                  <a:srgbClr val="333333"/>
-                </a:solidFill>
-                <a:latin typeface="+mn-ea"/>
-                <a:ea typeface="+mn-ea"/>
-              </a:rPr>
-              <a:t> -</a:t>
-            </a:r>
-            <a:r>
-              <a:rPr lang="en-US" sz="2000" dirty="0" err="1">
-                <a:solidFill>
-                  <a:srgbClr val="333333"/>
-                </a:solidFill>
-                <a:latin typeface="+mn-ea"/>
-                <a:ea typeface="+mn-ea"/>
-              </a:rPr>
-              <a:t>t_srs</a:t>
-            </a:r>
-            <a:r>
-              <a:rPr lang="en-US" sz="2000" dirty="0">
-                <a:solidFill>
-                  <a:srgbClr val="333333"/>
-                </a:solidFill>
-                <a:latin typeface="+mn-ea"/>
-                <a:ea typeface="+mn-ea"/>
-              </a:rPr>
-              <a:t> </a:t>
-            </a:r>
-            <a:r>
-              <a:rPr lang="en-US" sz="2000" dirty="0" err="1">
-                <a:solidFill>
-                  <a:srgbClr val="333333"/>
-                </a:solidFill>
-                <a:latin typeface="+mn-ea"/>
-                <a:ea typeface="+mn-ea"/>
-              </a:rPr>
-              <a:t>EPSG:xxxx</a:t>
-            </a:r>
-            <a:r>
-              <a:rPr lang="en-US" sz="2000" dirty="0">
-                <a:solidFill>
-                  <a:srgbClr val="333333"/>
-                </a:solidFill>
-                <a:latin typeface="+mn-ea"/>
-                <a:ea typeface="+mn-ea"/>
-              </a:rPr>
-              <a:t> -r bilinear </a:t>
-            </a:r>
-            <a:r>
-              <a:rPr lang="en-US" sz="2000" dirty="0" err="1">
-                <a:solidFill>
-                  <a:srgbClr val="333333"/>
-                </a:solidFill>
-                <a:latin typeface="+mn-ea"/>
-                <a:ea typeface="+mn-ea"/>
-              </a:rPr>
-              <a:t>path_in</a:t>
-            </a:r>
-            <a:r>
-              <a:rPr lang="en-US" sz="2000" dirty="0">
-                <a:solidFill>
-                  <a:srgbClr val="333333"/>
-                </a:solidFill>
-                <a:latin typeface="+mn-ea"/>
-                <a:ea typeface="+mn-ea"/>
-              </a:rPr>
-              <a:t> </a:t>
-            </a:r>
-            <a:r>
-              <a:rPr lang="en-US" sz="2000" dirty="0" err="1">
-                <a:solidFill>
-                  <a:srgbClr val="333333"/>
-                </a:solidFill>
-                <a:latin typeface="+mn-ea"/>
-                <a:ea typeface="+mn-ea"/>
-              </a:rPr>
-              <a:t>path_out</a:t>
-            </a:r>
-            <a:endParaRPr lang="en-US" altLang="zh-CN" sz="2000" dirty="0">
-              <a:solidFill>
-                <a:srgbClr val="333333"/>
-              </a:solidFill>
-              <a:latin typeface="+mn-ea"/>
-              <a:ea typeface="+mn-ea"/>
-            </a:endParaRPr>
           </a:p>
         </p:txBody>
       </p:sp>
@@ -20954,7 +20709,7 @@
         </p:nvSpPr>
         <p:spPr>
           <a:xfrm>
-            <a:off x="6858000" y="6349151"/>
+            <a:off x="338978" y="6277414"/>
             <a:ext cx="2155371" cy="369332"/>
           </a:xfrm>
           <a:prstGeom prst="rect">
@@ -21000,6 +20755,187 @@
               <a:t>附代码演示</a:t>
             </a:r>
             <a:endParaRPr lang="en-CN" sz="1800" dirty="0">
+              <a:solidFill>
+                <a:schemeClr val="accent2"/>
+              </a:solidFill>
+              <a:latin typeface="+mn-ea"/>
+              <a:ea typeface="+mn-ea"/>
+            </a:endParaRPr>
+          </a:p>
+        </p:txBody>
+      </p:sp>
+      <p:pic>
+        <p:nvPicPr>
+          <p:cNvPr id="5" name="图片 4">
+            <a:extLst>
+              <a:ext uri="{FF2B5EF4-FFF2-40B4-BE49-F238E27FC236}">
+                <a16:creationId xmlns:a16="http://schemas.microsoft.com/office/drawing/2014/main" id="{8EC98EF1-0BE6-7C2C-D157-98CAC4812695}"/>
+              </a:ext>
+            </a:extLst>
+          </p:cNvPr>
+          <p:cNvPicPr>
+            <a:picLocks noChangeAspect="1"/>
+          </p:cNvPicPr>
+          <p:nvPr/>
+        </p:nvPicPr>
+        <p:blipFill>
+          <a:blip r:embed="rId3"/>
+          <a:srcRect l="2585" t="6753" r="50671" b="11386"/>
+          <a:stretch>
+            <a:fillRect/>
+          </a:stretch>
+        </p:blipFill>
+        <p:spPr>
+          <a:xfrm>
+            <a:off x="5669395" y="3038097"/>
+            <a:ext cx="3032498" cy="2968152"/>
+          </a:xfrm>
+          <a:prstGeom prst="rect">
+            <a:avLst/>
+          </a:prstGeom>
+        </p:spPr>
+      </p:pic>
+      <p:pic>
+        <p:nvPicPr>
+          <p:cNvPr id="7" name="图片 6">
+            <a:extLst>
+              <a:ext uri="{FF2B5EF4-FFF2-40B4-BE49-F238E27FC236}">
+                <a16:creationId xmlns:a16="http://schemas.microsoft.com/office/drawing/2014/main" id="{5D67457A-DAE5-1590-FD4D-1517F57B5C3C}"/>
+              </a:ext>
+            </a:extLst>
+          </p:cNvPr>
+          <p:cNvPicPr>
+            <a:picLocks noChangeAspect="1"/>
+          </p:cNvPicPr>
+          <p:nvPr/>
+        </p:nvPicPr>
+        <p:blipFill>
+          <a:blip r:embed="rId3"/>
+          <a:srcRect l="54498"/>
+          <a:stretch>
+            <a:fillRect/>
+          </a:stretch>
+        </p:blipFill>
+        <p:spPr>
+          <a:xfrm>
+            <a:off x="8993086" y="2745250"/>
+            <a:ext cx="3088574" cy="3793765"/>
+          </a:xfrm>
+          <a:prstGeom prst="rect">
+            <a:avLst/>
+          </a:prstGeom>
+        </p:spPr>
+      </p:pic>
+      <p:pic>
+        <p:nvPicPr>
+          <p:cNvPr id="9" name="图片 8">
+            <a:extLst>
+              <a:ext uri="{FF2B5EF4-FFF2-40B4-BE49-F238E27FC236}">
+                <a16:creationId xmlns:a16="http://schemas.microsoft.com/office/drawing/2014/main" id="{0384D74D-6DB4-8D57-47C1-2C694F25F5E7}"/>
+              </a:ext>
+            </a:extLst>
+          </p:cNvPr>
+          <p:cNvPicPr>
+            <a:picLocks noChangeAspect="1"/>
+          </p:cNvPicPr>
+          <p:nvPr/>
+        </p:nvPicPr>
+        <p:blipFill>
+          <a:blip r:embed="rId4"/>
+          <a:stretch>
+            <a:fillRect/>
+          </a:stretch>
+        </p:blipFill>
+        <p:spPr>
+          <a:xfrm>
+            <a:off x="628603" y="3247894"/>
+            <a:ext cx="4571988" cy="1413827"/>
+          </a:xfrm>
+          <a:prstGeom prst="rect">
+            <a:avLst/>
+          </a:prstGeom>
+          <a:ln>
+            <a:solidFill>
+              <a:schemeClr val="bg2"/>
+            </a:solidFill>
+          </a:ln>
+        </p:spPr>
+      </p:pic>
+      <p:pic>
+        <p:nvPicPr>
+          <p:cNvPr id="11" name="图片 10">
+            <a:extLst>
+              <a:ext uri="{FF2B5EF4-FFF2-40B4-BE49-F238E27FC236}">
+                <a16:creationId xmlns:a16="http://schemas.microsoft.com/office/drawing/2014/main" id="{B0C55499-E238-EFBB-CC24-0FA30285183A}"/>
+              </a:ext>
+            </a:extLst>
+          </p:cNvPr>
+          <p:cNvPicPr>
+            <a:picLocks noChangeAspect="1"/>
+          </p:cNvPicPr>
+          <p:nvPr/>
+        </p:nvPicPr>
+        <p:blipFill>
+          <a:blip r:embed="rId5"/>
+          <a:srcRect l="33815"/>
+          <a:stretch>
+            <a:fillRect/>
+          </a:stretch>
+        </p:blipFill>
+        <p:spPr>
+          <a:xfrm>
+            <a:off x="146060" y="5234319"/>
+            <a:ext cx="5523335" cy="447720"/>
+          </a:xfrm>
+          <a:prstGeom prst="rect">
+            <a:avLst/>
+          </a:prstGeom>
+          <a:ln>
+            <a:solidFill>
+              <a:schemeClr val="bg2"/>
+            </a:solidFill>
+          </a:ln>
+        </p:spPr>
+      </p:pic>
+      <p:sp>
+        <p:nvSpPr>
+          <p:cNvPr id="12" name="文本框 11">
+            <a:extLst>
+              <a:ext uri="{FF2B5EF4-FFF2-40B4-BE49-F238E27FC236}">
+                <a16:creationId xmlns:a16="http://schemas.microsoft.com/office/drawing/2014/main" id="{E43B9EF8-78E3-A4D7-7F89-D91E13515E07}"/>
+              </a:ext>
+            </a:extLst>
+          </p:cNvPr>
+          <p:cNvSpPr txBox="1"/>
+          <p:nvPr/>
+        </p:nvSpPr>
+        <p:spPr>
+          <a:xfrm>
+            <a:off x="1805749" y="2434925"/>
+            <a:ext cx="8731624" cy="523220"/>
+          </a:xfrm>
+          <a:prstGeom prst="rect">
+            <a:avLst/>
+          </a:prstGeom>
+          <a:noFill/>
+        </p:spPr>
+        <p:txBody>
+          <a:bodyPr wrap="square" rtlCol="0">
+            <a:spAutoFit/>
+          </a:bodyPr>
+          <a:lstStyle/>
+          <a:p>
+            <a:r>
+              <a:rPr lang="en-US" altLang="zh-CN" sz="2800" b="1" dirty="0">
+                <a:solidFill>
+                  <a:schemeClr val="accent2"/>
+                </a:solidFill>
+                <a:latin typeface="+mn-ea"/>
+                <a:ea typeface="+mn-ea"/>
+              </a:rPr>
+              <a:t>WGS84 -&gt; UTM</a:t>
+            </a:r>
+            <a:endParaRPr lang="zh-CN" altLang="en-US" sz="2800" b="1" dirty="0">
               <a:solidFill>
                 <a:schemeClr val="accent2"/>
               </a:solidFill>
@@ -21044,56 +20980,118 @@
       </p:grpSpPr>
       <p:sp>
         <p:nvSpPr>
-          <p:cNvPr id="3" name="矩形 2"/>
-          <p:cNvSpPr/>
+          <p:cNvPr id="2" name="灯片编号占位符 1">
+            <a:extLst>
+              <a:ext uri="{FF2B5EF4-FFF2-40B4-BE49-F238E27FC236}">
+                <a16:creationId xmlns:a16="http://schemas.microsoft.com/office/drawing/2014/main" id="{F9FFE800-9D38-F3E4-80E5-AD4465A538DD}"/>
+              </a:ext>
+            </a:extLst>
+          </p:cNvPr>
+          <p:cNvSpPr>
+            <a:spLocks noGrp="1"/>
+          </p:cNvSpPr>
+          <p:nvPr>
+            <p:ph type="sldNum" sz="quarter" idx="12"/>
+          </p:nvPr>
+        </p:nvSpPr>
+        <p:spPr/>
+        <p:txBody>
+          <a:bodyPr/>
+          <a:lstStyle/>
+          <a:p>
+            <a:r>
+              <a:rPr lang="en-US" altLang="zh-CN">
+                <a:solidFill>
+                  <a:prstClr val="black">
+                    <a:tint val="75000"/>
+                  </a:prstClr>
+                </a:solidFill>
+              </a:rPr>
+              <a:t>Page </a:t>
+            </a:r>
+            <a:fld id="{5B7D6B44-8869-44D6-9B46-FD9D3C769EB1}" type="slidenum">
+              <a:rPr lang="zh-CN" altLang="en-US" smtClean="0">
+                <a:solidFill>
+                  <a:prstClr val="black">
+                    <a:tint val="75000"/>
+                  </a:prstClr>
+                </a:solidFill>
+              </a:rPr>
+              <a:pPr/>
+              <a:t>8</a:t>
+            </a:fld>
+            <a:endParaRPr lang="zh-CN" altLang="en-US">
+              <a:solidFill>
+                <a:prstClr val="black">
+                  <a:tint val="75000"/>
+                </a:prstClr>
+              </a:solidFill>
+            </a:endParaRPr>
+          </a:p>
+        </p:txBody>
+      </p:sp>
+      <p:sp>
+        <p:nvSpPr>
+          <p:cNvPr id="3" name="标题 2">
+            <a:extLst>
+              <a:ext uri="{FF2B5EF4-FFF2-40B4-BE49-F238E27FC236}">
+                <a16:creationId xmlns:a16="http://schemas.microsoft.com/office/drawing/2014/main" id="{F9C39B20-D1B2-F59A-2A78-878C6D66267C}"/>
+              </a:ext>
+            </a:extLst>
+          </p:cNvPr>
+          <p:cNvSpPr>
+            <a:spLocks noGrp="1"/>
+          </p:cNvSpPr>
+          <p:nvPr>
+            <p:ph type="title"/>
+          </p:nvPr>
+        </p:nvSpPr>
+        <p:spPr/>
+        <p:txBody>
+          <a:bodyPr/>
+          <a:lstStyle/>
+          <a:p>
+            <a:r>
+              <a:rPr lang="zh-CN" altLang="en-US" dirty="0">
+                <a:latin typeface="微软雅黑" pitchFamily="34" charset="-122"/>
+                <a:ea typeface="微软雅黑" pitchFamily="34" charset="-122"/>
+              </a:rPr>
+              <a:t>一、矢量数据坐标系统转换及可视化</a:t>
+            </a:r>
+            <a:endParaRPr lang="zh-CN" altLang="en-US" dirty="0"/>
+          </a:p>
+        </p:txBody>
+      </p:sp>
+      <p:sp>
+        <p:nvSpPr>
+          <p:cNvPr id="5" name="文本框 4">
+            <a:extLst>
+              <a:ext uri="{FF2B5EF4-FFF2-40B4-BE49-F238E27FC236}">
+                <a16:creationId xmlns:a16="http://schemas.microsoft.com/office/drawing/2014/main" id="{1BCF4C59-B649-C7AB-3E94-9642F000238F}"/>
+              </a:ext>
+            </a:extLst>
+          </p:cNvPr>
+          <p:cNvSpPr txBox="1"/>
           <p:nvPr/>
         </p:nvSpPr>
         <p:spPr>
           <a:xfrm>
-            <a:off x="0" y="3471863"/>
-            <a:ext cx="9144000" cy="1543050"/>
+            <a:off x="481851" y="3002813"/>
+            <a:ext cx="10815917" cy="3739485"/>
           </a:xfrm>
           <a:prstGeom prst="rect">
             <a:avLst/>
           </a:prstGeom>
           <a:solidFill>
-            <a:schemeClr val="accent1"/>
+            <a:schemeClr val="tx1">
+              <a:lumMod val="95000"/>
+            </a:schemeClr>
           </a:solidFill>
-          <a:ln>
-            <a:noFill/>
+          <a:ln w="19050">
+            <a:solidFill>
+              <a:schemeClr val="bg2"/>
+            </a:solidFill>
           </a:ln>
-        </p:spPr>
-        <p:txBody>
-          <a:bodyPr wrap="square" lIns="0" rtlCol="0" anchor="ctr">
-            <a:noAutofit/>
-          </a:bodyPr>
-          <a:lstStyle/>
-          <a:p>
-            <a:pPr algn="l"/>
-            <a:endParaRPr lang="zh-CN" altLang="en-US" b="1">
-              <a:solidFill>
-                <a:srgbClr val="FF0000"/>
-              </a:solidFill>
-              <a:latin typeface="微软雅黑" pitchFamily="34" charset="-122"/>
-              <a:ea typeface="微软雅黑" pitchFamily="34" charset="-122"/>
-            </a:endParaRPr>
-          </a:p>
-        </p:txBody>
-      </p:sp>
-      <p:sp>
-        <p:nvSpPr>
-          <p:cNvPr id="7" name="矩形 6"/>
-          <p:cNvSpPr/>
-          <p:nvPr/>
-        </p:nvSpPr>
-        <p:spPr>
-          <a:xfrm>
-            <a:off x="189064" y="3868892"/>
-            <a:ext cx="8753057" cy="707886"/>
-          </a:xfrm>
-          <a:prstGeom prst="rect">
-            <a:avLst/>
-          </a:prstGeom>
         </p:spPr>
         <p:txBody>
           <a:bodyPr wrap="square">
@@ -21101,66 +21099,1547 @@
           </a:bodyPr>
           <a:lstStyle/>
           <a:p>
-            <a:pPr algn="l" fontAlgn="auto">
-              <a:spcBef>
-                <a:spcPts val="0"/>
-              </a:spcBef>
-              <a:spcAft>
-                <a:spcPts val="0"/>
-              </a:spcAft>
+            <a:pPr algn="just">
+              <a:lnSpc>
+                <a:spcPts val="2400"/>
+              </a:lnSpc>
+              <a:buNone/>
             </a:pPr>
             <a:r>
-              <a:rPr lang="zh-CN" altLang="en-US" sz="4000" b="1" dirty="0">
-                <a:latin typeface="微软雅黑" pitchFamily="34" charset="-122"/>
-                <a:ea typeface="微软雅黑" pitchFamily="34" charset="-122"/>
-              </a:rPr>
-              <a:t>二、地理数据坐标系统可视化</a:t>
+              <a:rPr lang="en-US" altLang="zh-CN" sz="2200" b="0" dirty="0">
+                <a:solidFill>
+                  <a:srgbClr val="AF00DB"/>
+                </a:solidFill>
+                <a:effectLst/>
+                <a:latin typeface="Consolas" panose="020B0609020204030204" pitchFamily="49" charset="0"/>
+              </a:rPr>
+              <a:t>with</a:t>
+            </a:r>
+            <a:r>
+              <a:rPr lang="en-US" altLang="zh-CN" sz="2200" b="0" dirty="0">
+                <a:solidFill>
+                  <a:srgbClr val="3B3B3B"/>
+                </a:solidFill>
+                <a:effectLst/>
+                <a:latin typeface="Consolas" panose="020B0609020204030204" pitchFamily="49" charset="0"/>
+              </a:rPr>
+              <a:t> </a:t>
+            </a:r>
+            <a:r>
+              <a:rPr lang="en-US" altLang="zh-CN" sz="2200" b="0" dirty="0" err="1">
+                <a:solidFill>
+                  <a:srgbClr val="267F99"/>
+                </a:solidFill>
+                <a:effectLst/>
+                <a:latin typeface="Consolas" panose="020B0609020204030204" pitchFamily="49" charset="0"/>
+              </a:rPr>
+              <a:t>rio</a:t>
+            </a:r>
+            <a:r>
+              <a:rPr lang="en-US" altLang="zh-CN" sz="2200" b="0" dirty="0" err="1">
+                <a:solidFill>
+                  <a:srgbClr val="3B3B3B"/>
+                </a:solidFill>
+                <a:effectLst/>
+                <a:latin typeface="Consolas" panose="020B0609020204030204" pitchFamily="49" charset="0"/>
+              </a:rPr>
+              <a:t>.</a:t>
+            </a:r>
+            <a:r>
+              <a:rPr lang="en-US" altLang="zh-CN" sz="2200" b="0" dirty="0" err="1">
+                <a:solidFill>
+                  <a:srgbClr val="795E26"/>
+                </a:solidFill>
+                <a:effectLst/>
+                <a:latin typeface="Consolas" panose="020B0609020204030204" pitchFamily="49" charset="0"/>
+              </a:rPr>
+              <a:t>open</a:t>
+            </a:r>
+            <a:r>
+              <a:rPr lang="en-US" altLang="zh-CN" sz="2200" b="0" dirty="0">
+                <a:solidFill>
+                  <a:srgbClr val="3B3B3B"/>
+                </a:solidFill>
+                <a:effectLst/>
+                <a:latin typeface="Consolas" panose="020B0609020204030204" pitchFamily="49" charset="0"/>
+              </a:rPr>
+              <a:t>(</a:t>
+            </a:r>
+            <a:r>
+              <a:rPr lang="en-US" altLang="zh-CN" sz="2200" b="0" dirty="0" err="1">
+                <a:solidFill>
+                  <a:srgbClr val="001080"/>
+                </a:solidFill>
+                <a:effectLst/>
+                <a:latin typeface="Consolas" panose="020B0609020204030204" pitchFamily="49" charset="0"/>
+              </a:rPr>
+              <a:t>fp</a:t>
+            </a:r>
+            <a:r>
+              <a:rPr lang="en-US" altLang="zh-CN" sz="2200" b="0" dirty="0">
+                <a:solidFill>
+                  <a:srgbClr val="000000"/>
+                </a:solidFill>
+                <a:effectLst/>
+                <a:latin typeface="Consolas" panose="020B0609020204030204" pitchFamily="49" charset="0"/>
+              </a:rPr>
+              <a:t>=</a:t>
+            </a:r>
+            <a:r>
+              <a:rPr lang="en-US" altLang="zh-CN" sz="2200" b="0" dirty="0">
+                <a:solidFill>
+                  <a:srgbClr val="CD3131"/>
+                </a:solidFill>
+                <a:effectLst/>
+                <a:latin typeface="Consolas" panose="020B0609020204030204" pitchFamily="49" charset="0"/>
+              </a:rPr>
+              <a:t>?</a:t>
+            </a:r>
+            <a:r>
+              <a:rPr lang="en-US" altLang="zh-CN" sz="2200" b="0" dirty="0">
+                <a:solidFill>
+                  <a:srgbClr val="3B3B3B"/>
+                </a:solidFill>
+                <a:effectLst/>
+                <a:latin typeface="Consolas" panose="020B0609020204030204" pitchFamily="49" charset="0"/>
+              </a:rPr>
+              <a:t>, </a:t>
+            </a:r>
+            <a:r>
+              <a:rPr lang="en-US" altLang="zh-CN" sz="2200" b="0" dirty="0">
+                <a:solidFill>
+                  <a:srgbClr val="001080"/>
+                </a:solidFill>
+                <a:effectLst/>
+                <a:latin typeface="Consolas" panose="020B0609020204030204" pitchFamily="49" charset="0"/>
+              </a:rPr>
+              <a:t>mode</a:t>
+            </a:r>
+            <a:r>
+              <a:rPr lang="en-US" altLang="zh-CN" sz="2200" b="0" dirty="0">
+                <a:solidFill>
+                  <a:srgbClr val="000000"/>
+                </a:solidFill>
+                <a:effectLst/>
+                <a:latin typeface="Consolas" panose="020B0609020204030204" pitchFamily="49" charset="0"/>
+              </a:rPr>
+              <a:t>=</a:t>
+            </a:r>
+            <a:r>
+              <a:rPr lang="en-US" altLang="zh-CN" sz="2200" b="0" dirty="0">
+                <a:solidFill>
+                  <a:srgbClr val="A31515"/>
+                </a:solidFill>
+                <a:effectLst/>
+                <a:latin typeface="Consolas" panose="020B0609020204030204" pitchFamily="49" charset="0"/>
+              </a:rPr>
+              <a:t>'w'</a:t>
+            </a:r>
+            <a:r>
+              <a:rPr lang="en-US" altLang="zh-CN" sz="2200" b="0" dirty="0">
+                <a:solidFill>
+                  <a:srgbClr val="3B3B3B"/>
+                </a:solidFill>
+                <a:effectLst/>
+                <a:latin typeface="Consolas" panose="020B0609020204030204" pitchFamily="49" charset="0"/>
+              </a:rPr>
+              <a:t>, </a:t>
+            </a:r>
+            <a:r>
+              <a:rPr lang="en-US" altLang="zh-CN" sz="2200" b="0" dirty="0">
+                <a:solidFill>
+                  <a:srgbClr val="001080"/>
+                </a:solidFill>
+                <a:effectLst/>
+                <a:latin typeface="Consolas" panose="020B0609020204030204" pitchFamily="49" charset="0"/>
+              </a:rPr>
+              <a:t>driver</a:t>
+            </a:r>
+            <a:r>
+              <a:rPr lang="en-US" altLang="zh-CN" sz="2200" b="0" dirty="0">
+                <a:solidFill>
+                  <a:srgbClr val="000000"/>
+                </a:solidFill>
+                <a:effectLst/>
+                <a:latin typeface="Consolas" panose="020B0609020204030204" pitchFamily="49" charset="0"/>
+              </a:rPr>
+              <a:t>=</a:t>
+            </a:r>
+            <a:r>
+              <a:rPr lang="en-US" altLang="zh-CN" sz="2200" b="0" dirty="0">
+                <a:solidFill>
+                  <a:srgbClr val="A31515"/>
+                </a:solidFill>
+                <a:effectLst/>
+                <a:latin typeface="Consolas" panose="020B0609020204030204" pitchFamily="49" charset="0"/>
+              </a:rPr>
+              <a:t>'</a:t>
+            </a:r>
+            <a:r>
+              <a:rPr lang="en-US" altLang="zh-CN" sz="2200" b="0" dirty="0" err="1">
+                <a:solidFill>
+                  <a:srgbClr val="A31515"/>
+                </a:solidFill>
+                <a:effectLst/>
+                <a:latin typeface="Consolas" panose="020B0609020204030204" pitchFamily="49" charset="0"/>
+              </a:rPr>
+              <a:t>GTiff</a:t>
+            </a:r>
+            <a:r>
+              <a:rPr lang="en-US" altLang="zh-CN" sz="2200" b="0" dirty="0">
+                <a:solidFill>
+                  <a:srgbClr val="A31515"/>
+                </a:solidFill>
+                <a:effectLst/>
+                <a:latin typeface="Consolas" panose="020B0609020204030204" pitchFamily="49" charset="0"/>
+              </a:rPr>
+              <a:t>'</a:t>
+            </a:r>
+            <a:r>
+              <a:rPr lang="en-US" altLang="zh-CN" sz="2200" b="0" dirty="0">
+                <a:solidFill>
+                  <a:srgbClr val="3B3B3B"/>
+                </a:solidFill>
+                <a:effectLst/>
+                <a:latin typeface="Consolas" panose="020B0609020204030204" pitchFamily="49" charset="0"/>
+              </a:rPr>
+              <a:t>, </a:t>
+            </a:r>
+          </a:p>
+          <a:p>
+            <a:pPr algn="just">
+              <a:lnSpc>
+                <a:spcPts val="2400"/>
+              </a:lnSpc>
+              <a:buNone/>
+            </a:pPr>
+            <a:r>
+              <a:rPr lang="en-US" altLang="zh-CN" sz="2200" b="0" dirty="0">
+                <a:solidFill>
+                  <a:srgbClr val="3B3B3B"/>
+                </a:solidFill>
+                <a:effectLst/>
+                <a:latin typeface="Consolas" panose="020B0609020204030204" pitchFamily="49" charset="0"/>
+              </a:rPr>
+              <a:t>              </a:t>
+            </a:r>
+            <a:r>
+              <a:rPr lang="en-US" altLang="zh-CN" sz="2200" b="0" dirty="0">
+                <a:solidFill>
+                  <a:srgbClr val="001080"/>
+                </a:solidFill>
+                <a:effectLst/>
+                <a:latin typeface="Consolas" panose="020B0609020204030204" pitchFamily="49" charset="0"/>
+              </a:rPr>
+              <a:t>height</a:t>
+            </a:r>
+            <a:r>
+              <a:rPr lang="en-US" altLang="zh-CN" sz="2200" b="0" dirty="0">
+                <a:solidFill>
+                  <a:srgbClr val="000000"/>
+                </a:solidFill>
+                <a:effectLst/>
+                <a:latin typeface="Consolas" panose="020B0609020204030204" pitchFamily="49" charset="0"/>
+              </a:rPr>
+              <a:t>=</a:t>
+            </a:r>
+            <a:r>
+              <a:rPr lang="en-US" altLang="zh-CN" sz="2200" b="0" dirty="0">
+                <a:solidFill>
+                  <a:srgbClr val="CD3131"/>
+                </a:solidFill>
+                <a:effectLst/>
+                <a:latin typeface="Consolas" panose="020B0609020204030204" pitchFamily="49" charset="0"/>
+              </a:rPr>
+              <a:t>?</a:t>
+            </a:r>
+            <a:r>
+              <a:rPr lang="en-US" altLang="zh-CN" sz="2200" b="0" dirty="0">
+                <a:solidFill>
+                  <a:srgbClr val="3B3B3B"/>
+                </a:solidFill>
+                <a:effectLst/>
+                <a:latin typeface="Consolas" panose="020B0609020204030204" pitchFamily="49" charset="0"/>
+              </a:rPr>
+              <a:t>,</a:t>
+            </a:r>
+            <a:r>
+              <a:rPr lang="en-US" altLang="zh-CN" sz="2200" b="0" dirty="0">
+                <a:solidFill>
+                  <a:srgbClr val="001080"/>
+                </a:solidFill>
+                <a:effectLst/>
+                <a:latin typeface="Consolas" panose="020B0609020204030204" pitchFamily="49" charset="0"/>
+              </a:rPr>
+              <a:t>width</a:t>
+            </a:r>
+            <a:r>
+              <a:rPr lang="en-US" altLang="zh-CN" sz="2200" b="0" dirty="0">
+                <a:solidFill>
+                  <a:srgbClr val="000000"/>
+                </a:solidFill>
+                <a:effectLst/>
+                <a:latin typeface="Consolas" panose="020B0609020204030204" pitchFamily="49" charset="0"/>
+              </a:rPr>
+              <a:t>=</a:t>
+            </a:r>
+            <a:r>
+              <a:rPr lang="en-US" altLang="zh-CN" sz="2200" b="0" dirty="0">
+                <a:solidFill>
+                  <a:srgbClr val="CD3131"/>
+                </a:solidFill>
+                <a:effectLst/>
+                <a:latin typeface="Consolas" panose="020B0609020204030204" pitchFamily="49" charset="0"/>
+              </a:rPr>
+              <a:t>?</a:t>
+            </a:r>
+            <a:r>
+              <a:rPr lang="en-US" altLang="zh-CN" sz="2200" b="0" dirty="0">
+                <a:solidFill>
+                  <a:srgbClr val="3B3B3B"/>
+                </a:solidFill>
+                <a:effectLst/>
+                <a:latin typeface="Consolas" panose="020B0609020204030204" pitchFamily="49" charset="0"/>
+              </a:rPr>
+              <a:t>,</a:t>
+            </a:r>
+            <a:r>
+              <a:rPr lang="en-US" altLang="zh-CN" sz="2200" b="0" dirty="0" err="1">
+                <a:solidFill>
+                  <a:srgbClr val="001080"/>
+                </a:solidFill>
+                <a:effectLst/>
+                <a:latin typeface="Consolas" panose="020B0609020204030204" pitchFamily="49" charset="0"/>
+              </a:rPr>
+              <a:t>dtype</a:t>
+            </a:r>
+            <a:r>
+              <a:rPr lang="en-US" altLang="zh-CN" sz="2200" b="0" dirty="0">
+                <a:solidFill>
+                  <a:srgbClr val="000000"/>
+                </a:solidFill>
+                <a:effectLst/>
+                <a:latin typeface="Consolas" panose="020B0609020204030204" pitchFamily="49" charset="0"/>
+              </a:rPr>
+              <a:t>=</a:t>
+            </a:r>
+            <a:r>
+              <a:rPr lang="en-US" altLang="zh-CN" sz="2200" b="0" dirty="0">
+                <a:solidFill>
+                  <a:srgbClr val="CD3131"/>
+                </a:solidFill>
+                <a:effectLst/>
+                <a:latin typeface="Consolas" panose="020B0609020204030204" pitchFamily="49" charset="0"/>
+              </a:rPr>
+              <a:t>?</a:t>
+            </a:r>
+            <a:r>
+              <a:rPr lang="en-US" altLang="zh-CN" sz="2200" b="0" dirty="0">
+                <a:solidFill>
+                  <a:srgbClr val="3B3B3B"/>
+                </a:solidFill>
+                <a:effectLst/>
+                <a:latin typeface="Consolas" panose="020B0609020204030204" pitchFamily="49" charset="0"/>
+              </a:rPr>
+              <a:t>, </a:t>
+            </a:r>
+            <a:r>
+              <a:rPr lang="en-US" altLang="zh-CN" sz="2200" b="0" dirty="0" err="1">
+                <a:solidFill>
+                  <a:srgbClr val="001080"/>
+                </a:solidFill>
+                <a:effectLst/>
+                <a:latin typeface="Consolas" panose="020B0609020204030204" pitchFamily="49" charset="0"/>
+              </a:rPr>
+              <a:t>crs</a:t>
+            </a:r>
+            <a:r>
+              <a:rPr lang="en-US" altLang="zh-CN" sz="2200" b="0" dirty="0">
+                <a:solidFill>
+                  <a:srgbClr val="000000"/>
+                </a:solidFill>
+                <a:effectLst/>
+                <a:latin typeface="Consolas" panose="020B0609020204030204" pitchFamily="49" charset="0"/>
+              </a:rPr>
+              <a:t>=</a:t>
+            </a:r>
+            <a:r>
+              <a:rPr lang="en-US" altLang="zh-CN" sz="2200" b="0" dirty="0">
+                <a:solidFill>
+                  <a:srgbClr val="CD3131"/>
+                </a:solidFill>
+                <a:effectLst/>
+                <a:latin typeface="Consolas" panose="020B0609020204030204" pitchFamily="49" charset="0"/>
+              </a:rPr>
+              <a:t>?</a:t>
+            </a:r>
+            <a:r>
+              <a:rPr lang="en-US" altLang="zh-CN" sz="2200" b="0" dirty="0">
+                <a:solidFill>
+                  <a:srgbClr val="3B3B3B"/>
+                </a:solidFill>
+                <a:effectLst/>
+                <a:latin typeface="Consolas" panose="020B0609020204030204" pitchFamily="49" charset="0"/>
+              </a:rPr>
+              <a:t>, </a:t>
+            </a:r>
+            <a:r>
+              <a:rPr lang="en-US" altLang="zh-CN" sz="2200" b="0" dirty="0">
+                <a:solidFill>
+                  <a:srgbClr val="001080"/>
+                </a:solidFill>
+                <a:effectLst/>
+                <a:latin typeface="Consolas" panose="020B0609020204030204" pitchFamily="49" charset="0"/>
+              </a:rPr>
+              <a:t>transform</a:t>
+            </a:r>
+            <a:r>
+              <a:rPr lang="en-US" altLang="zh-CN" sz="2200" b="0" dirty="0">
+                <a:solidFill>
+                  <a:srgbClr val="000000"/>
+                </a:solidFill>
+                <a:effectLst/>
+                <a:latin typeface="Consolas" panose="020B0609020204030204" pitchFamily="49" charset="0"/>
+              </a:rPr>
+              <a:t>=</a:t>
+            </a:r>
+            <a:r>
+              <a:rPr lang="en-US" altLang="zh-CN" sz="2200" b="0" dirty="0">
+                <a:solidFill>
+                  <a:srgbClr val="CD3131"/>
+                </a:solidFill>
+                <a:effectLst/>
+                <a:latin typeface="Consolas" panose="020B0609020204030204" pitchFamily="49" charset="0"/>
+              </a:rPr>
+              <a:t>?</a:t>
+            </a:r>
+            <a:endParaRPr lang="en-US" altLang="zh-CN" sz="2200" b="0" dirty="0">
+              <a:solidFill>
+                <a:srgbClr val="3B3B3B"/>
+              </a:solidFill>
+              <a:effectLst/>
+              <a:latin typeface="Consolas" panose="020B0609020204030204" pitchFamily="49" charset="0"/>
+            </a:endParaRPr>
+          </a:p>
+          <a:p>
+            <a:pPr algn="just">
+              <a:lnSpc>
+                <a:spcPts val="2400"/>
+              </a:lnSpc>
+              <a:buNone/>
+            </a:pPr>
+            <a:r>
+              <a:rPr lang="en-US" altLang="zh-CN" sz="2200" b="0" dirty="0">
+                <a:solidFill>
+                  <a:srgbClr val="3B3B3B"/>
+                </a:solidFill>
+                <a:effectLst/>
+                <a:latin typeface="Consolas" panose="020B0609020204030204" pitchFamily="49" charset="0"/>
+              </a:rPr>
+              <a:t>              ) </a:t>
+            </a:r>
+            <a:r>
+              <a:rPr lang="en-US" altLang="zh-CN" sz="2200" b="0" dirty="0">
+                <a:solidFill>
+                  <a:srgbClr val="AF00DB"/>
+                </a:solidFill>
+                <a:effectLst/>
+                <a:latin typeface="Consolas" panose="020B0609020204030204" pitchFamily="49" charset="0"/>
+              </a:rPr>
+              <a:t>as</a:t>
+            </a:r>
+            <a:r>
+              <a:rPr lang="en-US" altLang="zh-CN" sz="2200" b="0" dirty="0">
+                <a:solidFill>
+                  <a:srgbClr val="3B3B3B"/>
+                </a:solidFill>
+                <a:effectLst/>
+                <a:latin typeface="Consolas" panose="020B0609020204030204" pitchFamily="49" charset="0"/>
+              </a:rPr>
+              <a:t> </a:t>
+            </a:r>
+            <a:r>
+              <a:rPr lang="en-US" altLang="zh-CN" sz="2200" b="0" dirty="0" err="1">
+                <a:solidFill>
+                  <a:srgbClr val="3B3B3B"/>
+                </a:solidFill>
+                <a:effectLst/>
+                <a:latin typeface="Consolas" panose="020B0609020204030204" pitchFamily="49" charset="0"/>
+              </a:rPr>
+              <a:t>dst</a:t>
+            </a:r>
+            <a:r>
+              <a:rPr lang="en-US" altLang="zh-CN" sz="2200" b="0" dirty="0">
+                <a:solidFill>
+                  <a:srgbClr val="3B3B3B"/>
+                </a:solidFill>
+                <a:effectLst/>
+                <a:latin typeface="Consolas" panose="020B0609020204030204" pitchFamily="49" charset="0"/>
+              </a:rPr>
+              <a:t>:</a:t>
+            </a:r>
+          </a:p>
+          <a:p>
+            <a:pPr algn="just">
+              <a:lnSpc>
+                <a:spcPts val="2400"/>
+              </a:lnSpc>
+              <a:buNone/>
+            </a:pPr>
+            <a:r>
+              <a:rPr lang="en-US" altLang="zh-CN" sz="2200" b="0" dirty="0">
+                <a:solidFill>
+                  <a:srgbClr val="3B3B3B"/>
+                </a:solidFill>
+                <a:effectLst/>
+                <a:latin typeface="Consolas" panose="020B0609020204030204" pitchFamily="49" charset="0"/>
+              </a:rPr>
+              <a:t>    </a:t>
+            </a:r>
+            <a:r>
+              <a:rPr lang="en-US" altLang="zh-CN" sz="2200" b="0" dirty="0">
+                <a:solidFill>
+                  <a:srgbClr val="795E26"/>
+                </a:solidFill>
+                <a:effectLst/>
+                <a:latin typeface="Consolas" panose="020B0609020204030204" pitchFamily="49" charset="0"/>
+              </a:rPr>
+              <a:t>reproject</a:t>
+            </a:r>
+            <a:r>
+              <a:rPr lang="en-US" altLang="zh-CN" sz="2200" b="0" dirty="0">
+                <a:solidFill>
+                  <a:srgbClr val="3B3B3B"/>
+                </a:solidFill>
+                <a:effectLst/>
+                <a:latin typeface="Consolas" panose="020B0609020204030204" pitchFamily="49" charset="0"/>
+              </a:rPr>
+              <a:t>(</a:t>
+            </a:r>
+            <a:r>
+              <a:rPr lang="en-US" altLang="zh-CN" sz="2200" b="0" dirty="0">
+                <a:solidFill>
+                  <a:srgbClr val="001080"/>
+                </a:solidFill>
+                <a:effectLst/>
+                <a:latin typeface="Consolas" panose="020B0609020204030204" pitchFamily="49" charset="0"/>
+              </a:rPr>
+              <a:t>source</a:t>
+            </a:r>
+            <a:r>
+              <a:rPr lang="en-US" altLang="zh-CN" sz="2200" b="0" dirty="0">
+                <a:solidFill>
+                  <a:srgbClr val="000000"/>
+                </a:solidFill>
+                <a:effectLst/>
+                <a:latin typeface="Consolas" panose="020B0609020204030204" pitchFamily="49" charset="0"/>
+              </a:rPr>
+              <a:t>=</a:t>
+            </a:r>
+            <a:r>
+              <a:rPr lang="en-US" altLang="zh-CN" sz="2200" b="0" dirty="0">
+                <a:solidFill>
+                  <a:srgbClr val="CD3131"/>
+                </a:solidFill>
+                <a:effectLst/>
+                <a:latin typeface="Consolas" panose="020B0609020204030204" pitchFamily="49" charset="0"/>
+              </a:rPr>
+              <a:t>?</a:t>
+            </a:r>
+            <a:r>
+              <a:rPr lang="en-US" altLang="zh-CN" sz="2200" b="0" dirty="0">
+                <a:solidFill>
+                  <a:srgbClr val="3B3B3B"/>
+                </a:solidFill>
+                <a:effectLst/>
+                <a:latin typeface="Consolas" panose="020B0609020204030204" pitchFamily="49" charset="0"/>
+              </a:rPr>
+              <a:t>,  </a:t>
+            </a:r>
+            <a:r>
+              <a:rPr lang="en-US" altLang="zh-CN" sz="2200" b="0" dirty="0">
+                <a:solidFill>
+                  <a:srgbClr val="008000"/>
+                </a:solidFill>
+                <a:effectLst/>
+                <a:latin typeface="Consolas" panose="020B0609020204030204" pitchFamily="49" charset="0"/>
+              </a:rPr>
+              <a:t># </a:t>
+            </a:r>
+            <a:r>
+              <a:rPr lang="zh-CN" altLang="en-US" sz="2200" b="0" dirty="0">
+                <a:solidFill>
+                  <a:srgbClr val="008000"/>
+                </a:solidFill>
+                <a:effectLst/>
+                <a:latin typeface="Consolas" panose="020B0609020204030204" pitchFamily="49" charset="0"/>
+              </a:rPr>
+              <a:t>输入栅格数组</a:t>
+            </a:r>
+            <a:endParaRPr lang="zh-CN" altLang="en-US" sz="2200" b="0" dirty="0">
+              <a:solidFill>
+                <a:srgbClr val="3B3B3B"/>
+              </a:solidFill>
+              <a:effectLst/>
+              <a:latin typeface="Consolas" panose="020B0609020204030204" pitchFamily="49" charset="0"/>
+            </a:endParaRPr>
+          </a:p>
+          <a:p>
+            <a:pPr algn="just">
+              <a:lnSpc>
+                <a:spcPts val="2400"/>
+              </a:lnSpc>
+              <a:buNone/>
+            </a:pPr>
+            <a:r>
+              <a:rPr lang="zh-CN" altLang="en-US" sz="2200" b="0" dirty="0">
+                <a:solidFill>
+                  <a:srgbClr val="3B3B3B"/>
+                </a:solidFill>
+                <a:effectLst/>
+                <a:latin typeface="Consolas" panose="020B0609020204030204" pitchFamily="49" charset="0"/>
+              </a:rPr>
+              <a:t>            </a:t>
+            </a:r>
+            <a:r>
+              <a:rPr lang="en-US" altLang="zh-CN" sz="2200" b="0" dirty="0" err="1">
+                <a:solidFill>
+                  <a:srgbClr val="001080"/>
+                </a:solidFill>
+                <a:effectLst/>
+                <a:latin typeface="Consolas" panose="020B0609020204030204" pitchFamily="49" charset="0"/>
+              </a:rPr>
+              <a:t>src_transform</a:t>
+            </a:r>
+            <a:r>
+              <a:rPr lang="en-US" altLang="zh-CN" sz="2200" b="0" dirty="0">
+                <a:solidFill>
+                  <a:srgbClr val="000000"/>
+                </a:solidFill>
+                <a:effectLst/>
+                <a:latin typeface="Consolas" panose="020B0609020204030204" pitchFamily="49" charset="0"/>
+              </a:rPr>
+              <a:t>=</a:t>
+            </a:r>
+            <a:r>
+              <a:rPr lang="en-US" altLang="zh-CN" sz="2200" b="0" dirty="0">
+                <a:solidFill>
+                  <a:srgbClr val="CD3131"/>
+                </a:solidFill>
+                <a:effectLst/>
+                <a:latin typeface="Consolas" panose="020B0609020204030204" pitchFamily="49" charset="0"/>
+              </a:rPr>
+              <a:t>?</a:t>
+            </a:r>
+            <a:r>
+              <a:rPr lang="en-US" altLang="zh-CN" sz="2200" b="0" dirty="0">
+                <a:solidFill>
+                  <a:srgbClr val="3B3B3B"/>
+                </a:solidFill>
+                <a:effectLst/>
+                <a:latin typeface="Consolas" panose="020B0609020204030204" pitchFamily="49" charset="0"/>
+              </a:rPr>
+              <a:t>, </a:t>
+            </a:r>
+            <a:r>
+              <a:rPr lang="en-US" altLang="zh-CN" sz="2200" b="0" dirty="0" err="1">
+                <a:solidFill>
+                  <a:srgbClr val="001080"/>
+                </a:solidFill>
+                <a:effectLst/>
+                <a:latin typeface="Consolas" panose="020B0609020204030204" pitchFamily="49" charset="0"/>
+              </a:rPr>
+              <a:t>src_crs</a:t>
+            </a:r>
+            <a:r>
+              <a:rPr lang="en-US" altLang="zh-CN" sz="2200" b="0" dirty="0">
+                <a:solidFill>
+                  <a:srgbClr val="000000"/>
+                </a:solidFill>
+                <a:effectLst/>
+                <a:latin typeface="Consolas" panose="020B0609020204030204" pitchFamily="49" charset="0"/>
+              </a:rPr>
+              <a:t>=</a:t>
+            </a:r>
+            <a:r>
+              <a:rPr lang="en-US" altLang="zh-CN" sz="2200" b="0" dirty="0">
+                <a:solidFill>
+                  <a:srgbClr val="CD3131"/>
+                </a:solidFill>
+                <a:effectLst/>
+                <a:latin typeface="Consolas" panose="020B0609020204030204" pitchFamily="49" charset="0"/>
+              </a:rPr>
+              <a:t>?</a:t>
+            </a:r>
+            <a:r>
+              <a:rPr lang="en-US" altLang="zh-CN" sz="2200" b="0" dirty="0">
+                <a:solidFill>
+                  <a:srgbClr val="3B3B3B"/>
+                </a:solidFill>
+                <a:effectLst/>
+                <a:latin typeface="Consolas" panose="020B0609020204030204" pitchFamily="49" charset="0"/>
+              </a:rPr>
+              <a:t>, </a:t>
+            </a:r>
+            <a:r>
+              <a:rPr lang="en-US" altLang="zh-CN" sz="2200" b="0" dirty="0" err="1">
+                <a:solidFill>
+                  <a:srgbClr val="001080"/>
+                </a:solidFill>
+                <a:effectLst/>
+                <a:latin typeface="Consolas" panose="020B0609020204030204" pitchFamily="49" charset="0"/>
+              </a:rPr>
+              <a:t>src_nodata</a:t>
+            </a:r>
+            <a:r>
+              <a:rPr lang="en-US" altLang="zh-CN" sz="2200" b="0" dirty="0">
+                <a:solidFill>
+                  <a:srgbClr val="000000"/>
+                </a:solidFill>
+                <a:effectLst/>
+                <a:latin typeface="Consolas" panose="020B0609020204030204" pitchFamily="49" charset="0"/>
+              </a:rPr>
+              <a:t>=</a:t>
+            </a:r>
+            <a:r>
+              <a:rPr lang="en-US" altLang="zh-CN" sz="2200" b="0" dirty="0">
+                <a:solidFill>
+                  <a:srgbClr val="CD3131"/>
+                </a:solidFill>
+                <a:effectLst/>
+                <a:latin typeface="Consolas" panose="020B0609020204030204" pitchFamily="49" charset="0"/>
+              </a:rPr>
+              <a:t>?</a:t>
+            </a:r>
+            <a:r>
+              <a:rPr lang="en-US" altLang="zh-CN" sz="2200" b="0" dirty="0">
+                <a:solidFill>
+                  <a:srgbClr val="3B3B3B"/>
+                </a:solidFill>
+                <a:effectLst/>
+                <a:latin typeface="Consolas" panose="020B0609020204030204" pitchFamily="49" charset="0"/>
+              </a:rPr>
+              <a:t>,</a:t>
+            </a:r>
+          </a:p>
+          <a:p>
+            <a:pPr algn="just">
+              <a:lnSpc>
+                <a:spcPts val="2400"/>
+              </a:lnSpc>
+              <a:buNone/>
+            </a:pPr>
+            <a:r>
+              <a:rPr lang="en-US" altLang="zh-CN" sz="2200" b="0" dirty="0">
+                <a:solidFill>
+                  <a:srgbClr val="3B3B3B"/>
+                </a:solidFill>
+                <a:effectLst/>
+                <a:latin typeface="Consolas" panose="020B0609020204030204" pitchFamily="49" charset="0"/>
+              </a:rPr>
+              <a:t>            </a:t>
+            </a:r>
+            <a:r>
+              <a:rPr lang="en-US" altLang="zh-CN" sz="2200" b="0" dirty="0">
+                <a:solidFill>
+                  <a:srgbClr val="008000"/>
+                </a:solidFill>
+                <a:effectLst/>
+                <a:latin typeface="Consolas" panose="020B0609020204030204" pitchFamily="49" charset="0"/>
+              </a:rPr>
+              <a:t>## </a:t>
+            </a:r>
+            <a:r>
+              <a:rPr lang="zh-CN" altLang="en-US" sz="2200" b="0" dirty="0">
+                <a:solidFill>
+                  <a:srgbClr val="008000"/>
+                </a:solidFill>
+                <a:effectLst/>
+                <a:latin typeface="Consolas" panose="020B0609020204030204" pitchFamily="49" charset="0"/>
+              </a:rPr>
+              <a:t>重投影后数据参数</a:t>
+            </a:r>
+            <a:endParaRPr lang="zh-CN" altLang="en-US" sz="2200" b="0" dirty="0">
+              <a:solidFill>
+                <a:srgbClr val="3B3B3B"/>
+              </a:solidFill>
+              <a:effectLst/>
+              <a:latin typeface="Consolas" panose="020B0609020204030204" pitchFamily="49" charset="0"/>
+            </a:endParaRPr>
+          </a:p>
+          <a:p>
+            <a:pPr algn="just">
+              <a:lnSpc>
+                <a:spcPts val="2400"/>
+              </a:lnSpc>
+              <a:buNone/>
+            </a:pPr>
+            <a:r>
+              <a:rPr lang="zh-CN" altLang="en-US" sz="2200" b="0" dirty="0">
+                <a:solidFill>
+                  <a:srgbClr val="3B3B3B"/>
+                </a:solidFill>
+                <a:effectLst/>
+                <a:latin typeface="Consolas" panose="020B0609020204030204" pitchFamily="49" charset="0"/>
+              </a:rPr>
+              <a:t>            </a:t>
+            </a:r>
+            <a:r>
+              <a:rPr lang="en-US" altLang="zh-CN" sz="2200" b="0" dirty="0">
+                <a:solidFill>
+                  <a:srgbClr val="001080"/>
+                </a:solidFill>
+                <a:effectLst/>
+                <a:latin typeface="Consolas" panose="020B0609020204030204" pitchFamily="49" charset="0"/>
+              </a:rPr>
+              <a:t>destination</a:t>
+            </a:r>
+            <a:r>
+              <a:rPr lang="en-US" altLang="zh-CN" sz="2200" b="0" dirty="0">
+                <a:solidFill>
+                  <a:srgbClr val="000000"/>
+                </a:solidFill>
+                <a:effectLst/>
+                <a:latin typeface="Consolas" panose="020B0609020204030204" pitchFamily="49" charset="0"/>
+              </a:rPr>
+              <a:t>=</a:t>
+            </a:r>
+            <a:r>
+              <a:rPr lang="en-US" altLang="zh-CN" sz="2200" b="0" dirty="0" err="1">
+                <a:solidFill>
+                  <a:srgbClr val="3B3B3B"/>
+                </a:solidFill>
+                <a:effectLst/>
+                <a:latin typeface="Consolas" panose="020B0609020204030204" pitchFamily="49" charset="0"/>
+              </a:rPr>
+              <a:t>rio.band</a:t>
+            </a:r>
+            <a:r>
+              <a:rPr lang="en-US" altLang="zh-CN" sz="2200" b="0" dirty="0">
+                <a:solidFill>
+                  <a:srgbClr val="3B3B3B"/>
+                </a:solidFill>
+                <a:effectLst/>
+                <a:latin typeface="Consolas" panose="020B0609020204030204" pitchFamily="49" charset="0"/>
+              </a:rPr>
+              <a:t>(</a:t>
+            </a:r>
+            <a:r>
+              <a:rPr lang="en-US" altLang="zh-CN" sz="2200" b="0" dirty="0" err="1">
+                <a:solidFill>
+                  <a:srgbClr val="3B3B3B"/>
+                </a:solidFill>
+                <a:effectLst/>
+                <a:latin typeface="Consolas" panose="020B0609020204030204" pitchFamily="49" charset="0"/>
+              </a:rPr>
+              <a:t>dst</a:t>
+            </a:r>
+            <a:r>
+              <a:rPr lang="en-US" altLang="zh-CN" sz="2200" b="0" dirty="0">
+                <a:solidFill>
+                  <a:srgbClr val="3B3B3B"/>
+                </a:solidFill>
+                <a:effectLst/>
+                <a:latin typeface="Consolas" panose="020B0609020204030204" pitchFamily="49" charset="0"/>
+              </a:rPr>
+              <a:t>, i</a:t>
+            </a:r>
+            <a:r>
+              <a:rPr lang="en-US" altLang="zh-CN" sz="2200" b="0" dirty="0">
+                <a:solidFill>
+                  <a:srgbClr val="000000"/>
+                </a:solidFill>
+                <a:effectLst/>
+                <a:latin typeface="Consolas" panose="020B0609020204030204" pitchFamily="49" charset="0"/>
+              </a:rPr>
+              <a:t>+</a:t>
+            </a:r>
+            <a:r>
+              <a:rPr lang="en-US" altLang="zh-CN" sz="2200" b="0" dirty="0">
+                <a:solidFill>
+                  <a:srgbClr val="098658"/>
+                </a:solidFill>
+                <a:effectLst/>
+                <a:latin typeface="Consolas" panose="020B0609020204030204" pitchFamily="49" charset="0"/>
+              </a:rPr>
+              <a:t>1</a:t>
+            </a:r>
+            <a:r>
+              <a:rPr lang="en-US" altLang="zh-CN" sz="2200" b="0" dirty="0">
+                <a:solidFill>
+                  <a:srgbClr val="3B3B3B"/>
+                </a:solidFill>
+                <a:effectLst/>
+                <a:latin typeface="Consolas" panose="020B0609020204030204" pitchFamily="49" charset="0"/>
+              </a:rPr>
+              <a:t>),  </a:t>
+            </a:r>
+            <a:r>
+              <a:rPr lang="en-US" altLang="zh-CN" sz="2200" b="0" dirty="0">
+                <a:solidFill>
+                  <a:srgbClr val="008000"/>
+                </a:solidFill>
+                <a:effectLst/>
+                <a:latin typeface="Consolas" panose="020B0609020204030204" pitchFamily="49" charset="0"/>
+              </a:rPr>
+              <a:t># </a:t>
+            </a:r>
+            <a:r>
+              <a:rPr lang="zh-CN" altLang="en-US" sz="2200" b="0" dirty="0">
+                <a:solidFill>
+                  <a:srgbClr val="008000"/>
+                </a:solidFill>
+                <a:effectLst/>
+                <a:latin typeface="Consolas" panose="020B0609020204030204" pitchFamily="49" charset="0"/>
+              </a:rPr>
+              <a:t>目标波段</a:t>
+            </a:r>
+            <a:r>
+              <a:rPr lang="en-US" altLang="zh-CN" sz="2200" b="0" dirty="0">
+                <a:solidFill>
+                  <a:srgbClr val="008000"/>
+                </a:solidFill>
+                <a:effectLst/>
+                <a:latin typeface="Consolas" panose="020B0609020204030204" pitchFamily="49" charset="0"/>
+              </a:rPr>
+              <a:t>, </a:t>
+            </a:r>
+            <a:r>
+              <a:rPr lang="zh-CN" altLang="en-US" sz="2200" b="0" dirty="0">
+                <a:solidFill>
+                  <a:srgbClr val="008000"/>
+                </a:solidFill>
+                <a:effectLst/>
+                <a:latin typeface="Consolas" panose="020B0609020204030204" pitchFamily="49" charset="0"/>
+              </a:rPr>
+              <a:t>索引从</a:t>
+            </a:r>
+            <a:r>
+              <a:rPr lang="en-US" altLang="zh-CN" sz="2200" b="0" dirty="0">
+                <a:solidFill>
+                  <a:srgbClr val="008000"/>
+                </a:solidFill>
+                <a:effectLst/>
+                <a:latin typeface="Consolas" panose="020B0609020204030204" pitchFamily="49" charset="0"/>
+              </a:rPr>
+              <a:t>1</a:t>
+            </a:r>
+            <a:r>
+              <a:rPr lang="zh-CN" altLang="en-US" sz="2200" b="0" dirty="0">
+                <a:solidFill>
+                  <a:srgbClr val="008000"/>
+                </a:solidFill>
+                <a:effectLst/>
+                <a:latin typeface="Consolas" panose="020B0609020204030204" pitchFamily="49" charset="0"/>
+              </a:rPr>
+              <a:t>开始</a:t>
+            </a:r>
+            <a:endParaRPr lang="zh-CN" altLang="en-US" sz="2200" b="0" dirty="0">
+              <a:solidFill>
+                <a:srgbClr val="3B3B3B"/>
+              </a:solidFill>
+              <a:effectLst/>
+              <a:latin typeface="Consolas" panose="020B0609020204030204" pitchFamily="49" charset="0"/>
+            </a:endParaRPr>
+          </a:p>
+          <a:p>
+            <a:pPr algn="just">
+              <a:lnSpc>
+                <a:spcPts val="2400"/>
+              </a:lnSpc>
+              <a:buNone/>
+            </a:pPr>
+            <a:r>
+              <a:rPr lang="zh-CN" altLang="en-US" sz="2200" b="0" dirty="0">
+                <a:solidFill>
+                  <a:srgbClr val="3B3B3B"/>
+                </a:solidFill>
+                <a:effectLst/>
+                <a:latin typeface="Consolas" panose="020B0609020204030204" pitchFamily="49" charset="0"/>
+              </a:rPr>
+              <a:t>            </a:t>
+            </a:r>
+            <a:r>
+              <a:rPr lang="en-US" altLang="zh-CN" sz="2200" b="0" dirty="0" err="1">
+                <a:solidFill>
+                  <a:srgbClr val="001080"/>
+                </a:solidFill>
+                <a:effectLst/>
+                <a:latin typeface="Consolas" panose="020B0609020204030204" pitchFamily="49" charset="0"/>
+              </a:rPr>
+              <a:t>dst_transform</a:t>
+            </a:r>
+            <a:r>
+              <a:rPr lang="en-US" altLang="zh-CN" sz="2200" b="0" dirty="0">
+                <a:solidFill>
+                  <a:srgbClr val="000000"/>
+                </a:solidFill>
+                <a:effectLst/>
+                <a:latin typeface="Consolas" panose="020B0609020204030204" pitchFamily="49" charset="0"/>
+              </a:rPr>
+              <a:t>=</a:t>
+            </a:r>
+            <a:r>
+              <a:rPr lang="en-US" altLang="zh-CN" sz="2200" b="0" dirty="0">
+                <a:solidFill>
+                  <a:srgbClr val="CD3131"/>
+                </a:solidFill>
+                <a:effectLst/>
+                <a:latin typeface="Consolas" panose="020B0609020204030204" pitchFamily="49" charset="0"/>
+              </a:rPr>
+              <a:t>?</a:t>
+            </a:r>
+            <a:r>
+              <a:rPr lang="en-US" altLang="zh-CN" sz="2200" b="0" dirty="0">
+                <a:solidFill>
+                  <a:srgbClr val="3B3B3B"/>
+                </a:solidFill>
+                <a:effectLst/>
+                <a:latin typeface="Consolas" panose="020B0609020204030204" pitchFamily="49" charset="0"/>
+              </a:rPr>
+              <a:t>, </a:t>
+            </a:r>
+            <a:r>
+              <a:rPr lang="en-US" altLang="zh-CN" sz="2200" b="0" dirty="0" err="1">
+                <a:solidFill>
+                  <a:srgbClr val="001080"/>
+                </a:solidFill>
+                <a:effectLst/>
+                <a:latin typeface="Consolas" panose="020B0609020204030204" pitchFamily="49" charset="0"/>
+              </a:rPr>
+              <a:t>dst_crs</a:t>
+            </a:r>
+            <a:r>
+              <a:rPr lang="en-US" altLang="zh-CN" sz="2200" b="0" dirty="0">
+                <a:solidFill>
+                  <a:srgbClr val="000000"/>
+                </a:solidFill>
+                <a:effectLst/>
+                <a:latin typeface="Consolas" panose="020B0609020204030204" pitchFamily="49" charset="0"/>
+              </a:rPr>
+              <a:t>=</a:t>
+            </a:r>
+            <a:r>
+              <a:rPr lang="en-US" altLang="zh-CN" sz="2200" b="0" dirty="0">
+                <a:solidFill>
+                  <a:srgbClr val="CD3131"/>
+                </a:solidFill>
+                <a:effectLst/>
+                <a:latin typeface="Consolas" panose="020B0609020204030204" pitchFamily="49" charset="0"/>
+              </a:rPr>
+              <a:t>?</a:t>
+            </a:r>
+            <a:r>
+              <a:rPr lang="en-US" altLang="zh-CN" sz="2200" b="0" dirty="0">
+                <a:solidFill>
+                  <a:srgbClr val="3B3B3B"/>
+                </a:solidFill>
+                <a:effectLst/>
+                <a:latin typeface="Consolas" panose="020B0609020204030204" pitchFamily="49" charset="0"/>
+              </a:rPr>
+              <a:t>, </a:t>
+            </a:r>
+            <a:r>
+              <a:rPr lang="en-US" altLang="zh-CN" sz="2200" b="0" dirty="0">
+                <a:solidFill>
+                  <a:srgbClr val="001080"/>
+                </a:solidFill>
+                <a:effectLst/>
+                <a:latin typeface="Consolas" panose="020B0609020204030204" pitchFamily="49" charset="0"/>
+              </a:rPr>
+              <a:t>resampling</a:t>
+            </a:r>
+            <a:r>
+              <a:rPr lang="en-US" altLang="zh-CN" sz="2200" b="0" dirty="0">
+                <a:solidFill>
+                  <a:srgbClr val="000000"/>
+                </a:solidFill>
+                <a:effectLst/>
+                <a:latin typeface="Consolas" panose="020B0609020204030204" pitchFamily="49" charset="0"/>
+              </a:rPr>
+              <a:t>=</a:t>
+            </a:r>
+            <a:r>
+              <a:rPr lang="en-US" altLang="zh-CN" sz="2200" b="0" dirty="0">
+                <a:solidFill>
+                  <a:srgbClr val="CD3131"/>
+                </a:solidFill>
+                <a:effectLst/>
+                <a:latin typeface="Consolas" panose="020B0609020204030204" pitchFamily="49" charset="0"/>
+              </a:rPr>
+              <a:t>?</a:t>
+            </a:r>
+            <a:r>
+              <a:rPr lang="en-US" altLang="zh-CN" sz="2200" b="0" dirty="0">
+                <a:solidFill>
+                  <a:srgbClr val="3B3B3B"/>
+                </a:solidFill>
+                <a:effectLst/>
+                <a:latin typeface="Consolas" panose="020B0609020204030204" pitchFamily="49" charset="0"/>
+              </a:rPr>
+              <a:t>)</a:t>
             </a:r>
           </a:p>
         </p:txBody>
       </p:sp>
       <p:sp>
         <p:nvSpPr>
-          <p:cNvPr id="8" name="矩形 7"/>
-          <p:cNvSpPr/>
+          <p:cNvPr id="7" name="文本框 6">
+            <a:extLst>
+              <a:ext uri="{FF2B5EF4-FFF2-40B4-BE49-F238E27FC236}">
+                <a16:creationId xmlns:a16="http://schemas.microsoft.com/office/drawing/2014/main" id="{E9A42BBA-AA5C-EBB4-2B75-076A54E9A4B4}"/>
+              </a:ext>
+            </a:extLst>
+          </p:cNvPr>
+          <p:cNvSpPr txBox="1"/>
           <p:nvPr/>
         </p:nvSpPr>
         <p:spPr>
           <a:xfrm>
-            <a:off x="0" y="5014912"/>
-            <a:ext cx="9144000" cy="72000"/>
+            <a:off x="338045" y="907328"/>
+            <a:ext cx="3484241" cy="743986"/>
           </a:xfrm>
           <a:prstGeom prst="rect">
             <a:avLst/>
           </a:prstGeom>
-          <a:solidFill>
-            <a:schemeClr val="tx1">
-              <a:lumMod val="75000"/>
-            </a:schemeClr>
-          </a:solidFill>
-          <a:effectLst/>
+          <a:noFill/>
         </p:spPr>
         <p:txBody>
-          <a:bodyPr wrap="square" lIns="0" rtlCol="0" anchor="ctr">
-            <a:noAutofit/>
+          <a:bodyPr wrap="square">
+            <a:spAutoFit/>
           </a:bodyPr>
           <a:lstStyle/>
           <a:p>
-            <a:pPr algn="l"/>
-            <a:endParaRPr lang="zh-CN" altLang="en-US" b="1">
+            <a:pPr algn="just">
+              <a:lnSpc>
+                <a:spcPct val="150000"/>
+              </a:lnSpc>
+            </a:pPr>
+            <a:r>
+              <a:rPr lang="zh-CN" altLang="en-US" sz="3200" b="1" dirty="0">
+                <a:solidFill>
+                  <a:srgbClr val="333333"/>
+                </a:solidFill>
+                <a:latin typeface="+mn-ea"/>
+                <a:ea typeface="+mn-ea"/>
+              </a:rPr>
+              <a:t>栅格数据重投影</a:t>
+            </a:r>
+            <a:r>
+              <a:rPr lang="zh-CN" altLang="en-US" sz="3200" dirty="0">
+                <a:solidFill>
+                  <a:srgbClr val="333333"/>
+                </a:solidFill>
+                <a:latin typeface="+mn-ea"/>
+                <a:ea typeface="+mn-ea"/>
+              </a:rPr>
+              <a:t>：</a:t>
+            </a:r>
+            <a:endParaRPr lang="en-US" altLang="zh-CN" sz="3200" dirty="0">
               <a:solidFill>
-                <a:srgbClr val="FF0000"/>
+                <a:srgbClr val="333333"/>
               </a:solidFill>
-              <a:latin typeface="微软雅黑" pitchFamily="34" charset="-122"/>
-              <a:ea typeface="微软雅黑" pitchFamily="34" charset="-122"/>
+              <a:latin typeface="+mn-ea"/>
+              <a:ea typeface="+mn-ea"/>
             </a:endParaRPr>
           </a:p>
         </p:txBody>
       </p:sp>
+      <p:pic>
+        <p:nvPicPr>
+          <p:cNvPr id="9" name="图片 8">
+            <a:extLst>
+              <a:ext uri="{FF2B5EF4-FFF2-40B4-BE49-F238E27FC236}">
+                <a16:creationId xmlns:a16="http://schemas.microsoft.com/office/drawing/2014/main" id="{81A015BD-8112-2D1F-7D5B-8644E26BDE16}"/>
+              </a:ext>
+            </a:extLst>
+          </p:cNvPr>
+          <p:cNvPicPr>
+            <a:picLocks noChangeAspect="1"/>
+          </p:cNvPicPr>
+          <p:nvPr/>
+        </p:nvPicPr>
+        <p:blipFill>
+          <a:blip r:embed="rId2"/>
+          <a:stretch>
+            <a:fillRect/>
+          </a:stretch>
+        </p:blipFill>
+        <p:spPr>
+          <a:xfrm>
+            <a:off x="481851" y="1914073"/>
+            <a:ext cx="10815917" cy="989809"/>
+          </a:xfrm>
+          <a:prstGeom prst="rect">
+            <a:avLst/>
+          </a:prstGeom>
+          <a:ln w="12700">
+            <a:solidFill>
+              <a:schemeClr val="bg2"/>
+            </a:solidFill>
+          </a:ln>
+        </p:spPr>
+      </p:pic>
+      <p:sp>
+        <p:nvSpPr>
+          <p:cNvPr id="10" name="文本框 9">
+            <a:extLst>
+              <a:ext uri="{FF2B5EF4-FFF2-40B4-BE49-F238E27FC236}">
+                <a16:creationId xmlns:a16="http://schemas.microsoft.com/office/drawing/2014/main" id="{95DCA783-1F2D-2F28-8933-685B66E6EAA7}"/>
+              </a:ext>
+            </a:extLst>
+          </p:cNvPr>
+          <p:cNvSpPr txBox="1"/>
+          <p:nvPr/>
+        </p:nvSpPr>
+        <p:spPr>
+          <a:xfrm>
+            <a:off x="5573389" y="980144"/>
+            <a:ext cx="1283104" cy="830997"/>
+          </a:xfrm>
+          <a:prstGeom prst="rect">
+            <a:avLst/>
+          </a:prstGeom>
+          <a:noFill/>
+          <a:ln w="19050">
+            <a:solidFill>
+              <a:schemeClr val="bg1"/>
+            </a:solidFill>
+          </a:ln>
+        </p:spPr>
+        <p:txBody>
+          <a:bodyPr wrap="square" rtlCol="0">
+            <a:spAutoFit/>
+          </a:bodyPr>
+          <a:lstStyle/>
+          <a:p>
+            <a:r>
+              <a:rPr lang="zh-CN" altLang="en-US" b="1" dirty="0">
+                <a:solidFill>
+                  <a:schemeClr val="accent2"/>
+                </a:solidFill>
+                <a:latin typeface="+mj-ea"/>
+                <a:ea typeface="+mj-ea"/>
+              </a:rPr>
+              <a:t>重投影函数</a:t>
+            </a:r>
+          </a:p>
+        </p:txBody>
+      </p:sp>
+      <p:sp>
+        <p:nvSpPr>
+          <p:cNvPr id="11" name="文本框 10">
+            <a:extLst>
+              <a:ext uri="{FF2B5EF4-FFF2-40B4-BE49-F238E27FC236}">
+                <a16:creationId xmlns:a16="http://schemas.microsoft.com/office/drawing/2014/main" id="{928B5330-3526-7E19-3C5C-A2C61D6A1543}"/>
+              </a:ext>
+            </a:extLst>
+          </p:cNvPr>
+          <p:cNvSpPr txBox="1"/>
+          <p:nvPr/>
+        </p:nvSpPr>
+        <p:spPr>
+          <a:xfrm>
+            <a:off x="7173243" y="980144"/>
+            <a:ext cx="1142669" cy="830997"/>
+          </a:xfrm>
+          <a:prstGeom prst="rect">
+            <a:avLst/>
+          </a:prstGeom>
+          <a:noFill/>
+          <a:ln w="19050">
+            <a:solidFill>
+              <a:schemeClr val="bg1"/>
+            </a:solidFill>
+          </a:ln>
+        </p:spPr>
+        <p:txBody>
+          <a:bodyPr wrap="square" rtlCol="0">
+            <a:spAutoFit/>
+          </a:bodyPr>
+          <a:lstStyle/>
+          <a:p>
+            <a:r>
+              <a:rPr lang="zh-CN" altLang="en-US" b="1" dirty="0">
+                <a:solidFill>
+                  <a:schemeClr val="accent2"/>
+                </a:solidFill>
+                <a:latin typeface="+mj-ea"/>
+                <a:ea typeface="+mj-ea"/>
+              </a:rPr>
+              <a:t>重采样函数</a:t>
+            </a:r>
+          </a:p>
+        </p:txBody>
+      </p:sp>
+      <p:sp>
+        <p:nvSpPr>
+          <p:cNvPr id="12" name="文本框 11">
+            <a:extLst>
+              <a:ext uri="{FF2B5EF4-FFF2-40B4-BE49-F238E27FC236}">
+                <a16:creationId xmlns:a16="http://schemas.microsoft.com/office/drawing/2014/main" id="{872CAD68-7804-54E5-02F8-4844C5CC887F}"/>
+              </a:ext>
+            </a:extLst>
+          </p:cNvPr>
+          <p:cNvSpPr txBox="1"/>
+          <p:nvPr/>
+        </p:nvSpPr>
+        <p:spPr>
+          <a:xfrm>
+            <a:off x="8632662" y="989136"/>
+            <a:ext cx="1816827" cy="830997"/>
+          </a:xfrm>
+          <a:prstGeom prst="rect">
+            <a:avLst/>
+          </a:prstGeom>
+          <a:noFill/>
+          <a:ln w="19050">
+            <a:solidFill>
+              <a:schemeClr val="bg1"/>
+            </a:solidFill>
+          </a:ln>
+        </p:spPr>
+        <p:txBody>
+          <a:bodyPr wrap="square" rtlCol="0">
+            <a:spAutoFit/>
+          </a:bodyPr>
+          <a:lstStyle/>
+          <a:p>
+            <a:r>
+              <a:rPr lang="zh-CN" altLang="en-US" b="1" dirty="0">
+                <a:solidFill>
+                  <a:schemeClr val="accent2"/>
+                </a:solidFill>
+                <a:latin typeface="+mj-ea"/>
+                <a:ea typeface="+mj-ea"/>
+              </a:rPr>
+              <a:t>转换参数计算函数</a:t>
+            </a:r>
+          </a:p>
+        </p:txBody>
+      </p:sp>
+      <p:sp>
+        <p:nvSpPr>
+          <p:cNvPr id="13" name="文本框 12">
+            <a:extLst>
+              <a:ext uri="{FF2B5EF4-FFF2-40B4-BE49-F238E27FC236}">
+                <a16:creationId xmlns:a16="http://schemas.microsoft.com/office/drawing/2014/main" id="{FC980B05-A4DB-2C72-ACDD-FD623E9BE1DB}"/>
+              </a:ext>
+            </a:extLst>
+          </p:cNvPr>
+          <p:cNvSpPr txBox="1"/>
+          <p:nvPr/>
+        </p:nvSpPr>
+        <p:spPr>
+          <a:xfrm>
+            <a:off x="3822286" y="980144"/>
+            <a:ext cx="1434353" cy="830997"/>
+          </a:xfrm>
+          <a:prstGeom prst="rect">
+            <a:avLst/>
+          </a:prstGeom>
+          <a:noFill/>
+          <a:ln w="19050">
+            <a:solidFill>
+              <a:schemeClr val="bg1"/>
+            </a:solidFill>
+          </a:ln>
+        </p:spPr>
+        <p:txBody>
+          <a:bodyPr wrap="square" rtlCol="0">
+            <a:spAutoFit/>
+          </a:bodyPr>
+          <a:lstStyle/>
+          <a:p>
+            <a:r>
+              <a:rPr lang="zh-CN" altLang="en-US" b="1" dirty="0">
+                <a:solidFill>
+                  <a:schemeClr val="accent2"/>
+                </a:solidFill>
+                <a:latin typeface="+mj-ea"/>
+                <a:ea typeface="+mj-ea"/>
+              </a:rPr>
+              <a:t>投影定义函数</a:t>
+            </a:r>
+          </a:p>
+        </p:txBody>
+      </p:sp>
+      <p:cxnSp>
+        <p:nvCxnSpPr>
+          <p:cNvPr id="15" name="直接箭头连接符 14">
+            <a:extLst>
+              <a:ext uri="{FF2B5EF4-FFF2-40B4-BE49-F238E27FC236}">
+                <a16:creationId xmlns:a16="http://schemas.microsoft.com/office/drawing/2014/main" id="{AB347A2D-DCDC-A3E3-481F-BBE1E0E46AB0}"/>
+              </a:ext>
+            </a:extLst>
+          </p:cNvPr>
+          <p:cNvCxnSpPr>
+            <a:cxnSpLocks/>
+            <a:stCxn id="13" idx="2"/>
+          </p:cNvCxnSpPr>
+          <p:nvPr/>
+        </p:nvCxnSpPr>
+        <p:spPr bwMode="auto">
+          <a:xfrm flipH="1">
+            <a:off x="3610232" y="1811141"/>
+            <a:ext cx="929231" cy="863894"/>
+          </a:xfrm>
+          <a:prstGeom prst="straightConnector1">
+            <a:avLst/>
+          </a:prstGeom>
+          <a:ln w="19050">
+            <a:headEnd type="none" w="med" len="med"/>
+            <a:tailEnd type="triangle"/>
+          </a:ln>
+        </p:spPr>
+        <p:style>
+          <a:lnRef idx="1">
+            <a:schemeClr val="dk1"/>
+          </a:lnRef>
+          <a:fillRef idx="0">
+            <a:schemeClr val="dk1"/>
+          </a:fillRef>
+          <a:effectRef idx="0">
+            <a:schemeClr val="dk1"/>
+          </a:effectRef>
+          <a:fontRef idx="minor">
+            <a:schemeClr val="tx1"/>
+          </a:fontRef>
+        </p:style>
+      </p:cxnSp>
+      <p:cxnSp>
+        <p:nvCxnSpPr>
+          <p:cNvPr id="16" name="直接箭头连接符 15">
+            <a:extLst>
+              <a:ext uri="{FF2B5EF4-FFF2-40B4-BE49-F238E27FC236}">
+                <a16:creationId xmlns:a16="http://schemas.microsoft.com/office/drawing/2014/main" id="{A82AF563-DFAF-9C78-CDDE-27E130C7216C}"/>
+              </a:ext>
+            </a:extLst>
+          </p:cNvPr>
+          <p:cNvCxnSpPr>
+            <a:cxnSpLocks/>
+            <a:stCxn id="10" idx="2"/>
+          </p:cNvCxnSpPr>
+          <p:nvPr/>
+        </p:nvCxnSpPr>
+        <p:spPr bwMode="auto">
+          <a:xfrm flipH="1">
+            <a:off x="5024264" y="1811141"/>
+            <a:ext cx="1190677" cy="448712"/>
+          </a:xfrm>
+          <a:prstGeom prst="straightConnector1">
+            <a:avLst/>
+          </a:prstGeom>
+          <a:ln w="19050">
+            <a:headEnd type="none" w="med" len="med"/>
+            <a:tailEnd type="triangle"/>
+          </a:ln>
+        </p:spPr>
+        <p:style>
+          <a:lnRef idx="1">
+            <a:schemeClr val="dk1"/>
+          </a:lnRef>
+          <a:fillRef idx="0">
+            <a:schemeClr val="dk1"/>
+          </a:fillRef>
+          <a:effectRef idx="0">
+            <a:schemeClr val="dk1"/>
+          </a:effectRef>
+          <a:fontRef idx="minor">
+            <a:schemeClr val="tx1"/>
+          </a:fontRef>
+        </p:style>
+      </p:cxnSp>
+      <p:cxnSp>
+        <p:nvCxnSpPr>
+          <p:cNvPr id="23" name="直接箭头连接符 22">
+            <a:extLst>
+              <a:ext uri="{FF2B5EF4-FFF2-40B4-BE49-F238E27FC236}">
+                <a16:creationId xmlns:a16="http://schemas.microsoft.com/office/drawing/2014/main" id="{CD691697-875D-091F-B5B9-0FD204A5F15D}"/>
+              </a:ext>
+            </a:extLst>
+          </p:cNvPr>
+          <p:cNvCxnSpPr>
+            <a:cxnSpLocks/>
+            <a:stCxn id="11" idx="2"/>
+          </p:cNvCxnSpPr>
+          <p:nvPr/>
+        </p:nvCxnSpPr>
+        <p:spPr bwMode="auto">
+          <a:xfrm flipH="1">
+            <a:off x="6491098" y="1811141"/>
+            <a:ext cx="1253480" cy="448712"/>
+          </a:xfrm>
+          <a:prstGeom prst="straightConnector1">
+            <a:avLst/>
+          </a:prstGeom>
+          <a:ln w="19050">
+            <a:headEnd type="none" w="med" len="med"/>
+            <a:tailEnd type="triangle"/>
+          </a:ln>
+        </p:spPr>
+        <p:style>
+          <a:lnRef idx="1">
+            <a:schemeClr val="dk1"/>
+          </a:lnRef>
+          <a:fillRef idx="0">
+            <a:schemeClr val="dk1"/>
+          </a:fillRef>
+          <a:effectRef idx="0">
+            <a:schemeClr val="dk1"/>
+          </a:effectRef>
+          <a:fontRef idx="minor">
+            <a:schemeClr val="tx1"/>
+          </a:fontRef>
+        </p:style>
+      </p:cxnSp>
+      <p:cxnSp>
+        <p:nvCxnSpPr>
+          <p:cNvPr id="27" name="直接箭头连接符 26">
+            <a:extLst>
+              <a:ext uri="{FF2B5EF4-FFF2-40B4-BE49-F238E27FC236}">
+                <a16:creationId xmlns:a16="http://schemas.microsoft.com/office/drawing/2014/main" id="{2D5B1EF4-4F47-8DCC-E6FB-797ABA1AB8FA}"/>
+              </a:ext>
+            </a:extLst>
+          </p:cNvPr>
+          <p:cNvCxnSpPr>
+            <a:cxnSpLocks/>
+            <a:stCxn id="12" idx="2"/>
+          </p:cNvCxnSpPr>
+          <p:nvPr/>
+        </p:nvCxnSpPr>
+        <p:spPr bwMode="auto">
+          <a:xfrm flipH="1">
+            <a:off x="9177618" y="1820133"/>
+            <a:ext cx="363458" cy="439720"/>
+          </a:xfrm>
+          <a:prstGeom prst="straightConnector1">
+            <a:avLst/>
+          </a:prstGeom>
+          <a:ln w="19050">
+            <a:headEnd type="none" w="med" len="med"/>
+            <a:tailEnd type="triangle"/>
+          </a:ln>
+        </p:spPr>
+        <p:style>
+          <a:lnRef idx="1">
+            <a:schemeClr val="dk1"/>
+          </a:lnRef>
+          <a:fillRef idx="0">
+            <a:schemeClr val="dk1"/>
+          </a:fillRef>
+          <a:effectRef idx="0">
+            <a:schemeClr val="dk1"/>
+          </a:effectRef>
+          <a:fontRef idx="minor">
+            <a:schemeClr val="tx1"/>
+          </a:fontRef>
+        </p:style>
+      </p:cxnSp>
     </p:spTree>
     <p:extLst>
       <p:ext uri="{BB962C8B-B14F-4D97-AF65-F5344CB8AC3E}">
-        <p14:creationId xmlns:p14="http://schemas.microsoft.com/office/powerpoint/2010/main" val="4141385002"/>
+        <p14:creationId xmlns:p14="http://schemas.microsoft.com/office/powerpoint/2010/main" val="3238581195"/>
       </p:ext>
     </p:extLst>
   </p:cSld>
@@ -21192,55 +22671,56 @@
       </p:grpSpPr>
       <p:sp>
         <p:nvSpPr>
-          <p:cNvPr id="3" name="标题 2"/>
-          <p:cNvSpPr>
-            <a:spLocks noGrp="1"/>
-          </p:cNvSpPr>
-          <p:nvPr>
-            <p:ph type="title"/>
-          </p:nvPr>
+          <p:cNvPr id="3" name="矩形 2"/>
+          <p:cNvSpPr/>
+          <p:nvPr/>
         </p:nvSpPr>
         <p:spPr>
           <a:xfrm>
-            <a:off x="0" y="8526"/>
-            <a:ext cx="9013371" cy="792162"/>
+            <a:off x="0" y="3471863"/>
+            <a:ext cx="12192000" cy="1543050"/>
           </a:xfrm>
+          <a:prstGeom prst="rect">
+            <a:avLst/>
+          </a:prstGeom>
+          <a:solidFill>
+            <a:schemeClr val="accent1"/>
+          </a:solidFill>
+          <a:ln>
+            <a:noFill/>
+          </a:ln>
         </p:spPr>
         <p:txBody>
-          <a:bodyPr/>
+          <a:bodyPr wrap="square" lIns="0" rtlCol="0" anchor="ctr">
+            <a:noAutofit/>
+          </a:bodyPr>
           <a:lstStyle/>
           <a:p>
-            <a:r>
-              <a:rPr lang="zh-CN" altLang="en-US" dirty="0">
-                <a:latin typeface="微软雅黑" pitchFamily="34" charset="-122"/>
-                <a:ea typeface="微软雅黑" pitchFamily="34" charset="-122"/>
-              </a:rPr>
-              <a:t>二、地理坐标系</a:t>
-            </a:r>
+            <a:pPr algn="l"/>
+            <a:endParaRPr lang="zh-CN" altLang="en-US" b="1">
+              <a:solidFill>
+                <a:srgbClr val="FF0000"/>
+              </a:solidFill>
+              <a:latin typeface="微软雅黑" pitchFamily="34" charset="-122"/>
+              <a:ea typeface="微软雅黑" pitchFamily="34" charset="-122"/>
+            </a:endParaRPr>
           </a:p>
         </p:txBody>
       </p:sp>
       <p:sp>
         <p:nvSpPr>
-          <p:cNvPr id="7" name="TextBox 6">
-            <a:extLst>
-              <a:ext uri="{FF2B5EF4-FFF2-40B4-BE49-F238E27FC236}">
-                <a16:creationId xmlns:a16="http://schemas.microsoft.com/office/drawing/2014/main" id="{3DC73F52-8630-3936-0F04-2680DDF7D3C8}"/>
-              </a:ext>
-            </a:extLst>
-          </p:cNvPr>
-          <p:cNvSpPr txBox="1"/>
+          <p:cNvPr id="7" name="矩形 6"/>
+          <p:cNvSpPr/>
           <p:nvPr/>
         </p:nvSpPr>
         <p:spPr>
           <a:xfrm>
-            <a:off x="612173" y="1015961"/>
-            <a:ext cx="8188927" cy="3981988"/>
+            <a:off x="254222" y="3868892"/>
+            <a:ext cx="11670743" cy="707886"/>
           </a:xfrm>
           <a:prstGeom prst="rect">
             <a:avLst/>
           </a:prstGeom>
-          <a:noFill/>
         </p:spPr>
         <p:txBody>
           <a:bodyPr wrap="square">
@@ -21248,151 +22728,58 @@
           </a:bodyPr>
           <a:lstStyle/>
           <a:p>
-            <a:pPr algn="just">
-              <a:lnSpc>
-                <a:spcPct val="200000"/>
-              </a:lnSpc>
+            <a:pPr algn="l" fontAlgn="auto">
+              <a:spcBef>
+                <a:spcPts val="0"/>
+              </a:spcBef>
+              <a:spcAft>
+                <a:spcPts val="0"/>
+              </a:spcAft>
             </a:pPr>
             <a:r>
-              <a:rPr lang="en-US" altLang="zh-CN" sz="2800" b="1" dirty="0" err="1">
-                <a:solidFill>
-                  <a:srgbClr val="333333"/>
-                </a:solidFill>
-                <a:latin typeface="+mn-ea"/>
-                <a:ea typeface="+mn-ea"/>
-              </a:rPr>
-              <a:t>Cartopy</a:t>
-            </a:r>
-            <a:r>
-              <a:rPr lang="zh-CN" altLang="en-US" sz="2800" b="1" dirty="0">
-                <a:solidFill>
-                  <a:srgbClr val="333333"/>
-                </a:solidFill>
-                <a:latin typeface="+mn-ea"/>
-                <a:ea typeface="+mn-ea"/>
-              </a:rPr>
-              <a:t>开源库</a:t>
-            </a:r>
-            <a:endParaRPr lang="en-US" altLang="zh-CN" sz="2800" b="1" dirty="0">
+              <a:rPr lang="zh-CN" altLang="en-US" sz="4000" b="1" dirty="0">
+                <a:latin typeface="微软雅黑" pitchFamily="34" charset="-122"/>
+                <a:ea typeface="微软雅黑" pitchFamily="34" charset="-122"/>
+              </a:rPr>
+              <a:t>二、地理数据坐标系统可视化</a:t>
+            </a:r>
+          </a:p>
+        </p:txBody>
+      </p:sp>
+      <p:sp>
+        <p:nvSpPr>
+          <p:cNvPr id="8" name="矩形 7"/>
+          <p:cNvSpPr/>
+          <p:nvPr/>
+        </p:nvSpPr>
+        <p:spPr>
+          <a:xfrm>
+            <a:off x="0" y="5014912"/>
+            <a:ext cx="12192000" cy="72000"/>
+          </a:xfrm>
+          <a:prstGeom prst="rect">
+            <a:avLst/>
+          </a:prstGeom>
+          <a:solidFill>
+            <a:schemeClr val="tx1">
+              <a:lumMod val="75000"/>
+            </a:schemeClr>
+          </a:solidFill>
+          <a:effectLst/>
+        </p:spPr>
+        <p:txBody>
+          <a:bodyPr wrap="square" lIns="0" rtlCol="0" anchor="ctr">
+            <a:noAutofit/>
+          </a:bodyPr>
+          <a:lstStyle/>
+          <a:p>
+            <a:pPr algn="l"/>
+            <a:endParaRPr lang="zh-CN" altLang="en-US" b="1">
               <a:solidFill>
-                <a:srgbClr val="333333"/>
+                <a:srgbClr val="FF0000"/>
               </a:solidFill>
-              <a:latin typeface="+mn-ea"/>
-              <a:ea typeface="+mn-ea"/>
-            </a:endParaRPr>
-          </a:p>
-          <a:p>
-            <a:pPr algn="just">
-              <a:lnSpc>
-                <a:spcPct val="200000"/>
-              </a:lnSpc>
-            </a:pPr>
-            <a:r>
-              <a:rPr lang="zh-CN" altLang="en-US" b="1" dirty="0">
-                <a:solidFill>
-                  <a:srgbClr val="333333"/>
-                </a:solidFill>
-                <a:latin typeface="+mn-ea"/>
-                <a:ea typeface="+mn-ea"/>
-              </a:rPr>
-              <a:t>简介：</a:t>
-            </a:r>
-            <a:r>
-              <a:rPr lang="en-US" altLang="zh-CN" dirty="0" err="1">
-                <a:solidFill>
-                  <a:srgbClr val="333333"/>
-                </a:solidFill>
-                <a:latin typeface="+mn-ea"/>
-                <a:ea typeface="+mn-ea"/>
-              </a:rPr>
-              <a:t>C</a:t>
-            </a:r>
-            <a:r>
-              <a:rPr lang="en-US" dirty="0" err="1">
-                <a:solidFill>
-                  <a:srgbClr val="333333"/>
-                </a:solidFill>
-                <a:latin typeface="+mn-ea"/>
-                <a:ea typeface="+mn-ea"/>
-              </a:rPr>
-              <a:t>artopy</a:t>
-            </a:r>
-            <a:r>
-              <a:rPr lang="zh-CN" altLang="en-US" dirty="0">
-                <a:solidFill>
-                  <a:srgbClr val="333333"/>
-                </a:solidFill>
-                <a:latin typeface="+mn-ea"/>
-                <a:ea typeface="+mn-ea"/>
-              </a:rPr>
-              <a:t>是英国气象局开发的用于绘制地图投影和地理数据可视化的</a:t>
-            </a:r>
-            <a:r>
-              <a:rPr lang="en-US" dirty="0">
-                <a:solidFill>
-                  <a:srgbClr val="333333"/>
-                </a:solidFill>
-                <a:latin typeface="+mn-ea"/>
-                <a:ea typeface="+mn-ea"/>
-              </a:rPr>
-              <a:t>Python</a:t>
-            </a:r>
-            <a:r>
-              <a:rPr lang="zh-CN" altLang="en-US" dirty="0">
-                <a:solidFill>
-                  <a:srgbClr val="333333"/>
-                </a:solidFill>
-                <a:latin typeface="+mn-ea"/>
-                <a:ea typeface="+mn-ea"/>
-              </a:rPr>
-              <a:t>库。 </a:t>
-            </a:r>
-            <a:r>
-              <a:rPr lang="en-US" altLang="zh-CN" dirty="0" err="1">
-                <a:solidFill>
-                  <a:srgbClr val="333333"/>
-                </a:solidFill>
-                <a:latin typeface="+mn-ea"/>
-                <a:ea typeface="+mn-ea"/>
-              </a:rPr>
-              <a:t>Cartopy</a:t>
-            </a:r>
-            <a:r>
-              <a:rPr lang="zh-CN" altLang="en-US" dirty="0">
-                <a:solidFill>
-                  <a:srgbClr val="333333"/>
-                </a:solidFill>
-                <a:latin typeface="+mn-ea"/>
-                <a:ea typeface="+mn-ea"/>
-              </a:rPr>
-              <a:t>基于</a:t>
-            </a:r>
-            <a:r>
-              <a:rPr lang="en-US" altLang="zh-CN" dirty="0">
-                <a:solidFill>
-                  <a:srgbClr val="333333"/>
-                </a:solidFill>
-                <a:latin typeface="+mn-ea"/>
-                <a:ea typeface="+mn-ea"/>
-              </a:rPr>
-              <a:t>matplotlib</a:t>
-            </a:r>
-            <a:r>
-              <a:rPr lang="zh-CN" altLang="en-US" dirty="0">
-                <a:solidFill>
-                  <a:srgbClr val="333333"/>
-                </a:solidFill>
-                <a:latin typeface="+mn-ea"/>
-                <a:ea typeface="+mn-ea"/>
-              </a:rPr>
-              <a:t>构建编程接口，具备高效处理地理数据和投影的功能，利用其制作地图简单、直观。</a:t>
-            </a:r>
-            <a:endParaRPr lang="en-US" altLang="zh-CN" dirty="0">
-              <a:solidFill>
-                <a:srgbClr val="333333"/>
-              </a:solidFill>
-              <a:latin typeface="+mn-ea"/>
-              <a:ea typeface="+mn-ea"/>
+              <a:latin typeface="微软雅黑" pitchFamily="34" charset="-122"/>
+              <a:ea typeface="微软雅黑" pitchFamily="34" charset="-122"/>
             </a:endParaRPr>
           </a:p>
         </p:txBody>
@@ -21400,7 +22787,7 @@
     </p:spTree>
     <p:extLst>
       <p:ext uri="{BB962C8B-B14F-4D97-AF65-F5344CB8AC3E}">
-        <p14:creationId xmlns:p14="http://schemas.microsoft.com/office/powerpoint/2010/main" val="2576220137"/>
+        <p14:creationId xmlns:p14="http://schemas.microsoft.com/office/powerpoint/2010/main" val="4141385002"/>
       </p:ext>
     </p:extLst>
   </p:cSld>

--- a/第4章-空间参考与坐标转换/第2节-坐标转换及可视化.pptx
+++ b/第4章-空间参考与坐标转换/第2节-坐标转换及可视化.pptx
@@ -8924,7 +8924,7 @@
               </a14:hiddenFill>
             </a:ext>
             <a:ext uri="{FAA26D3D-D897-4be2-8F04-BA451C77F1D7}">
-              <ma14:placeholderFlag xmlns:ma14="http://schemas.microsoft.com/office/mac/drawingml/2011/main" xmlns="" val="1"/>
+              <ma14:placeholderFlag xmlns="" xmlns:ma14="http://schemas.microsoft.com/office/mac/drawingml/2011/main" val="1"/>
             </a:ext>
           </a:extLst>
         </p:spPr>
@@ -9312,7 +9312,7 @@
               </a14:hiddenLine>
             </a:ext>
             <a:ext uri="{FAA26D3D-D897-4be2-8F04-BA451C77F1D7}">
-              <ma14:placeholderFlag xmlns:ma14="http://schemas.microsoft.com/office/mac/drawingml/2011/main" xmlns="" val="1"/>
+              <ma14:placeholderFlag xmlns="" xmlns:ma14="http://schemas.microsoft.com/office/mac/drawingml/2011/main" val="1"/>
             </a:ext>
           </a:extLst>
         </p:spPr>
@@ -11917,7 +11917,7 @@
               </a14:hiddenLine>
             </a:ext>
             <a:ext uri="{FAA26D3D-D897-4be2-8F04-BA451C77F1D7}">
-              <ma14:placeholderFlag xmlns:ma14="http://schemas.microsoft.com/office/mac/drawingml/2011/main" xmlns="" val="1"/>
+              <ma14:placeholderFlag xmlns="" xmlns:ma14="http://schemas.microsoft.com/office/mac/drawingml/2011/main" val="1"/>
             </a:ext>
           </a:extLst>
         </p:spPr>
@@ -15613,7 +15613,7 @@
               </a14:hiddenLine>
             </a:ext>
             <a:ext uri="{FAA26D3D-D897-4be2-8F04-BA451C77F1D7}">
-              <ma14:placeholderFlag xmlns:ma14="http://schemas.microsoft.com/office/mac/drawingml/2011/main" xmlns="" val="1"/>
+              <ma14:placeholderFlag xmlns="" xmlns:ma14="http://schemas.microsoft.com/office/mac/drawingml/2011/main" val="1"/>
             </a:ext>
           </a:extLst>
         </p:spPr>
@@ -17812,7 +17812,47 @@
                 <a:latin typeface="+mn-ea"/>
                 <a:ea typeface="+mn-ea"/>
               </a:rPr>
-              <a:t>是英国气象局开发的用于绘制地图投影和地理数据可视化的</a:t>
+              <a:t>是</a:t>
+            </a:r>
+            <a:r>
+              <a:rPr lang="zh-CN" altLang="en-US" sz="2800" b="1" dirty="0">
+                <a:solidFill>
+                  <a:srgbClr val="333333"/>
+                </a:solidFill>
+                <a:latin typeface="+mn-ea"/>
+                <a:ea typeface="+mn-ea"/>
+              </a:rPr>
+              <a:t>英国气象局</a:t>
+            </a:r>
+            <a:r>
+              <a:rPr lang="zh-CN" altLang="en-US" sz="2800" dirty="0">
+                <a:solidFill>
+                  <a:srgbClr val="333333"/>
+                </a:solidFill>
+                <a:latin typeface="+mn-ea"/>
+                <a:ea typeface="+mn-ea"/>
+              </a:rPr>
+              <a:t>开发的用于</a:t>
+            </a:r>
+            <a:r>
+              <a:rPr lang="zh-CN" altLang="en-US" sz="2800" b="1" dirty="0">
+                <a:solidFill>
+                  <a:srgbClr val="333333"/>
+                </a:solidFill>
+                <a:latin typeface="+mn-ea"/>
+                <a:ea typeface="+mn-ea"/>
+              </a:rPr>
+              <a:t>绘制地图投影和地理数据可视化</a:t>
+            </a:r>
+            <a:r>
+              <a:rPr lang="zh-CN" altLang="en-US" sz="2800" dirty="0">
+                <a:solidFill>
+                  <a:srgbClr val="333333"/>
+                </a:solidFill>
+                <a:latin typeface="+mn-ea"/>
+                <a:ea typeface="+mn-ea"/>
+              </a:rPr>
+              <a:t>的</a:t>
             </a:r>
             <a:r>
               <a:rPr lang="en-US" sz="2800" dirty="0">
@@ -17961,8 +18001,8 @@
         </p:nvSpPr>
         <p:spPr>
           <a:xfrm>
-            <a:off x="413657" y="1015962"/>
-            <a:ext cx="11328399" cy="5040675"/>
+            <a:off x="478118" y="1015962"/>
+            <a:ext cx="11205882" cy="5040675"/>
           </a:xfrm>
           <a:prstGeom prst="rect">
             <a:avLst/>
@@ -18032,7 +18072,7 @@
                 <a:latin typeface="+mn-ea"/>
                 <a:ea typeface="+mn-ea"/>
               </a:rPr>
-              <a:t>cartopy.crs.xxxx</a:t>
+              <a:t>cartopy.crs.xxx</a:t>
             </a:r>
             <a:r>
               <a:rPr lang="en-US" altLang="zh-CN" sz="2800" dirty="0">
@@ -18042,77 +18082,87 @@
                 <a:latin typeface="+mn-ea"/>
                 <a:ea typeface="+mn-ea"/>
               </a:rPr>
-              <a:t> (), </a:t>
-            </a:r>
-            <a:r>
-              <a:rPr lang="en-US" altLang="zh-CN" sz="2800" dirty="0" err="1">
+              <a:t>(), xxx()</a:t>
+            </a:r>
+            <a:r>
+              <a:rPr lang="zh-CN" altLang="en-US" sz="2800" dirty="0">
                 <a:solidFill>
                   <a:srgbClr val="333333"/>
                 </a:solidFill>
                 <a:latin typeface="+mn-ea"/>
                 <a:ea typeface="+mn-ea"/>
               </a:rPr>
-              <a:t>xxxx</a:t>
-            </a:r>
-            <a:r>
-              <a:rPr lang="zh-CN" altLang="en-US" sz="2800" dirty="0">
+              <a:t>为坐标系名称</a:t>
+            </a:r>
+            <a:r>
+              <a:rPr lang="en-US" altLang="zh-CN" sz="2800" dirty="0">
                 <a:solidFill>
                   <a:srgbClr val="333333"/>
                 </a:solidFill>
                 <a:latin typeface="+mn-ea"/>
                 <a:ea typeface="+mn-ea"/>
               </a:rPr>
-              <a:t>为坐标系名称。常用坐标系有</a:t>
-            </a:r>
-            <a:r>
-              <a:rPr lang="en-US" altLang="zh-CN" sz="2800" dirty="0">
+              <a:t>,</a:t>
+            </a:r>
+            <a:r>
+              <a:rPr lang="zh-CN" altLang="en-US" sz="2800" dirty="0">
                 <a:solidFill>
                   <a:srgbClr val="333333"/>
                 </a:solidFill>
                 <a:latin typeface="+mn-ea"/>
                 <a:ea typeface="+mn-ea"/>
               </a:rPr>
-              <a:t>: .</a:t>
-            </a:r>
-            <a:r>
-              <a:rPr lang="en-US" altLang="zh-CN" sz="2800" dirty="0" err="1">
+              <a:t>如</a:t>
+            </a:r>
+            <a:r>
+              <a:rPr lang="en-US" altLang="zh-CN" sz="2800" dirty="0">
                 <a:solidFill>
                   <a:srgbClr val="333333"/>
                 </a:solidFill>
                 <a:latin typeface="+mn-ea"/>
                 <a:ea typeface="+mn-ea"/>
               </a:rPr>
-              <a:t>PlateCarree</a:t>
-            </a:r>
-            <a:r>
-              <a:rPr lang="en-US" altLang="zh-CN" sz="2800" dirty="0">
+              <a:t> .</a:t>
+            </a:r>
+            <a:r>
+              <a:rPr lang="en-US" altLang="zh-CN" sz="2800" dirty="0" err="1">
                 <a:solidFill>
                   <a:srgbClr val="333333"/>
                 </a:solidFill>
                 <a:latin typeface="+mn-ea"/>
                 <a:ea typeface="+mn-ea"/>
               </a:rPr>
-              <a:t>()</a:t>
-            </a:r>
-            <a:r>
-              <a:rPr lang="zh-CN" altLang="en-US" sz="2800" dirty="0">
+              <a:t>PlateCarree</a:t>
+            </a:r>
+            <a:r>
+              <a:rPr lang="en-US" altLang="zh-CN" sz="2800" dirty="0">
                 <a:solidFill>
                   <a:srgbClr val="333333"/>
                 </a:solidFill>
                 <a:latin typeface="+mn-ea"/>
                 <a:ea typeface="+mn-ea"/>
               </a:rPr>
-              <a:t>，</a:t>
-            </a:r>
-            <a:r>
-              <a:rPr lang="en-US" altLang="zh-CN" sz="2800" dirty="0">
+              <a:t>()</a:t>
+            </a:r>
+            <a:r>
+              <a:rPr lang="zh-CN" altLang="en-US" sz="2800" dirty="0">
                 <a:solidFill>
                   <a:srgbClr val="333333"/>
                 </a:solidFill>
                 <a:latin typeface="+mn-ea"/>
                 <a:ea typeface="+mn-ea"/>
               </a:rPr>
-              <a:t>.Mercator(), UTM()..</a:t>
+              <a:t>，</a:t>
+            </a:r>
+            <a:r>
+              <a:rPr lang="en-US" altLang="zh-CN" sz="2800" dirty="0">
+                <a:solidFill>
+                  <a:srgbClr val="333333"/>
+                </a:solidFill>
+                <a:latin typeface="+mn-ea"/>
+                <a:ea typeface="+mn-ea"/>
+              </a:rPr>
+              <a:t>.Mercator(), .UTM()..</a:t>
             </a:r>
           </a:p>
           <a:p>
@@ -21076,7 +21126,7 @@
         </p:nvSpPr>
         <p:spPr>
           <a:xfrm>
-            <a:off x="481851" y="3002813"/>
+            <a:off x="672351" y="2977413"/>
             <a:ext cx="10815917" cy="3739485"/>
           </a:xfrm>
           <a:prstGeom prst="rect">
@@ -22196,7 +22246,7 @@
         </p:nvSpPr>
         <p:spPr>
           <a:xfrm>
-            <a:off x="338045" y="907328"/>
+            <a:off x="528545" y="881928"/>
             <a:ext cx="3484241" cy="743986"/>
           </a:xfrm>
           <a:prstGeom prst="rect">
@@ -22267,7 +22317,7 @@
         </p:blipFill>
         <p:spPr>
           <a:xfrm>
-            <a:off x="481851" y="1914073"/>
+            <a:off x="672351" y="1888673"/>
             <a:ext cx="10815917" cy="989809"/>
           </a:xfrm>
           <a:prstGeom prst="rect">
@@ -22294,7 +22344,7 @@
         </p:nvSpPr>
         <p:spPr>
           <a:xfrm>
-            <a:off x="5573389" y="980144"/>
+            <a:off x="5763889" y="954744"/>
             <a:ext cx="1283104" cy="830997"/>
           </a:xfrm>
           <a:prstGeom prst="rect">
@@ -22340,7 +22390,7 @@
         </p:nvSpPr>
         <p:spPr>
           <a:xfrm>
-            <a:off x="7173243" y="980144"/>
+            <a:off x="7363743" y="954744"/>
             <a:ext cx="1142669" cy="830997"/>
           </a:xfrm>
           <a:prstGeom prst="rect">
@@ -22386,7 +22436,7 @@
         </p:nvSpPr>
         <p:spPr>
           <a:xfrm>
-            <a:off x="8632662" y="989136"/>
+            <a:off x="8823162" y="963736"/>
             <a:ext cx="1816827" cy="830997"/>
           </a:xfrm>
           <a:prstGeom prst="rect">
@@ -22432,7 +22482,7 @@
         </p:nvSpPr>
         <p:spPr>
           <a:xfrm>
-            <a:off x="3822286" y="980144"/>
+            <a:off x="4012786" y="954744"/>
             <a:ext cx="1434353" cy="830997"/>
           </a:xfrm>
           <a:prstGeom prst="rect">
@@ -22481,7 +22531,7 @@
         </p:nvCxnSpPr>
         <p:spPr bwMode="auto">
           <a:xfrm flipH="1">
-            <a:off x="3610232" y="1811141"/>
+            <a:off x="3800732" y="1785741"/>
             <a:ext cx="929231" cy="863894"/>
           </a:xfrm>
           <a:prstGeom prst="straightConnector1">
@@ -22524,7 +22574,7 @@
         </p:nvCxnSpPr>
         <p:spPr bwMode="auto">
           <a:xfrm flipH="1">
-            <a:off x="5024264" y="1811141"/>
+            <a:off x="5214764" y="1785741"/>
             <a:ext cx="1190677" cy="448712"/>
           </a:xfrm>
           <a:prstGeom prst="straightConnector1">
@@ -22567,7 +22617,7 @@
         </p:nvCxnSpPr>
         <p:spPr bwMode="auto">
           <a:xfrm flipH="1">
-            <a:off x="6491098" y="1811141"/>
+            <a:off x="6681598" y="1785741"/>
             <a:ext cx="1253480" cy="448712"/>
           </a:xfrm>
           <a:prstGeom prst="straightConnector1">
@@ -22610,7 +22660,7 @@
         </p:nvCxnSpPr>
         <p:spPr bwMode="auto">
           <a:xfrm flipH="1">
-            <a:off x="9177618" y="1820133"/>
+            <a:off x="9368118" y="1794733"/>
             <a:ext cx="363458" cy="439720"/>
           </a:xfrm>
           <a:prstGeom prst="straightConnector1">
